--- a/templates/research.pptx
+++ b/templates/research.pptx
@@ -5,18 +5,19 @@
     <p:sldMasterId id="2147483648" r:id="rId1"/>
   </p:sldMasterIdLst>
   <p:notesMasterIdLst>
-    <p:notesMasterId r:id="rId8"/>
+    <p:notesMasterId r:id="rId9"/>
   </p:notesMasterIdLst>
   <p:handoutMasterIdLst>
-    <p:handoutMasterId r:id="rId9"/>
+    <p:handoutMasterId r:id="rId10"/>
   </p:handoutMasterIdLst>
   <p:sldIdLst>
     <p:sldId id="261" r:id="rId2"/>
-    <p:sldId id="262" r:id="rId3"/>
-    <p:sldId id="263" r:id="rId4"/>
-    <p:sldId id="258" r:id="rId5"/>
-    <p:sldId id="259" r:id="rId6"/>
-    <p:sldId id="260" r:id="rId7"/>
+    <p:sldId id="264" r:id="rId3"/>
+    <p:sldId id="259" r:id="rId4"/>
+    <p:sldId id="265" r:id="rId5"/>
+    <p:sldId id="258" r:id="rId6"/>
+    <p:sldId id="262" r:id="rId7"/>
+    <p:sldId id="263" r:id="rId8"/>
   </p:sldIdLst>
   <p:sldSz cx="12192000" cy="6858000"/>
   <p:notesSz cx="6858000" cy="9144000"/>
@@ -2456,7 +2457,12 @@
             <p:ph type="ctrTitle"/>
           </p:nvPr>
         </p:nvSpPr>
-        <p:spPr/>
+        <p:spPr>
+          <a:xfrm>
+            <a:off x="125506" y="772319"/>
+            <a:ext cx="11940525" cy="2656681"/>
+          </a:xfrm>
+        </p:spPr>
         <p:txBody>
           <a:bodyPr/>
           <a:lstStyle/>
@@ -2486,7 +2492,12 @@
             <p:ph type="subTitle" idx="1"/>
           </p:nvPr>
         </p:nvSpPr>
-        <p:spPr/>
+        <p:spPr>
+          <a:xfrm>
+            <a:off x="125506" y="4339531"/>
+            <a:ext cx="11940524" cy="1210860"/>
+          </a:xfrm>
+        </p:spPr>
         <p:txBody>
           <a:bodyPr/>
           <a:lstStyle/>
@@ -2535,7 +2546,7 @@
           <p:cNvPr id="2" name="タイトル 1">
             <a:extLst>
               <a:ext uri="{FF2B5EF4-FFF2-40B4-BE49-F238E27FC236}">
-                <a16:creationId xmlns:a16="http://schemas.microsoft.com/office/drawing/2014/main" id="{487FC0EA-D556-8E2A-7D9D-798D6C59D71C}"/>
+                <a16:creationId xmlns:a16="http://schemas.microsoft.com/office/drawing/2014/main" id="{CECE8689-3455-BE5B-A835-9E1771B7DEF8}"/>
               </a:ext>
             </a:extLst>
           </p:cNvPr>
@@ -2554,13 +2565,10 @@
           <a:lstStyle/>
           <a:p>
             <a:r>
-              <a:rPr kumimoji="1" lang="en-US" altLang="ja-JP" dirty="0"/>
-              <a:t>1</a:t>
-            </a:r>
-            <a:r>
-              <a:rPr kumimoji="1" lang="ja-JP" altLang="en-US" dirty="0"/>
-              <a:t>カラム テンプレート</a:t>
-            </a:r>
+              <a:rPr lang="ja-JP" altLang="en-US" dirty="0"/>
+              <a:t>スタイル規約</a:t>
+            </a:r>
+            <a:endParaRPr kumimoji="1" lang="ja-JP" altLang="en-US" dirty="0"/>
           </a:p>
         </p:txBody>
       </p:sp>
@@ -2569,7 +2577,7 @@
           <p:cNvPr id="3" name="コンテンツ プレースホルダー 2">
             <a:extLst>
               <a:ext uri="{FF2B5EF4-FFF2-40B4-BE49-F238E27FC236}">
-                <a16:creationId xmlns:a16="http://schemas.microsoft.com/office/drawing/2014/main" id="{17367776-7A7B-93E0-CD83-A6528ECA0D77}"/>
+                <a16:creationId xmlns:a16="http://schemas.microsoft.com/office/drawing/2014/main" id="{5CE9F859-FEC8-F937-27BE-12294E85F804}"/>
               </a:ext>
             </a:extLst>
           </p:cNvPr>
@@ -2585,7 +2593,197 @@
           <a:bodyPr/>
           <a:lstStyle/>
           <a:p>
-            <a:endParaRPr kumimoji="1" lang="ja-JP" altLang="en-US"/>
+            <a:pPr marL="0" indent="0">
+              <a:buNone/>
+            </a:pPr>
+            <a:r>
+              <a:rPr lang="ja-JP" altLang="en-US" dirty="0"/>
+              <a:t>・文字の大きさ</a:t>
+            </a:r>
+            <a:endParaRPr lang="en-US" altLang="ja-JP" dirty="0"/>
+          </a:p>
+          <a:p>
+            <a:pPr marL="0" indent="0">
+              <a:buNone/>
+            </a:pPr>
+            <a:r>
+              <a:rPr lang="ja-JP" altLang="en-US" dirty="0"/>
+              <a:t>インデント</a:t>
+            </a:r>
+            <a:r>
+              <a:rPr lang="en-US" altLang="ja-JP" dirty="0"/>
+              <a:t>0 28</a:t>
+            </a:r>
+            <a:r>
+              <a:rPr lang="ja-JP" altLang="en-US" dirty="0"/>
+              <a:t>ポイント</a:t>
+            </a:r>
+            <a:r>
+              <a:rPr lang="en-US" altLang="ja-JP" dirty="0"/>
+              <a:t>;</a:t>
+            </a:r>
+            <a:r>
+              <a:rPr lang="ja-JP" altLang="en-US" dirty="0"/>
+              <a:t> 標準的な文章に用いる</a:t>
+            </a:r>
+            <a:endParaRPr lang="en-US" altLang="ja-JP" dirty="0"/>
+          </a:p>
+          <a:p>
+            <a:pPr marL="457200" lvl="1" indent="0">
+              <a:buNone/>
+            </a:pPr>
+            <a:r>
+              <a:rPr lang="ja-JP" altLang="en-US" dirty="0"/>
+              <a:t>インデント</a:t>
+            </a:r>
+            <a:r>
+              <a:rPr lang="en-US" altLang="ja-JP" dirty="0"/>
+              <a:t>1 24</a:t>
+            </a:r>
+            <a:r>
+              <a:rPr lang="ja-JP" altLang="en-US" dirty="0"/>
+              <a:t>ポイント</a:t>
+            </a:r>
+            <a:r>
+              <a:rPr lang="en-US" altLang="ja-JP" dirty="0"/>
+              <a:t>; </a:t>
+            </a:r>
+            <a:r>
+              <a:rPr lang="ja-JP" altLang="en-US" dirty="0"/>
+              <a:t>注釈文等の相対的な重要度の低い文章に用いる</a:t>
+            </a:r>
+            <a:endParaRPr lang="en-US" altLang="ja-JP" dirty="0"/>
+          </a:p>
+          <a:p>
+            <a:pPr marL="914400" lvl="2" indent="0">
+              <a:buNone/>
+            </a:pPr>
+            <a:r>
+              <a:rPr lang="ja-JP" altLang="en-US" dirty="0"/>
+              <a:t>インデント</a:t>
+            </a:r>
+            <a:r>
+              <a:rPr lang="en-US" altLang="ja-JP" dirty="0"/>
+              <a:t>2</a:t>
+            </a:r>
+            <a:r>
+              <a:rPr lang="ja-JP" altLang="en-US" dirty="0"/>
+              <a:t> </a:t>
+            </a:r>
+            <a:r>
+              <a:rPr lang="en-US" altLang="ja-JP" dirty="0"/>
+              <a:t>20</a:t>
+            </a:r>
+            <a:r>
+              <a:rPr lang="ja-JP" altLang="en-US" dirty="0"/>
+              <a:t>ポイント</a:t>
+            </a:r>
+            <a:r>
+              <a:rPr lang="en-US" altLang="ja-JP" dirty="0"/>
+              <a:t>;</a:t>
+            </a:r>
+            <a:r>
+              <a:rPr lang="ja-JP" altLang="en-US" dirty="0"/>
+              <a:t> 図や表などで</a:t>
+            </a:r>
+            <a:r>
+              <a:rPr lang="en-US" altLang="ja-JP" dirty="0"/>
+              <a:t>24</a:t>
+            </a:r>
+            <a:r>
+              <a:rPr lang="ja-JP" altLang="en-US" dirty="0"/>
+              <a:t>ポイント以上に設定できない場合にのみ用いる</a:t>
+            </a:r>
+            <a:endParaRPr lang="en-US" altLang="ja-JP" dirty="0"/>
+          </a:p>
+          <a:p>
+            <a:pPr marL="0" indent="0">
+              <a:buNone/>
+            </a:pPr>
+            <a:endParaRPr lang="en-US" altLang="ja-JP" dirty="0"/>
+          </a:p>
+          <a:p>
+            <a:pPr marL="0" indent="0">
+              <a:buNone/>
+            </a:pPr>
+            <a:r>
+              <a:rPr lang="ja-JP" altLang="en-US" dirty="0"/>
+              <a:t>・箇条書き，リスト</a:t>
+            </a:r>
+            <a:endParaRPr lang="en-US" altLang="ja-JP" dirty="0"/>
+          </a:p>
+          <a:p>
+            <a:pPr marL="0" indent="0">
+              <a:buNone/>
+            </a:pPr>
+            <a:r>
+              <a:rPr lang="ja-JP" altLang="en-US" dirty="0"/>
+              <a:t>箇条書きのマークは</a:t>
+            </a:r>
+            <a:r>
+              <a:rPr lang="en-US" altLang="ja-JP" dirty="0"/>
+              <a:t>PowerPoint</a:t>
+            </a:r>
+            <a:r>
+              <a:rPr lang="ja-JP" altLang="en-US" dirty="0"/>
+              <a:t>の機能ではなく「・</a:t>
+            </a:r>
+            <a:r>
+              <a:rPr lang="en-US" altLang="ja-JP" dirty="0"/>
+              <a:t>(</a:t>
+            </a:r>
+            <a:r>
+              <a:rPr lang="ja-JP" altLang="en-US" dirty="0"/>
+              <a:t>てん</a:t>
+            </a:r>
+            <a:r>
+              <a:rPr lang="en-US" altLang="ja-JP" dirty="0"/>
+              <a:t>)</a:t>
+            </a:r>
+            <a:r>
+              <a:rPr lang="ja-JP" altLang="en-US" dirty="0"/>
+              <a:t>」を用いる</a:t>
+            </a:r>
+            <a:endParaRPr lang="en-US" altLang="ja-JP" dirty="0"/>
+          </a:p>
+          <a:p>
+            <a:pPr marL="0" indent="0">
+              <a:buNone/>
+            </a:pPr>
+            <a:r>
+              <a:rPr lang="ja-JP" altLang="en-US" dirty="0"/>
+              <a:t>リストの番号は</a:t>
+            </a:r>
+            <a:r>
+              <a:rPr lang="en-US" altLang="ja-JP" dirty="0"/>
+              <a:t>PowerPoint</a:t>
+            </a:r>
+            <a:r>
+              <a:rPr lang="ja-JP" altLang="en-US" dirty="0"/>
+              <a:t>の機能ではなく「</a:t>
+            </a:r>
+            <a:r>
+              <a:rPr lang="en-US" altLang="ja-JP" dirty="0"/>
+              <a:t>1.</a:t>
+            </a:r>
+            <a:r>
+              <a:rPr lang="ja-JP" altLang="en-US" dirty="0"/>
+              <a:t>」，「</a:t>
+            </a:r>
+            <a:r>
+              <a:rPr lang="en-US" altLang="ja-JP" dirty="0"/>
+              <a:t>2.</a:t>
+            </a:r>
+            <a:r>
+              <a:rPr lang="ja-JP" altLang="en-US" dirty="0"/>
+              <a:t>」と記述する</a:t>
+            </a:r>
+          </a:p>
+          <a:p>
+            <a:pPr marL="0" indent="0">
+              <a:buNone/>
+            </a:pPr>
+            <a:endParaRPr kumimoji="1" lang="ja-JP" altLang="en-US" dirty="0"/>
           </a:p>
         </p:txBody>
       </p:sp>
@@ -2594,7 +2792,7 @@
           <p:cNvPr id="4" name="スライド番号プレースホルダー 3">
             <a:extLst>
               <a:ext uri="{FF2B5EF4-FFF2-40B4-BE49-F238E27FC236}">
-                <a16:creationId xmlns:a16="http://schemas.microsoft.com/office/drawing/2014/main" id="{EEE3C0D6-9A3C-BD21-A899-F0A3AABF5706}"/>
+                <a16:creationId xmlns:a16="http://schemas.microsoft.com/office/drawing/2014/main" id="{B9F657BD-C951-2710-F4A7-0F66499EB8EB}"/>
               </a:ext>
             </a:extLst>
           </p:cNvPr>
@@ -2618,46 +2816,10 @@
           </a:p>
         </p:txBody>
       </p:sp>
-      <p:sp>
-        <p:nvSpPr>
-          <p:cNvPr id="5" name="テキスト ボックス 4">
-            <a:extLst>
-              <a:ext uri="{FF2B5EF4-FFF2-40B4-BE49-F238E27FC236}">
-                <a16:creationId xmlns:a16="http://schemas.microsoft.com/office/drawing/2014/main" id="{314E0B6E-945A-2E49-D257-34F89DA8B594}"/>
-              </a:ext>
-            </a:extLst>
-          </p:cNvPr>
-          <p:cNvSpPr txBox="1"/>
-          <p:nvPr/>
-        </p:nvSpPr>
-        <p:spPr>
-          <a:xfrm>
-            <a:off x="-809338" y="1309255"/>
-            <a:ext cx="184731" cy="461665"/>
-          </a:xfrm>
-          <a:prstGeom prst="rect">
-            <a:avLst/>
-          </a:prstGeom>
-          <a:noFill/>
-        </p:spPr>
-        <p:txBody>
-          <a:bodyPr wrap="none" rtlCol="0">
-            <a:spAutoFit/>
-          </a:bodyPr>
-          <a:lstStyle/>
-          <a:p>
-            <a:pPr algn="ctr"/>
-            <a:endParaRPr kumimoji="1" lang="ja-JP" altLang="en-US" sz="2400">
-              <a:latin typeface="BIZ UDGothic" panose="020B0400000000000000" pitchFamily="49" charset="-128"/>
-              <a:ea typeface="BIZ UDGothic" panose="020B0400000000000000" pitchFamily="49" charset="-128"/>
-            </a:endParaRPr>
-          </a:p>
-        </p:txBody>
-      </p:sp>
     </p:spTree>
     <p:extLst>
       <p:ext uri="{BB962C8B-B14F-4D97-AF65-F5344CB8AC3E}">
-        <p14:creationId xmlns:p14="http://schemas.microsoft.com/office/powerpoint/2010/main" val="1385369761"/>
+        <p14:creationId xmlns:p14="http://schemas.microsoft.com/office/powerpoint/2010/main" val="1500971920"/>
       </p:ext>
     </p:extLst>
   </p:cSld>
@@ -2668,900 +2830,6 @@
 </file>
 
 <file path=ppt/slides/slide3.xml><?xml version="1.0" encoding="utf-8"?>
-<p:sld xmlns:a="http://schemas.openxmlformats.org/drawingml/2006/main" xmlns:r="http://schemas.openxmlformats.org/officeDocument/2006/relationships" xmlns:p="http://schemas.openxmlformats.org/presentationml/2006/main">
-  <p:cSld>
-    <p:spTree>
-      <p:nvGrpSpPr>
-        <p:cNvPr id="1" name=""/>
-        <p:cNvGrpSpPr/>
-        <p:nvPr/>
-      </p:nvGrpSpPr>
-      <p:grpSpPr>
-        <a:xfrm>
-          <a:off x="0" y="0"/>
-          <a:ext cx="0" cy="0"/>
-          <a:chOff x="0" y="0"/>
-          <a:chExt cx="0" cy="0"/>
-        </a:xfrm>
-      </p:grpSpPr>
-      <p:sp>
-        <p:nvSpPr>
-          <p:cNvPr id="2" name="タイトル 1">
-            <a:extLst>
-              <a:ext uri="{FF2B5EF4-FFF2-40B4-BE49-F238E27FC236}">
-                <a16:creationId xmlns:a16="http://schemas.microsoft.com/office/drawing/2014/main" id="{F23FAC32-585E-3A6A-2398-072BDED40180}"/>
-              </a:ext>
-            </a:extLst>
-          </p:cNvPr>
-          <p:cNvSpPr>
-            <a:spLocks noGrp="1"/>
-          </p:cNvSpPr>
-          <p:nvPr>
-            <p:ph type="title"/>
-          </p:nvPr>
-        </p:nvSpPr>
-        <p:spPr/>
-        <p:txBody>
-          <a:bodyPr>
-            <a:normAutofit fontScale="90000"/>
-          </a:bodyPr>
-          <a:lstStyle/>
-          <a:p>
-            <a:r>
-              <a:rPr kumimoji="1" lang="en-US" altLang="ja-JP" dirty="0"/>
-              <a:t>2</a:t>
-            </a:r>
-            <a:r>
-              <a:rPr kumimoji="1" lang="ja-JP" altLang="en-US" dirty="0"/>
-              <a:t>カラム テンプレート</a:t>
-            </a:r>
-          </a:p>
-        </p:txBody>
-      </p:sp>
-      <p:sp>
-        <p:nvSpPr>
-          <p:cNvPr id="3" name="コンテンツ プレースホルダー 2">
-            <a:extLst>
-              <a:ext uri="{FF2B5EF4-FFF2-40B4-BE49-F238E27FC236}">
-                <a16:creationId xmlns:a16="http://schemas.microsoft.com/office/drawing/2014/main" id="{29BB8BDE-2C62-7A94-EA57-2905A0F7190E}"/>
-              </a:ext>
-            </a:extLst>
-          </p:cNvPr>
-          <p:cNvSpPr>
-            <a:spLocks noGrp="1"/>
-          </p:cNvSpPr>
-          <p:nvPr>
-            <p:ph sz="half" idx="1"/>
-          </p:nvPr>
-        </p:nvSpPr>
-        <p:spPr/>
-        <p:txBody>
-          <a:bodyPr/>
-          <a:lstStyle/>
-          <a:p>
-            <a:endParaRPr kumimoji="1" lang="ja-JP" altLang="en-US"/>
-          </a:p>
-        </p:txBody>
-      </p:sp>
-      <p:sp>
-        <p:nvSpPr>
-          <p:cNvPr id="4" name="コンテンツ プレースホルダー 3">
-            <a:extLst>
-              <a:ext uri="{FF2B5EF4-FFF2-40B4-BE49-F238E27FC236}">
-                <a16:creationId xmlns:a16="http://schemas.microsoft.com/office/drawing/2014/main" id="{3C6130C0-32DE-A52E-67B8-E1AB4BF39A80}"/>
-              </a:ext>
-            </a:extLst>
-          </p:cNvPr>
-          <p:cNvSpPr>
-            <a:spLocks noGrp="1"/>
-          </p:cNvSpPr>
-          <p:nvPr>
-            <p:ph sz="half" idx="2"/>
-          </p:nvPr>
-        </p:nvSpPr>
-        <p:spPr/>
-        <p:txBody>
-          <a:bodyPr/>
-          <a:lstStyle/>
-          <a:p>
-            <a:endParaRPr kumimoji="1" lang="ja-JP" altLang="en-US"/>
-          </a:p>
-        </p:txBody>
-      </p:sp>
-      <p:sp>
-        <p:nvSpPr>
-          <p:cNvPr id="5" name="スライド番号プレースホルダー 4">
-            <a:extLst>
-              <a:ext uri="{FF2B5EF4-FFF2-40B4-BE49-F238E27FC236}">
-                <a16:creationId xmlns:a16="http://schemas.microsoft.com/office/drawing/2014/main" id="{1E85E263-675E-C473-9CC5-3C5CD1930E7B}"/>
-              </a:ext>
-            </a:extLst>
-          </p:cNvPr>
-          <p:cNvSpPr>
-            <a:spLocks noGrp="1"/>
-          </p:cNvSpPr>
-          <p:nvPr>
-            <p:ph type="sldNum" sz="quarter" idx="12"/>
-          </p:nvPr>
-        </p:nvSpPr>
-        <p:spPr/>
-        <p:txBody>
-          <a:bodyPr/>
-          <a:lstStyle/>
-          <a:p>
-            <a:fld id="{9C0FEE9A-3EB6-844C-8184-5D808DF01412}" type="slidenum">
-              <a:rPr kumimoji="1" lang="ja-JP" altLang="en-US" smtClean="0"/>
-              <a:t>3</a:t>
-            </a:fld>
-            <a:endParaRPr kumimoji="1" lang="ja-JP" altLang="en-US"/>
-          </a:p>
-        </p:txBody>
-      </p:sp>
-    </p:spTree>
-    <p:extLst>
-      <p:ext uri="{BB962C8B-B14F-4D97-AF65-F5344CB8AC3E}">
-        <p14:creationId xmlns:p14="http://schemas.microsoft.com/office/powerpoint/2010/main" val="49776739"/>
-      </p:ext>
-    </p:extLst>
-  </p:cSld>
-  <p:clrMapOvr>
-    <a:masterClrMapping/>
-  </p:clrMapOvr>
-</p:sld>
-</file>
-
-<file path=ppt/slides/slide4.xml><?xml version="1.0" encoding="utf-8"?>
-<p:sld xmlns:a="http://schemas.openxmlformats.org/drawingml/2006/main" xmlns:r="http://schemas.openxmlformats.org/officeDocument/2006/relationships" xmlns:p="http://schemas.openxmlformats.org/presentationml/2006/main">
-  <p:cSld>
-    <p:spTree>
-      <p:nvGrpSpPr>
-        <p:cNvPr id="1" name=""/>
-        <p:cNvGrpSpPr/>
-        <p:nvPr/>
-      </p:nvGrpSpPr>
-      <p:grpSpPr>
-        <a:xfrm>
-          <a:off x="0" y="0"/>
-          <a:ext cx="0" cy="0"/>
-          <a:chOff x="0" y="0"/>
-          <a:chExt cx="0" cy="0"/>
-        </a:xfrm>
-      </p:grpSpPr>
-      <p:sp>
-        <p:nvSpPr>
-          <p:cNvPr id="2" name="タイトル 1">
-            <a:extLst>
-              <a:ext uri="{FF2B5EF4-FFF2-40B4-BE49-F238E27FC236}">
-                <a16:creationId xmlns:a16="http://schemas.microsoft.com/office/drawing/2014/main" id="{F38D3469-E485-E1E8-19D3-AFD207F014C8}"/>
-              </a:ext>
-            </a:extLst>
-          </p:cNvPr>
-          <p:cNvSpPr>
-            <a:spLocks noGrp="1"/>
-          </p:cNvSpPr>
-          <p:nvPr>
-            <p:ph type="title"/>
-          </p:nvPr>
-        </p:nvSpPr>
-        <p:spPr/>
-        <p:txBody>
-          <a:bodyPr>
-            <a:normAutofit fontScale="90000"/>
-          </a:bodyPr>
-          <a:lstStyle/>
-          <a:p>
-            <a:r>
-              <a:rPr kumimoji="1" lang="ja-JP" altLang="en-US"/>
-              <a:t>引用の仕方</a:t>
-            </a:r>
-          </a:p>
-        </p:txBody>
-      </p:sp>
-      <p:sp>
-        <p:nvSpPr>
-          <p:cNvPr id="3" name="コンテンツ プレースホルダー 2">
-            <a:extLst>
-              <a:ext uri="{FF2B5EF4-FFF2-40B4-BE49-F238E27FC236}">
-                <a16:creationId xmlns:a16="http://schemas.microsoft.com/office/drawing/2014/main" id="{8DCD1AE0-8804-EFE2-7EEC-E53DEAB04C39}"/>
-              </a:ext>
-            </a:extLst>
-          </p:cNvPr>
-          <p:cNvSpPr>
-            <a:spLocks noGrp="1"/>
-          </p:cNvSpPr>
-          <p:nvPr>
-            <p:ph idx="1"/>
-          </p:nvPr>
-        </p:nvSpPr>
-        <p:spPr/>
-        <p:txBody>
-          <a:bodyPr>
-            <a:normAutofit/>
-          </a:bodyPr>
-          <a:lstStyle/>
-          <a:p>
-            <a:pPr marL="0" indent="0">
-              <a:buNone/>
-            </a:pPr>
-            <a:r>
-              <a:rPr kumimoji="1" lang="ja-JP" altLang="en-US" dirty="0"/>
-              <a:t>「電子情報通信学会和文論文誌　投稿のしおり」を参考</a:t>
-            </a:r>
-            <a:endParaRPr kumimoji="1" lang="en-US" altLang="ja-JP" dirty="0"/>
-          </a:p>
-          <a:p>
-            <a:pPr marL="457200" lvl="1" indent="0">
-              <a:buNone/>
-            </a:pPr>
-            <a:r>
-              <a:rPr lang="en-US" altLang="ja-JP" dirty="0">
-                <a:hlinkClick r:id="rId2"/>
-              </a:rPr>
-              <a:t>https://www.ieice.org/jpn/shiori/ess_2.html</a:t>
-            </a:r>
-            <a:endParaRPr lang="en-US" altLang="ja-JP" dirty="0"/>
-          </a:p>
-          <a:p>
-            <a:pPr marL="457200" lvl="1" indent="0">
-              <a:buNone/>
-            </a:pPr>
-            <a:r>
-              <a:rPr lang="en-US" altLang="ja-JP" dirty="0"/>
-              <a:t>※</a:t>
-            </a:r>
-            <a:r>
-              <a:rPr lang="ja-JP" altLang="en-US" dirty="0"/>
-              <a:t> 他のフォーマットでも良いが，理由がなければ上記に準拠</a:t>
-            </a:r>
-            <a:endParaRPr kumimoji="1" lang="en-US" altLang="ja-JP" dirty="0"/>
-          </a:p>
-          <a:p>
-            <a:r>
-              <a:rPr kumimoji="1" lang="ja-JP" altLang="en-US" dirty="0"/>
-              <a:t>英文論文を引用する場合</a:t>
-            </a:r>
-            <a:endParaRPr kumimoji="1" lang="en-US" altLang="ja-JP" dirty="0"/>
-          </a:p>
-          <a:p>
-            <a:endParaRPr lang="en-US" altLang="ja-JP" dirty="0"/>
-          </a:p>
-          <a:p>
-            <a:r>
-              <a:rPr kumimoji="1" lang="ja-JP" altLang="en-US" dirty="0"/>
-              <a:t>和文論文を引用する場合</a:t>
-            </a:r>
-            <a:endParaRPr kumimoji="1" lang="en-US" altLang="ja-JP" dirty="0"/>
-          </a:p>
-          <a:p>
-            <a:endParaRPr lang="en-US" altLang="ja-JP" dirty="0"/>
-          </a:p>
-          <a:p>
-            <a:r>
-              <a:rPr kumimoji="1" lang="ja-JP" altLang="en-US" dirty="0"/>
-              <a:t>書籍を引用する場合</a:t>
-            </a:r>
-            <a:endParaRPr kumimoji="1" lang="en-US" altLang="ja-JP" dirty="0"/>
-          </a:p>
-          <a:p>
-            <a:endParaRPr lang="en-US" altLang="ja-JP" sz="1100" dirty="0"/>
-          </a:p>
-          <a:p>
-            <a:r>
-              <a:rPr kumimoji="1" lang="en-US" altLang="ja-JP" dirty="0"/>
-              <a:t>Web</a:t>
-            </a:r>
-            <a:r>
-              <a:rPr kumimoji="1" lang="ja-JP" altLang="en-US" dirty="0"/>
-              <a:t>サイトを引用する場合（ハイパーリンクは削除！）</a:t>
-            </a:r>
-          </a:p>
-        </p:txBody>
-      </p:sp>
-      <p:sp>
-        <p:nvSpPr>
-          <p:cNvPr id="4" name="スライド番号プレースホルダー 3">
-            <a:extLst>
-              <a:ext uri="{FF2B5EF4-FFF2-40B4-BE49-F238E27FC236}">
-                <a16:creationId xmlns:a16="http://schemas.microsoft.com/office/drawing/2014/main" id="{6B95457E-68F9-2DC2-16A7-37DDE28508E6}"/>
-              </a:ext>
-            </a:extLst>
-          </p:cNvPr>
-          <p:cNvSpPr>
-            <a:spLocks noGrp="1"/>
-          </p:cNvSpPr>
-          <p:nvPr>
-            <p:ph type="sldNum" sz="quarter" idx="12"/>
-          </p:nvPr>
-        </p:nvSpPr>
-        <p:spPr/>
-        <p:txBody>
-          <a:bodyPr/>
-          <a:lstStyle/>
-          <a:p>
-            <a:fld id="{9C0FEE9A-3EB6-844C-8184-5D808DF01412}" type="slidenum">
-              <a:rPr kumimoji="1" lang="ja-JP" altLang="en-US" smtClean="0"/>
-              <a:t>4</a:t>
-            </a:fld>
-            <a:endParaRPr kumimoji="1" lang="ja-JP" altLang="en-US"/>
-          </a:p>
-        </p:txBody>
-      </p:sp>
-      <p:sp>
-        <p:nvSpPr>
-          <p:cNvPr id="6" name="テキスト ボックス 5">
-            <a:extLst>
-              <a:ext uri="{FF2B5EF4-FFF2-40B4-BE49-F238E27FC236}">
-                <a16:creationId xmlns:a16="http://schemas.microsoft.com/office/drawing/2014/main" id="{042B130D-A8D8-4C76-35BE-86E915522D87}"/>
-              </a:ext>
-            </a:extLst>
-          </p:cNvPr>
-          <p:cNvSpPr txBox="1"/>
-          <p:nvPr/>
-        </p:nvSpPr>
-        <p:spPr>
-          <a:xfrm>
-            <a:off x="125969" y="2703764"/>
-            <a:ext cx="11940062" cy="461665"/>
-          </a:xfrm>
-          <a:prstGeom prst="rect">
-            <a:avLst/>
-          </a:prstGeom>
-          <a:noFill/>
-        </p:spPr>
-        <p:txBody>
-          <a:bodyPr wrap="square" rtlCol="0">
-            <a:spAutoFit/>
-          </a:bodyPr>
-          <a:lstStyle/>
-          <a:p>
-            <a:r>
-              <a:rPr lang="en-US" altLang="ja-JP" sz="1200" dirty="0">
-                <a:latin typeface="BIZ UDGothic" panose="020B0400000000000000" pitchFamily="49" charset="-128"/>
-                <a:ea typeface="BIZ UDGothic" panose="020B0400000000000000" pitchFamily="49" charset="-128"/>
-              </a:rPr>
-              <a:t>[1] </a:t>
-            </a:r>
-            <a:r>
-              <a:rPr kumimoji="1" lang="en-US" altLang="ja-JP" sz="1200" dirty="0">
-                <a:latin typeface="BIZ UDGothic" panose="020B0400000000000000" pitchFamily="49" charset="-128"/>
-                <a:ea typeface="BIZ UDGothic" panose="020B0400000000000000" pitchFamily="49" charset="-128"/>
-              </a:rPr>
-              <a:t>R. </a:t>
-            </a:r>
-            <a:r>
-              <a:rPr kumimoji="1" lang="en-US" altLang="ja-JP" sz="1200" dirty="0" err="1">
-                <a:latin typeface="BIZ UDGothic" panose="020B0400000000000000" pitchFamily="49" charset="-128"/>
-                <a:ea typeface="BIZ UDGothic" panose="020B0400000000000000" pitchFamily="49" charset="-128"/>
-              </a:rPr>
-              <a:t>Yamatomi</a:t>
-            </a:r>
-            <a:r>
-              <a:rPr kumimoji="1" lang="en-US" altLang="ja-JP" sz="1200" dirty="0">
-                <a:latin typeface="BIZ UDGothic" panose="020B0400000000000000" pitchFamily="49" charset="-128"/>
-                <a:ea typeface="BIZ UDGothic" panose="020B0400000000000000" pitchFamily="49" charset="-128"/>
-              </a:rPr>
-              <a:t>, S. </a:t>
-            </a:r>
-            <a:r>
-              <a:rPr kumimoji="1" lang="en-US" altLang="ja-JP" sz="1200" dirty="0" err="1">
-                <a:latin typeface="BIZ UDGothic" panose="020B0400000000000000" pitchFamily="49" charset="-128"/>
-                <a:ea typeface="BIZ UDGothic" panose="020B0400000000000000" pitchFamily="49" charset="-128"/>
-              </a:rPr>
-              <a:t>Mahboubi</a:t>
-            </a:r>
-            <a:r>
-              <a:rPr kumimoji="1" lang="en-US" altLang="ja-JP" sz="1200" dirty="0">
-                <a:latin typeface="BIZ UDGothic" panose="020B0400000000000000" pitchFamily="49" charset="-128"/>
-                <a:ea typeface="BIZ UDGothic" panose="020B0400000000000000" pitchFamily="49" charset="-128"/>
-              </a:rPr>
-              <a:t>, and H. </a:t>
-            </a:r>
-            <a:r>
-              <a:rPr kumimoji="1" lang="en-US" altLang="ja-JP" sz="1200" dirty="0" err="1">
-                <a:latin typeface="BIZ UDGothic" panose="020B0400000000000000" pitchFamily="49" charset="-128"/>
-                <a:ea typeface="BIZ UDGothic" panose="020B0400000000000000" pitchFamily="49" charset="-128"/>
-              </a:rPr>
-              <a:t>Ninomiya,“Generative</a:t>
-            </a:r>
-            <a:r>
-              <a:rPr kumimoji="1" lang="en-US" altLang="ja-JP" sz="1200" dirty="0">
-                <a:latin typeface="BIZ UDGothic" panose="020B0400000000000000" pitchFamily="49" charset="-128"/>
-                <a:ea typeface="BIZ UDGothic" panose="020B0400000000000000" pitchFamily="49" charset="-128"/>
-              </a:rPr>
-              <a:t> Model of Suitable Meme Sentences for Images using </a:t>
-            </a:r>
-            <a:r>
-              <a:rPr kumimoji="1" lang="en-US" altLang="ja-JP" sz="1200" dirty="0" err="1">
-                <a:latin typeface="BIZ UDGothic" panose="020B0400000000000000" pitchFamily="49" charset="-128"/>
-                <a:ea typeface="BIZ UDGothic" panose="020B0400000000000000" pitchFamily="49" charset="-128"/>
-              </a:rPr>
-              <a:t>AutoEncoder</a:t>
-            </a:r>
-            <a:r>
-              <a:rPr kumimoji="1" lang="en-US" altLang="ja-JP" sz="1200" dirty="0">
-                <a:latin typeface="BIZ UDGothic" panose="020B0400000000000000" pitchFamily="49" charset="-128"/>
-                <a:ea typeface="BIZ UDGothic" panose="020B0400000000000000" pitchFamily="49" charset="-128"/>
-              </a:rPr>
-              <a:t>,”Proc. of the 20th Pacific Rim International Conference on Artificial Intelligence, pp.237-248, Nov. 2023.</a:t>
-            </a:r>
-          </a:p>
-        </p:txBody>
-      </p:sp>
-      <p:sp>
-        <p:nvSpPr>
-          <p:cNvPr id="7" name="テキスト ボックス 6">
-            <a:extLst>
-              <a:ext uri="{FF2B5EF4-FFF2-40B4-BE49-F238E27FC236}">
-                <a16:creationId xmlns:a16="http://schemas.microsoft.com/office/drawing/2014/main" id="{B6D11ACE-42DF-3B64-7D6C-2D8D974723ED}"/>
-              </a:ext>
-            </a:extLst>
-          </p:cNvPr>
-          <p:cNvSpPr txBox="1"/>
-          <p:nvPr/>
-        </p:nvSpPr>
-        <p:spPr>
-          <a:xfrm>
-            <a:off x="125969" y="3799581"/>
-            <a:ext cx="11940062" cy="461665"/>
-          </a:xfrm>
-          <a:prstGeom prst="rect">
-            <a:avLst/>
-          </a:prstGeom>
-          <a:noFill/>
-        </p:spPr>
-        <p:txBody>
-          <a:bodyPr wrap="square" rtlCol="0">
-            <a:spAutoFit/>
-          </a:bodyPr>
-          <a:lstStyle/>
-          <a:p>
-            <a:r>
-              <a:rPr kumimoji="1" lang="en-US" altLang="ja-JP" sz="1200" dirty="0">
-                <a:latin typeface="BIZ UDGothic" panose="020B0400000000000000" pitchFamily="49" charset="-128"/>
-                <a:ea typeface="BIZ UDGothic" panose="020B0400000000000000" pitchFamily="49" charset="-128"/>
-              </a:rPr>
-              <a:t>[2] </a:t>
-            </a:r>
-            <a:r>
-              <a:rPr lang="ja-JP" altLang="en-US" sz="1200" kern="100" dirty="0">
-                <a:effectLst/>
-                <a:latin typeface="BIZ UDGothic" panose="020B0400000000000000" pitchFamily="49" charset="-128"/>
-                <a:ea typeface="BIZ UDGothic" panose="020B0400000000000000" pitchFamily="49" charset="-128"/>
-                <a:cs typeface="Times New Roman" panose="02020603050405020304" pitchFamily="18" charset="0"/>
-              </a:rPr>
-              <a:t>山富龍，シェヘラザードマハブービ，二宮洋，</a:t>
-            </a:r>
-            <a:r>
-              <a:rPr lang="en-US" altLang="ja-JP" sz="1200" kern="100" dirty="0">
-                <a:effectLst/>
-                <a:latin typeface="BIZ UDGothic" panose="020B0400000000000000" pitchFamily="49" charset="-128"/>
-                <a:ea typeface="BIZ UDGothic" panose="020B0400000000000000" pitchFamily="49" charset="-128"/>
-                <a:cs typeface="Times New Roman" panose="02020603050405020304" pitchFamily="18" charset="0"/>
-              </a:rPr>
-              <a:t>“</a:t>
-            </a:r>
-            <a:r>
-              <a:rPr lang="en" altLang="ja-JP" sz="1200" kern="100" dirty="0" err="1">
-                <a:effectLst/>
-                <a:latin typeface="BIZ UDGothic" panose="020B0400000000000000" pitchFamily="49" charset="-128"/>
-                <a:ea typeface="BIZ UDGothic" panose="020B0400000000000000" pitchFamily="49" charset="-128"/>
-                <a:cs typeface="Times New Roman" panose="02020603050405020304" pitchFamily="18" charset="0"/>
-              </a:rPr>
-              <a:t>AutoEncoder</a:t>
-            </a:r>
-            <a:r>
-              <a:rPr lang="ja-JP" altLang="en-US" sz="1200" kern="100" dirty="0">
-                <a:effectLst/>
-                <a:latin typeface="BIZ UDGothic" panose="020B0400000000000000" pitchFamily="49" charset="-128"/>
-                <a:ea typeface="BIZ UDGothic" panose="020B0400000000000000" pitchFamily="49" charset="-128"/>
-                <a:cs typeface="Times New Roman" panose="02020603050405020304" pitchFamily="18" charset="0"/>
-              </a:rPr>
-              <a:t>と</a:t>
-            </a:r>
-            <a:r>
-              <a:rPr lang="en" altLang="ja-JP" sz="1200" kern="100" dirty="0">
-                <a:effectLst/>
-                <a:latin typeface="BIZ UDGothic" panose="020B0400000000000000" pitchFamily="49" charset="-128"/>
-                <a:ea typeface="BIZ UDGothic" panose="020B0400000000000000" pitchFamily="49" charset="-128"/>
-                <a:cs typeface="Times New Roman" panose="02020603050405020304" pitchFamily="18" charset="0"/>
-              </a:rPr>
-              <a:t>Pix2Seq</a:t>
-            </a:r>
-            <a:r>
-              <a:rPr lang="ja-JP" altLang="en-US" sz="1200" kern="100" dirty="0">
-                <a:effectLst/>
-                <a:latin typeface="BIZ UDGothic" panose="020B0400000000000000" pitchFamily="49" charset="-128"/>
-                <a:ea typeface="BIZ UDGothic" panose="020B0400000000000000" pitchFamily="49" charset="-128"/>
-                <a:cs typeface="Times New Roman" panose="02020603050405020304" pitchFamily="18" charset="0"/>
-              </a:rPr>
-              <a:t>を用いた大喜利生成</a:t>
-            </a:r>
-            <a:r>
-              <a:rPr lang="en" altLang="ja-JP" sz="1200" kern="100" dirty="0">
-                <a:effectLst/>
-                <a:latin typeface="BIZ UDGothic" panose="020B0400000000000000" pitchFamily="49" charset="-128"/>
-                <a:ea typeface="BIZ UDGothic" panose="020B0400000000000000" pitchFamily="49" charset="-128"/>
-                <a:cs typeface="Times New Roman" panose="02020603050405020304" pitchFamily="18" charset="0"/>
-              </a:rPr>
-              <a:t>AI</a:t>
-            </a:r>
-            <a:r>
-              <a:rPr lang="ja-JP" altLang="en-US" sz="1200" kern="100" dirty="0">
-                <a:effectLst/>
-                <a:latin typeface="BIZ UDGothic" panose="020B0400000000000000" pitchFamily="49" charset="-128"/>
-                <a:ea typeface="BIZ UDGothic" panose="020B0400000000000000" pitchFamily="49" charset="-128"/>
-                <a:cs typeface="Times New Roman" panose="02020603050405020304" pitchFamily="18" charset="0"/>
-              </a:rPr>
-              <a:t>の実装に関する研究，</a:t>
-            </a:r>
-            <a:r>
-              <a:rPr lang="en-US" altLang="ja-JP" sz="1200" kern="100" dirty="0">
-                <a:effectLst/>
-                <a:latin typeface="BIZ UDGothic" panose="020B0400000000000000" pitchFamily="49" charset="-128"/>
-                <a:ea typeface="BIZ UDGothic" panose="020B0400000000000000" pitchFamily="49" charset="-128"/>
-                <a:cs typeface="Times New Roman" panose="02020603050405020304" pitchFamily="18" charset="0"/>
-              </a:rPr>
-              <a:t>”</a:t>
-            </a:r>
-            <a:r>
-              <a:rPr lang="ja-JP" altLang="en-US" sz="1200" kern="100" dirty="0">
-                <a:effectLst/>
-                <a:latin typeface="BIZ UDGothic" panose="020B0400000000000000" pitchFamily="49" charset="-128"/>
-                <a:ea typeface="BIZ UDGothic" panose="020B0400000000000000" pitchFamily="49" charset="-128"/>
-                <a:cs typeface="Times New Roman" panose="02020603050405020304" pitchFamily="18" charset="0"/>
-              </a:rPr>
-              <a:t>信学技報，</a:t>
-            </a:r>
-            <a:r>
-              <a:rPr lang="en" altLang="ja-JP" sz="1200" kern="100" dirty="0">
-                <a:effectLst/>
-                <a:latin typeface="BIZ UDGothic" panose="020B0400000000000000" pitchFamily="49" charset="-128"/>
-                <a:ea typeface="BIZ UDGothic" panose="020B0400000000000000" pitchFamily="49" charset="-128"/>
-                <a:cs typeface="Times New Roman" panose="02020603050405020304" pitchFamily="18" charset="0"/>
-              </a:rPr>
-              <a:t>vol.122</a:t>
-            </a:r>
-            <a:r>
-              <a:rPr lang="ja-JP" altLang="en" sz="1200" kern="100" dirty="0">
-                <a:effectLst/>
-                <a:latin typeface="BIZ UDGothic" panose="020B0400000000000000" pitchFamily="49" charset="-128"/>
-                <a:ea typeface="BIZ UDGothic" panose="020B0400000000000000" pitchFamily="49" charset="-128"/>
-                <a:cs typeface="Times New Roman" panose="02020603050405020304" pitchFamily="18" charset="0"/>
-              </a:rPr>
-              <a:t>，</a:t>
-            </a:r>
-            <a:r>
-              <a:rPr lang="en" altLang="ja-JP" sz="1200" kern="100" dirty="0">
-                <a:effectLst/>
-                <a:latin typeface="BIZ UDGothic" panose="020B0400000000000000" pitchFamily="49" charset="-128"/>
-                <a:ea typeface="BIZ UDGothic" panose="020B0400000000000000" pitchFamily="49" charset="-128"/>
-                <a:cs typeface="Times New Roman" panose="02020603050405020304" pitchFamily="18" charset="0"/>
-              </a:rPr>
-              <a:t>no.453</a:t>
-            </a:r>
-            <a:r>
-              <a:rPr lang="ja-JP" altLang="en" sz="1200" kern="100" dirty="0">
-                <a:effectLst/>
-                <a:latin typeface="BIZ UDGothic" panose="020B0400000000000000" pitchFamily="49" charset="-128"/>
-                <a:ea typeface="BIZ UDGothic" panose="020B0400000000000000" pitchFamily="49" charset="-128"/>
-                <a:cs typeface="Times New Roman" panose="02020603050405020304" pitchFamily="18" charset="0"/>
-              </a:rPr>
-              <a:t>，</a:t>
-            </a:r>
-            <a:r>
-              <a:rPr lang="en" altLang="ja-JP" sz="1200" kern="100" dirty="0">
-                <a:effectLst/>
-                <a:latin typeface="BIZ UDGothic" panose="020B0400000000000000" pitchFamily="49" charset="-128"/>
-                <a:ea typeface="BIZ UDGothic" panose="020B0400000000000000" pitchFamily="49" charset="-128"/>
-                <a:cs typeface="Times New Roman" panose="02020603050405020304" pitchFamily="18" charset="0"/>
-              </a:rPr>
-              <a:t>CCS2022-73</a:t>
-            </a:r>
-            <a:r>
-              <a:rPr lang="ja-JP" altLang="en" sz="1200" kern="100" dirty="0">
-                <a:effectLst/>
-                <a:latin typeface="BIZ UDGothic" panose="020B0400000000000000" pitchFamily="49" charset="-128"/>
-                <a:ea typeface="BIZ UDGothic" panose="020B0400000000000000" pitchFamily="49" charset="-128"/>
-                <a:cs typeface="Times New Roman" panose="02020603050405020304" pitchFamily="18" charset="0"/>
-              </a:rPr>
-              <a:t>，</a:t>
-            </a:r>
-            <a:r>
-              <a:rPr lang="en" altLang="ja-JP" sz="1200" kern="100" dirty="0">
-                <a:effectLst/>
-                <a:latin typeface="BIZ UDGothic" panose="020B0400000000000000" pitchFamily="49" charset="-128"/>
-                <a:ea typeface="BIZ UDGothic" panose="020B0400000000000000" pitchFamily="49" charset="-128"/>
-                <a:cs typeface="Times New Roman" panose="02020603050405020304" pitchFamily="18" charset="0"/>
-              </a:rPr>
-              <a:t>pp.59-62</a:t>
-            </a:r>
-            <a:r>
-              <a:rPr lang="ja-JP" altLang="en" sz="1200" kern="100" dirty="0">
-                <a:effectLst/>
-                <a:latin typeface="BIZ UDGothic" panose="020B0400000000000000" pitchFamily="49" charset="-128"/>
-                <a:ea typeface="BIZ UDGothic" panose="020B0400000000000000" pitchFamily="49" charset="-128"/>
-                <a:cs typeface="Times New Roman" panose="02020603050405020304" pitchFamily="18" charset="0"/>
-              </a:rPr>
-              <a:t>，</a:t>
-            </a:r>
-            <a:r>
-              <a:rPr lang="en" altLang="ja-JP" sz="1200" kern="100" dirty="0">
-                <a:effectLst/>
-                <a:latin typeface="BIZ UDGothic" panose="020B0400000000000000" pitchFamily="49" charset="-128"/>
-                <a:ea typeface="BIZ UDGothic" panose="020B0400000000000000" pitchFamily="49" charset="-128"/>
-                <a:cs typeface="Times New Roman" panose="02020603050405020304" pitchFamily="18" charset="0"/>
-              </a:rPr>
-              <a:t>Mar. 2023</a:t>
-            </a:r>
-            <a:r>
-              <a:rPr lang="ja-JP" altLang="en" sz="1200" kern="100" dirty="0">
-                <a:effectLst/>
-                <a:latin typeface="BIZ UDGothic" panose="020B0400000000000000" pitchFamily="49" charset="-128"/>
-                <a:ea typeface="BIZ UDGothic" panose="020B0400000000000000" pitchFamily="49" charset="-128"/>
-                <a:cs typeface="Times New Roman" panose="02020603050405020304" pitchFamily="18" charset="0"/>
-              </a:rPr>
-              <a:t>．</a:t>
-            </a:r>
-            <a:endParaRPr lang="ja-JP" altLang="ja-JP" sz="1200" kern="100" dirty="0">
-              <a:effectLst/>
-              <a:latin typeface="BIZ UDGothic" panose="020B0400000000000000" pitchFamily="49" charset="-128"/>
-              <a:ea typeface="BIZ UDGothic" panose="020B0400000000000000" pitchFamily="49" charset="-128"/>
-              <a:cs typeface="Times New Roman" panose="02020603050405020304" pitchFamily="18" charset="0"/>
-            </a:endParaRPr>
-          </a:p>
-        </p:txBody>
-      </p:sp>
-      <p:sp>
-        <p:nvSpPr>
-          <p:cNvPr id="8" name="テキスト ボックス 7">
-            <a:extLst>
-              <a:ext uri="{FF2B5EF4-FFF2-40B4-BE49-F238E27FC236}">
-                <a16:creationId xmlns:a16="http://schemas.microsoft.com/office/drawing/2014/main" id="{55D33B4B-B0EC-224F-36D0-014DDD71D842}"/>
-              </a:ext>
-            </a:extLst>
-          </p:cNvPr>
-          <p:cNvSpPr txBox="1"/>
-          <p:nvPr/>
-        </p:nvSpPr>
-        <p:spPr>
-          <a:xfrm>
-            <a:off x="125969" y="4910897"/>
-            <a:ext cx="11940062" cy="276999"/>
-          </a:xfrm>
-          <a:prstGeom prst="rect">
-            <a:avLst/>
-          </a:prstGeom>
-          <a:noFill/>
-        </p:spPr>
-        <p:txBody>
-          <a:bodyPr wrap="square" rtlCol="0">
-            <a:spAutoFit/>
-          </a:bodyPr>
-          <a:lstStyle/>
-          <a:p>
-            <a:r>
-              <a:rPr kumimoji="1" lang="en-US" altLang="ja-JP" sz="1200" dirty="0">
-                <a:latin typeface="BIZ UDGothic" panose="020B0400000000000000" pitchFamily="49" charset="-128"/>
-                <a:ea typeface="BIZ UDGothic" panose="020B0400000000000000" pitchFamily="49" charset="-128"/>
-              </a:rPr>
-              <a:t>[3] </a:t>
-            </a:r>
-            <a:r>
-              <a:rPr kumimoji="1" lang="ja-JP" altLang="en-US" sz="1200">
-                <a:latin typeface="BIZ UDGothic" panose="020B0400000000000000" pitchFamily="49" charset="-128"/>
-                <a:ea typeface="BIZ UDGothic" panose="020B0400000000000000" pitchFamily="49" charset="-128"/>
-              </a:rPr>
-              <a:t>斎藤康毅，</a:t>
-            </a:r>
-            <a:r>
-              <a:rPr lang="ja-JP" altLang="en-US" sz="1200" i="0">
-                <a:solidFill>
-                  <a:srgbClr val="0F1111"/>
-                </a:solidFill>
-                <a:effectLst/>
-                <a:latin typeface="BIZ UDGothic" panose="020B0400000000000000" pitchFamily="49" charset="-128"/>
-                <a:ea typeface="BIZ UDGothic" panose="020B0400000000000000" pitchFamily="49" charset="-128"/>
-              </a:rPr>
-              <a:t>ゼロから作る</a:t>
-            </a:r>
-            <a:r>
-              <a:rPr lang="en" altLang="ja-JP" sz="1200" i="0" dirty="0">
-                <a:solidFill>
-                  <a:srgbClr val="0F1111"/>
-                </a:solidFill>
-                <a:effectLst/>
-                <a:latin typeface="BIZ UDGothic" panose="020B0400000000000000" pitchFamily="49" charset="-128"/>
-                <a:ea typeface="BIZ UDGothic" panose="020B0400000000000000" pitchFamily="49" charset="-128"/>
-              </a:rPr>
-              <a:t>Deep Learning ―Python</a:t>
-            </a:r>
-            <a:r>
-              <a:rPr lang="ja-JP" altLang="en-US" sz="1200" i="0">
-                <a:solidFill>
-                  <a:srgbClr val="0F1111"/>
-                </a:solidFill>
-                <a:effectLst/>
-                <a:latin typeface="BIZ UDGothic" panose="020B0400000000000000" pitchFamily="49" charset="-128"/>
-                <a:ea typeface="BIZ UDGothic" panose="020B0400000000000000" pitchFamily="49" charset="-128"/>
-              </a:rPr>
-              <a:t>で学ぶディープラーニングの理論と実装，オライリージャパン，</a:t>
-            </a:r>
-            <a:r>
-              <a:rPr lang="en-US" altLang="ja-JP" sz="1200" i="0" dirty="0">
-                <a:solidFill>
-                  <a:srgbClr val="0F1111"/>
-                </a:solidFill>
-                <a:effectLst/>
-                <a:latin typeface="BIZ UDGothic" panose="020B0400000000000000" pitchFamily="49" charset="-128"/>
-                <a:ea typeface="BIZ UDGothic" panose="020B0400000000000000" pitchFamily="49" charset="-128"/>
-              </a:rPr>
-              <a:t>2016</a:t>
-            </a:r>
-            <a:r>
-              <a:rPr lang="ja-JP" altLang="en-US" sz="1200" i="0">
-                <a:solidFill>
-                  <a:srgbClr val="0F1111"/>
-                </a:solidFill>
-                <a:effectLst/>
-                <a:latin typeface="BIZ UDGothic" panose="020B0400000000000000" pitchFamily="49" charset="-128"/>
-                <a:ea typeface="BIZ UDGothic" panose="020B0400000000000000" pitchFamily="49" charset="-128"/>
-              </a:rPr>
-              <a:t>．</a:t>
-            </a:r>
-          </a:p>
-        </p:txBody>
-      </p:sp>
-      <p:sp>
-        <p:nvSpPr>
-          <p:cNvPr id="9" name="テキスト ボックス 8">
-            <a:extLst>
-              <a:ext uri="{FF2B5EF4-FFF2-40B4-BE49-F238E27FC236}">
-                <a16:creationId xmlns:a16="http://schemas.microsoft.com/office/drawing/2014/main" id="{342990F6-5662-BB31-904B-01209E80F142}"/>
-              </a:ext>
-            </a:extLst>
-          </p:cNvPr>
-          <p:cNvSpPr txBox="1"/>
-          <p:nvPr/>
-        </p:nvSpPr>
-        <p:spPr>
-          <a:xfrm>
-            <a:off x="125969" y="5880658"/>
-            <a:ext cx="11940062" cy="276999"/>
-          </a:xfrm>
-          <a:prstGeom prst="rect">
-            <a:avLst/>
-          </a:prstGeom>
-          <a:noFill/>
-        </p:spPr>
-        <p:txBody>
-          <a:bodyPr wrap="square" rtlCol="0">
-            <a:spAutoFit/>
-          </a:bodyPr>
-          <a:lstStyle/>
-          <a:p>
-            <a:r>
-              <a:rPr kumimoji="1" lang="en-US" altLang="ja-JP" sz="1200" dirty="0">
-                <a:latin typeface="BIZ UDGothic" panose="020B0400000000000000" pitchFamily="49" charset="-128"/>
-                <a:ea typeface="BIZ UDGothic" panose="020B0400000000000000" pitchFamily="49" charset="-128"/>
-              </a:rPr>
-              <a:t>[4] </a:t>
-            </a:r>
-            <a:r>
-              <a:rPr lang="ja-JP" altLang="en-US" sz="1200" b="0" i="0" dirty="0">
-                <a:effectLst/>
-                <a:latin typeface="BIZ UDGothic" panose="020B0400000000000000" pitchFamily="49" charset="-128"/>
-                <a:ea typeface="BIZ UDGothic" panose="020B0400000000000000" pitchFamily="49" charset="-128"/>
-              </a:rPr>
-              <a:t>株式会社オモロキ</a:t>
-            </a:r>
-            <a:r>
-              <a:rPr lang="ja-JP" altLang="en-US" sz="1200" b="0" dirty="0">
-                <a:latin typeface="BIZ UDGothic" panose="020B0400000000000000" pitchFamily="49" charset="-128"/>
-                <a:ea typeface="BIZ UDGothic" panose="020B0400000000000000" pitchFamily="49" charset="-128"/>
-              </a:rPr>
-              <a:t>，</a:t>
-            </a:r>
-            <a:r>
-              <a:rPr lang="en-US" altLang="ja-JP" sz="1200" kern="100" dirty="0">
-                <a:effectLst/>
-                <a:latin typeface="BIZ UDGothic" panose="020B0400000000000000" pitchFamily="49" charset="-128"/>
-                <a:ea typeface="BIZ UDGothic" panose="020B0400000000000000" pitchFamily="49" charset="-128"/>
-                <a:cs typeface="Times New Roman" panose="02020603050405020304" pitchFamily="18" charset="0"/>
-              </a:rPr>
-              <a:t>“</a:t>
-            </a:r>
-            <a:r>
-              <a:rPr lang="ja-JP" altLang="en-US" sz="1200" b="0" dirty="0">
-                <a:latin typeface="BIZ UDGothic" panose="020B0400000000000000" pitchFamily="49" charset="-128"/>
-                <a:ea typeface="BIZ UDGothic" panose="020B0400000000000000" pitchFamily="49" charset="-128"/>
-              </a:rPr>
-              <a:t>ボケて</a:t>
-            </a:r>
-            <a:r>
-              <a:rPr lang="ja-JP" altLang="en-US" sz="1200" kern="100" dirty="0">
-                <a:effectLst/>
-                <a:latin typeface="BIZ UDGothic" panose="020B0400000000000000" pitchFamily="49" charset="-128"/>
-                <a:ea typeface="BIZ UDGothic" panose="020B0400000000000000" pitchFamily="49" charset="-128"/>
-                <a:cs typeface="Times New Roman" panose="02020603050405020304" pitchFamily="18" charset="0"/>
-              </a:rPr>
-              <a:t>，</a:t>
-            </a:r>
-            <a:r>
-              <a:rPr lang="en-US" altLang="ja-JP" sz="1200" kern="100" dirty="0">
-                <a:effectLst/>
-                <a:latin typeface="BIZ UDGothic" panose="020B0400000000000000" pitchFamily="49" charset="-128"/>
-                <a:ea typeface="BIZ UDGothic" panose="020B0400000000000000" pitchFamily="49" charset="-128"/>
-                <a:cs typeface="Times New Roman" panose="02020603050405020304" pitchFamily="18" charset="0"/>
-              </a:rPr>
-              <a:t>”</a:t>
-            </a:r>
-            <a:r>
-              <a:rPr lang="en" altLang="ja-JP" sz="1200" kern="100" dirty="0">
-                <a:effectLst/>
-                <a:latin typeface="BIZ UDGothic" panose="020B0400000000000000" pitchFamily="49" charset="-128"/>
-                <a:ea typeface="BIZ UDGothic" panose="020B0400000000000000" pitchFamily="49" charset="-128"/>
-                <a:cs typeface="Times New Roman" panose="02020603050405020304" pitchFamily="18" charset="0"/>
-              </a:rPr>
-              <a:t>https://</a:t>
-            </a:r>
-            <a:r>
-              <a:rPr lang="en" altLang="ja-JP" sz="1200" kern="100" dirty="0" err="1">
-                <a:effectLst/>
-                <a:latin typeface="BIZ UDGothic" panose="020B0400000000000000" pitchFamily="49" charset="-128"/>
-                <a:ea typeface="BIZ UDGothic" panose="020B0400000000000000" pitchFamily="49" charset="-128"/>
-                <a:cs typeface="Times New Roman" panose="02020603050405020304" pitchFamily="18" charset="0"/>
-              </a:rPr>
-              <a:t>bokete.jp</a:t>
-            </a:r>
-            <a:r>
-              <a:rPr lang="en" altLang="ja-JP" sz="1200" kern="100" dirty="0">
-                <a:effectLst/>
-                <a:latin typeface="BIZ UDGothic" panose="020B0400000000000000" pitchFamily="49" charset="-128"/>
-                <a:ea typeface="BIZ UDGothic" panose="020B0400000000000000" pitchFamily="49" charset="-128"/>
-                <a:cs typeface="Times New Roman" panose="02020603050405020304" pitchFamily="18" charset="0"/>
-              </a:rPr>
-              <a:t>/</a:t>
-            </a:r>
-            <a:r>
-              <a:rPr lang="ja-JP" altLang="en-US" sz="1200" kern="100" dirty="0">
-                <a:effectLst/>
-                <a:latin typeface="BIZ UDGothic" panose="020B0400000000000000" pitchFamily="49" charset="-128"/>
-                <a:ea typeface="BIZ UDGothic" panose="020B0400000000000000" pitchFamily="49" charset="-128"/>
-                <a:cs typeface="Times New Roman" panose="02020603050405020304" pitchFamily="18" charset="0"/>
-              </a:rPr>
-              <a:t>，参照</a:t>
-            </a:r>
-            <a:r>
-              <a:rPr lang="en-US" altLang="ja-JP" sz="1200" kern="100" dirty="0">
-                <a:effectLst/>
-                <a:latin typeface="BIZ UDGothic" panose="020B0400000000000000" pitchFamily="49" charset="-128"/>
-                <a:ea typeface="BIZ UDGothic" panose="020B0400000000000000" pitchFamily="49" charset="-128"/>
-                <a:cs typeface="Times New Roman" panose="02020603050405020304" pitchFamily="18" charset="0"/>
-              </a:rPr>
-              <a:t>:Oct. 1, 2024.</a:t>
-            </a:r>
-            <a:endParaRPr lang="ja-JP" altLang="en-US" sz="1200" i="0" dirty="0">
-              <a:effectLst/>
-              <a:latin typeface="BIZ UDGothic" panose="020B0400000000000000" pitchFamily="49" charset="-128"/>
-              <a:ea typeface="BIZ UDGothic" panose="020B0400000000000000" pitchFamily="49" charset="-128"/>
-            </a:endParaRPr>
-          </a:p>
-        </p:txBody>
-      </p:sp>
-    </p:spTree>
-    <p:extLst>
-      <p:ext uri="{BB962C8B-B14F-4D97-AF65-F5344CB8AC3E}">
-        <p14:creationId xmlns:p14="http://schemas.microsoft.com/office/powerpoint/2010/main" val="3198982946"/>
-      </p:ext>
-    </p:extLst>
-  </p:cSld>
-  <p:clrMapOvr>
-    <a:masterClrMapping/>
-  </p:clrMapOvr>
-</p:sld>
-</file>
-
-<file path=ppt/slides/slide5.xml><?xml version="1.0" encoding="utf-8"?>
 <p:sld xmlns:a="http://schemas.openxmlformats.org/drawingml/2006/main" xmlns:r="http://schemas.openxmlformats.org/officeDocument/2006/relationships" xmlns:p="http://schemas.openxmlformats.org/presentationml/2006/main">
   <p:cSld>
     <p:spTree>
@@ -3602,14 +2870,14 @@
           <a:lstStyle/>
           <a:p>
             <a:r>
-              <a:rPr kumimoji="1" lang="ja-JP" altLang="en-US"/>
-              <a:t>数式の書き方</a:t>
+              <a:rPr kumimoji="1" lang="ja-JP" altLang="en-US" dirty="0"/>
+              <a:t>数式の記法</a:t>
             </a:r>
           </a:p>
         </p:txBody>
       </p:sp>
-      <mc:AlternateContent xmlns:mc="http://schemas.openxmlformats.org/markup-compatibility/2006" xmlns:a14="http://schemas.microsoft.com/office/drawing/2010/main">
-        <mc:Choice Requires="a14">
+      <mc:AlternateContent xmlns:mc="http://schemas.openxmlformats.org/markup-compatibility/2006">
+        <mc:Choice xmlns:a14="http://schemas.microsoft.com/office/drawing/2010/main" Requires="a14">
           <p:sp>
             <p:nvSpPr>
               <p:cNvPr id="3" name="コンテンツ プレースホルダー 2">
@@ -3631,9 +2899,20 @@
               <a:bodyPr/>
               <a:lstStyle/>
               <a:p>
+                <a:pPr marL="0" indent="0">
+                  <a:buNone/>
+                </a:pPr>
                 <a:r>
                   <a:rPr kumimoji="1" lang="ja-JP" altLang="en-US" dirty="0"/>
-                  <a:t>式番号をテキストボックスで式の左側に配置</a:t>
+                  <a:t>式番号をテキストボックスで式の</a:t>
+                </a:r>
+                <a:r>
+                  <a:rPr lang="ja-JP" altLang="en-US" dirty="0"/>
+                  <a:t>右側</a:t>
+                </a:r>
+                <a:r>
+                  <a:rPr kumimoji="1" lang="ja-JP" altLang="en-US" dirty="0"/>
+                  <a:t>に配置する</a:t>
                 </a:r>
                 <a:endParaRPr kumimoji="1" lang="en-US" altLang="ja-JP" dirty="0"/>
               </a:p>
@@ -3703,6 +2982,9 @@
                 <a:endParaRPr kumimoji="1" lang="en-US" altLang="ja-JP" dirty="0"/>
               </a:p>
               <a:p>
+                <a:pPr marL="0" indent="0">
+                  <a:buNone/>
+                </a:pPr>
                 <a:r>
                   <a:rPr lang="ja-JP" altLang="en-US" dirty="0"/>
                   <a:t>式中の変数について説明を</a:t>
@@ -3717,7 +2999,7 @@
                 </a:r>
                 <a:r>
                   <a:rPr lang="ja-JP" altLang="en-US" dirty="0"/>
-                  <a:t>記述</a:t>
+                  <a:t>記述する</a:t>
                 </a:r>
                 <a:endParaRPr lang="en-US" altLang="ja-JP" dirty="0"/>
               </a:p>
@@ -3769,12 +3051,21 @@
                   <a:rPr kumimoji="1" lang="ja-JP" altLang="en-US" dirty="0"/>
                   <a:t>切片</a:t>
                 </a:r>
+                <a:endParaRPr kumimoji="1" lang="en-US" altLang="ja-JP" dirty="0"/>
+              </a:p>
+              <a:p>
+                <a:pPr marL="0" indent="0">
+                  <a:buNone/>
+                </a:pPr>
                 <a:endParaRPr lang="en-US" altLang="ja-JP" dirty="0"/>
               </a:p>
               <a:p>
+                <a:pPr marL="0" indent="0">
+                  <a:buNone/>
+                </a:pPr>
                 <a:r>
                   <a:rPr lang="ja-JP" altLang="en-US" dirty="0"/>
-                  <a:t>スカラ，ベクトル，行列の記法</a:t>
+                  <a:t>・スカラ，ベクトル，行列の記法</a:t>
                 </a:r>
                 <a:endParaRPr lang="en-US" altLang="ja-JP" dirty="0"/>
               </a:p>
@@ -3787,7 +3078,7 @@
             </p:txBody>
           </p:sp>
         </mc:Choice>
-        <mc:Fallback xmlns="">
+        <mc:Fallback>
           <p:sp>
             <p:nvSpPr>
               <p:cNvPr id="3" name="コンテンツ プレースホルダー 2">
@@ -3850,14 +3141,14 @@
           <a:p>
             <a:fld id="{9C0FEE9A-3EB6-844C-8184-5D808DF01412}" type="slidenum">
               <a:rPr kumimoji="1" lang="ja-JP" altLang="en-US" smtClean="0"/>
-              <a:t>5</a:t>
+              <a:t>3</a:t>
             </a:fld>
             <a:endParaRPr kumimoji="1" lang="ja-JP" altLang="en-US"/>
           </a:p>
         </p:txBody>
       </p:sp>
-      <mc:AlternateContent xmlns:mc="http://schemas.openxmlformats.org/markup-compatibility/2006" xmlns:a14="http://schemas.microsoft.com/office/drawing/2010/main">
-        <mc:Choice Requires="a14">
+      <mc:AlternateContent xmlns:mc="http://schemas.openxmlformats.org/markup-compatibility/2006">
+        <mc:Choice xmlns:a14="http://schemas.microsoft.com/office/drawing/2010/main" Requires="a14">
           <p:graphicFrame>
             <p:nvGraphicFramePr>
               <p:cNvPr id="5" name="表 4">
@@ -3873,13 +3164,13 @@
               <p:nvPr>
                 <p:extLst>
                   <p:ext uri="{D42A27DB-BD31-4B8C-83A1-F6EECF244321}">
-                    <p14:modId xmlns:p14="http://schemas.microsoft.com/office/powerpoint/2010/main" val="1133684206"/>
+                    <p14:modId xmlns:p14="http://schemas.microsoft.com/office/powerpoint/2010/main" val="1634221325"/>
                   </p:ext>
                 </p:extLst>
               </p:nvPr>
             </p:nvGraphicFramePr>
             <p:xfrm>
-              <a:off x="125971" y="4158046"/>
+              <a:off x="125969" y="4535989"/>
               <a:ext cx="11940060" cy="2006854"/>
             </p:xfrm>
             <a:graphic>
@@ -3936,7 +3227,7 @@
                         <a:p>
                           <a:pPr algn="ctr"/>
                           <a:r>
-                            <a:rPr kumimoji="1" lang="ja-JP" altLang="en-US" sz="2000">
+                            <a:rPr kumimoji="1" lang="ja-JP" altLang="en-US" sz="2000" dirty="0">
                               <a:latin typeface="BIZ UDGothic" panose="020B0400000000000000" pitchFamily="49" charset="-128"/>
                               <a:ea typeface="BIZ UDGothic" panose="020B0400000000000000" pitchFamily="49" charset="-128"/>
                             </a:rPr>
@@ -4041,7 +3332,7 @@
                               </m:oMath>
                             </m:oMathPara>
                           </a14:m>
-                          <a:endParaRPr kumimoji="1" lang="ja-JP" altLang="en-US" sz="2000">
+                          <a:endParaRPr kumimoji="1" lang="ja-JP" altLang="en-US" sz="2000" dirty="0">
                             <a:latin typeface="BIZ UDGothic" panose="020B0400000000000000" pitchFamily="49" charset="-128"/>
                             <a:ea typeface="BIZ UDGothic" panose="020B0400000000000000" pitchFamily="49" charset="-128"/>
                           </a:endParaRPr>
@@ -4890,7 +4181,7 @@
             </a:graphic>
           </p:graphicFrame>
         </mc:Choice>
-        <mc:Fallback xmlns="">
+        <mc:Fallback>
           <p:graphicFrame>
             <p:nvGraphicFramePr>
               <p:cNvPr id="5" name="表 4">
@@ -4906,13 +4197,13 @@
               <p:nvPr>
                 <p:extLst>
                   <p:ext uri="{D42A27DB-BD31-4B8C-83A1-F6EECF244321}">
-                    <p14:modId xmlns:p14="http://schemas.microsoft.com/office/powerpoint/2010/main" val="1133684206"/>
+                    <p14:modId xmlns:p14="http://schemas.microsoft.com/office/powerpoint/2010/main" val="1634221325"/>
                   </p:ext>
                 </p:extLst>
               </p:nvPr>
             </p:nvGraphicFramePr>
             <p:xfrm>
-              <a:off x="125971" y="4158046"/>
+              <a:off x="125969" y="4535989"/>
               <a:ext cx="11940060" cy="2006854"/>
             </p:xfrm>
             <a:graphic>
@@ -4969,7 +4260,7 @@
                         <a:p>
                           <a:pPr algn="ctr"/>
                           <a:r>
-                            <a:rPr kumimoji="1" lang="ja-JP" altLang="en-US" sz="2000">
+                            <a:rPr kumimoji="1" lang="ja-JP" altLang="en-US" sz="2000" dirty="0">
                               <a:latin typeface="BIZ UDGothic" panose="020B0400000000000000" pitchFamily="49" charset="-128"/>
                               <a:ea typeface="BIZ UDGothic" panose="020B0400000000000000" pitchFamily="49" charset="-128"/>
                             </a:rPr>
@@ -5160,7 +4451,7 @@
               </a:rPr>
               <a:t>(1)</a:t>
             </a:r>
-            <a:endParaRPr kumimoji="1" lang="ja-JP" altLang="en-US" sz="2400">
+            <a:endParaRPr kumimoji="1" lang="ja-JP" altLang="en-US" sz="2400" dirty="0">
               <a:latin typeface="BIZ UDGothic" panose="020B0400000000000000" pitchFamily="49" charset="-128"/>
               <a:ea typeface="BIZ UDGothic" panose="020B0400000000000000" pitchFamily="49" charset="-128"/>
             </a:endParaRPr>
@@ -5180,8 +4471,8 @@
 </p:sld>
 </file>
 
-<file path=ppt/slides/slide6.xml><?xml version="1.0" encoding="utf-8"?>
-<p:sld xmlns:a="http://schemas.openxmlformats.org/drawingml/2006/main" xmlns:r="http://schemas.openxmlformats.org/officeDocument/2006/relationships" xmlns:p="http://schemas.openxmlformats.org/presentationml/2006/main" show="0">
+<file path=ppt/slides/slide4.xml><?xml version="1.0" encoding="utf-8"?>
+<p:sld xmlns:a="http://schemas.openxmlformats.org/drawingml/2006/main" xmlns:r="http://schemas.openxmlformats.org/officeDocument/2006/relationships" xmlns:p="http://schemas.openxmlformats.org/presentationml/2006/main">
   <p:cSld>
     <p:spTree>
       <p:nvGrpSpPr>
@@ -5202,7 +4493,7 @@
           <p:cNvPr id="2" name="タイトル 1">
             <a:extLst>
               <a:ext uri="{FF2B5EF4-FFF2-40B4-BE49-F238E27FC236}">
-                <a16:creationId xmlns:a16="http://schemas.microsoft.com/office/drawing/2014/main" id="{050923E9-49C5-C5F2-5671-7F635C4628BF}"/>
+                <a16:creationId xmlns:a16="http://schemas.microsoft.com/office/drawing/2014/main" id="{C99B0A93-6458-3844-152B-5391E1BE2B7C}"/>
               </a:ext>
             </a:extLst>
           </p:cNvPr>
@@ -5221,8 +4512,8 @@
           <a:lstStyle/>
           <a:p>
             <a:r>
-              <a:rPr kumimoji="1" lang="ja-JP" altLang="en-US"/>
-              <a:t>図の貼り方</a:t>
+              <a:rPr kumimoji="1" lang="ja-JP" altLang="en-US" dirty="0"/>
+              <a:t>アルゴリズムの記法</a:t>
             </a:r>
           </a:p>
         </p:txBody>
@@ -5232,7 +4523,7 @@
           <p:cNvPr id="3" name="コンテンツ プレースホルダー 2">
             <a:extLst>
               <a:ext uri="{FF2B5EF4-FFF2-40B4-BE49-F238E27FC236}">
-                <a16:creationId xmlns:a16="http://schemas.microsoft.com/office/drawing/2014/main" id="{C18C3F5C-A036-DF7F-4C04-F888219E7E48}"/>
+                <a16:creationId xmlns:a16="http://schemas.microsoft.com/office/drawing/2014/main" id="{12721410-8573-E4C9-E189-C2820DE750A8}"/>
               </a:ext>
             </a:extLst>
           </p:cNvPr>
@@ -5248,39 +4539,30 @@
           <a:bodyPr/>
           <a:lstStyle/>
           <a:p>
-            <a:r>
-              <a:rPr kumimoji="1" lang="ja-JP" altLang="en-US"/>
-              <a:t>画像の横縦比を変更しない</a:t>
+            <a:pPr marL="0" indent="0">
+              <a:buNone/>
+            </a:pPr>
+            <a:r>
+              <a:rPr kumimoji="1" lang="ja-JP" altLang="en-US" dirty="0"/>
+              <a:t>最適化手法のアルゴリズムは表を用いて記述する</a:t>
             </a:r>
             <a:endParaRPr kumimoji="1" lang="en-US" altLang="ja-JP" dirty="0"/>
           </a:p>
           <a:p>
-            <a:endParaRPr lang="en-US" altLang="ja-JP" dirty="0"/>
-          </a:p>
-          <a:p>
+            <a:pPr marL="0" indent="0">
+              <a:buNone/>
+            </a:pPr>
+            <a:r>
+              <a:rPr kumimoji="1" lang="ja-JP" altLang="en-US" dirty="0"/>
+              <a:t>手法名，初期値やハイパーパラメーター，更新則，戻り値を記述する</a:t>
+            </a:r>
             <a:endParaRPr kumimoji="1" lang="en-US" altLang="ja-JP" dirty="0"/>
           </a:p>
           <a:p>
-            <a:endParaRPr lang="en-US" altLang="ja-JP" dirty="0"/>
-          </a:p>
-          <a:p>
-            <a:endParaRPr kumimoji="1" lang="en-US" altLang="ja-JP" dirty="0"/>
-          </a:p>
-          <a:p>
-            <a:endParaRPr lang="en-US" altLang="ja-JP" dirty="0"/>
-          </a:p>
-          <a:p>
-            <a:endParaRPr kumimoji="1" lang="en-US" altLang="ja-JP" dirty="0"/>
-          </a:p>
-          <a:p>
-            <a:endParaRPr lang="en-US" altLang="ja-JP" dirty="0"/>
-          </a:p>
-          <a:p>
-            <a:r>
-              <a:rPr lang="ja-JP" altLang="en-US"/>
-              <a:t>図番号，図タイトルを挿入する場合は，画像の下部に</a:t>
-            </a:r>
-            <a:endParaRPr kumimoji="1" lang="ja-JP" altLang="en-US"/>
+            <a:pPr marL="0" indent="0">
+              <a:buNone/>
+            </a:pPr>
+            <a:endParaRPr kumimoji="1" lang="ja-JP" altLang="en-US" dirty="0"/>
           </a:p>
         </p:txBody>
       </p:sp>
@@ -5289,7 +4571,7 @@
           <p:cNvPr id="4" name="スライド番号プレースホルダー 3">
             <a:extLst>
               <a:ext uri="{FF2B5EF4-FFF2-40B4-BE49-F238E27FC236}">
-                <a16:creationId xmlns:a16="http://schemas.microsoft.com/office/drawing/2014/main" id="{20A99163-F359-EC5A-5A4F-9BDD23849408}"/>
+                <a16:creationId xmlns:a16="http://schemas.microsoft.com/office/drawing/2014/main" id="{65566DE4-A2CE-A8E0-7933-D9C7CE6A4B3F}"/>
               </a:ext>
             </a:extLst>
           </p:cNvPr>
@@ -5307,112 +4589,961 @@
           <a:p>
             <a:fld id="{9C0FEE9A-3EB6-844C-8184-5D808DF01412}" type="slidenum">
               <a:rPr kumimoji="1" lang="ja-JP" altLang="en-US" smtClean="0"/>
-              <a:t>6</a:t>
+              <a:t>4</a:t>
             </a:fld>
             <a:endParaRPr kumimoji="1" lang="ja-JP" altLang="en-US"/>
           </a:p>
         </p:txBody>
       </p:sp>
-      <p:pic>
-        <p:nvPicPr>
-          <p:cNvPr id="1026" name="Picture 2">
+      <mc:AlternateContent xmlns:mc="http://schemas.openxmlformats.org/markup-compatibility/2006">
+        <mc:Choice xmlns:a14="http://schemas.microsoft.com/office/drawing/2010/main" Requires="a14">
+          <p:graphicFrame>
+            <p:nvGraphicFramePr>
+              <p:cNvPr id="5" name="表 4">
+                <a:extLst>
+                  <a:ext uri="{FF2B5EF4-FFF2-40B4-BE49-F238E27FC236}">
+                    <a16:creationId xmlns:a16="http://schemas.microsoft.com/office/drawing/2014/main" id="{1606E017-E85D-EE34-924F-9959E06D1C5A}"/>
+                  </a:ext>
+                </a:extLst>
+              </p:cNvPr>
+              <p:cNvGraphicFramePr>
+                <a:graphicFrameLocks noGrp="1"/>
+              </p:cNvGraphicFramePr>
+              <p:nvPr>
+                <p:extLst>
+                  <p:ext uri="{D42A27DB-BD31-4B8C-83A1-F6EECF244321}">
+                    <p14:modId xmlns:p14="http://schemas.microsoft.com/office/powerpoint/2010/main" val="162040509"/>
+                  </p:ext>
+                </p:extLst>
+              </p:nvPr>
+            </p:nvGraphicFramePr>
+            <p:xfrm>
+              <a:off x="125969" y="2317559"/>
+              <a:ext cx="5970031" cy="2222881"/>
+            </p:xfrm>
+            <a:graphic>
+              <a:graphicData uri="http://schemas.openxmlformats.org/drawingml/2006/table">
+                <a:tbl>
+                  <a:tblPr firstRow="1" bandRow="1">
+                    <a:tableStyleId>{2D5ABB26-0587-4C30-8999-92F81FD0307C}</a:tableStyleId>
+                  </a:tblPr>
+                  <a:tblGrid>
+                    <a:gridCol w="5970031">
+                      <a:extLst>
+                        <a:ext uri="{9D8B030D-6E8A-4147-A177-3AD203B41FA5}">
+                          <a16:colId xmlns:a16="http://schemas.microsoft.com/office/drawing/2014/main" val="1752847787"/>
+                        </a:ext>
+                      </a:extLst>
+                    </a:gridCol>
+                  </a:tblGrid>
+                  <a:tr h="370840">
+                    <a:tc>
+                      <a:txBody>
+                        <a:bodyPr/>
+                        <a:lstStyle/>
+                        <a:p>
+                          <a:r>
+                            <a:rPr kumimoji="1" lang="en-US" altLang="ja-JP" sz="2000" dirty="0"/>
+                            <a:t>Alg. </a:t>
+                          </a:r>
+                          <a:r>
+                            <a:rPr kumimoji="1" lang="ja-JP" altLang="en-US" sz="2000" dirty="0"/>
+                            <a:t>確率的勾配降下法</a:t>
+                          </a:r>
+                        </a:p>
+                      </a:txBody>
+                      <a:tcPr>
+                        <a:lnT w="12700" cap="flat" cmpd="sng" algn="ctr">
+                          <a:solidFill>
+                            <a:schemeClr val="tx1"/>
+                          </a:solidFill>
+                          <a:prstDash val="solid"/>
+                          <a:round/>
+                          <a:headEnd type="none" w="med" len="med"/>
+                          <a:tailEnd type="none" w="med" len="med"/>
+                        </a:lnT>
+                        <a:lnB w="12700" cap="flat" cmpd="sng" algn="ctr">
+                          <a:solidFill>
+                            <a:schemeClr val="tx1"/>
+                          </a:solidFill>
+                          <a:prstDash val="solid"/>
+                          <a:round/>
+                          <a:headEnd type="none" w="med" len="med"/>
+                          <a:tailEnd type="none" w="med" len="med"/>
+                        </a:lnB>
+                      </a:tcPr>
+                    </a:tc>
+                    <a:extLst>
+                      <a:ext uri="{0D108BD9-81ED-4DB2-BD59-A6C34878D82A}">
+                        <a16:rowId xmlns:a16="http://schemas.microsoft.com/office/drawing/2014/main" val="2770879385"/>
+                      </a:ext>
+                    </a:extLst>
+                  </a:tr>
+                  <a:tr h="370840">
+                    <a:tc>
+                      <a:txBody>
+                        <a:bodyPr/>
+                        <a:lstStyle/>
+                        <a:p>
+                          <a:r>
+                            <a:rPr kumimoji="1" lang="en-US" altLang="ja-JP" sz="2000" dirty="0"/>
+                            <a:t>Req. </a:t>
+                          </a:r>
+                          <a14:m>
+                            <m:oMath xmlns:m="http://schemas.openxmlformats.org/officeDocument/2006/math">
+                              <m:sSub>
+                                <m:sSubPr>
+                                  <m:ctrlPr>
+                                    <a:rPr kumimoji="1" lang="en-US" altLang="ja-JP" sz="2000" b="0" i="1" smtClean="0">
+                                      <a:latin typeface="Cambria Math" panose="02040503050406030204" pitchFamily="18" charset="0"/>
+                                    </a:rPr>
+                                  </m:ctrlPr>
+                                </m:sSubPr>
+                                <m:e>
+                                  <m:r>
+                                    <a:rPr kumimoji="1" lang="en-US" altLang="ja-JP" sz="2000" b="0" i="1" smtClean="0">
+                                      <a:latin typeface="Cambria Math" panose="02040503050406030204" pitchFamily="18" charset="0"/>
+                                    </a:rPr>
+                                    <m:t>𝑤</m:t>
+                                  </m:r>
+                                </m:e>
+                                <m:sub>
+                                  <m:r>
+                                    <a:rPr kumimoji="1" lang="en-US" altLang="ja-JP" sz="2000" b="0" i="1" smtClean="0">
+                                      <a:latin typeface="Cambria Math" panose="02040503050406030204" pitchFamily="18" charset="0"/>
+                                    </a:rPr>
+                                    <m:t>0</m:t>
+                                  </m:r>
+                                </m:sub>
+                              </m:sSub>
+                            </m:oMath>
+                          </a14:m>
+                          <a:r>
+                            <a:rPr kumimoji="1" lang="en-US" altLang="ja-JP" sz="2000" dirty="0"/>
+                            <a:t>; </a:t>
+                          </a:r>
+                          <a:r>
+                            <a:rPr kumimoji="1" lang="ja-JP" altLang="en-US" sz="2000" dirty="0"/>
+                            <a:t>初期パラメーター，</a:t>
+                          </a:r>
+                          <a14:m>
+                            <m:oMath xmlns:m="http://schemas.openxmlformats.org/officeDocument/2006/math">
+                              <m:r>
+                                <a:rPr kumimoji="1" lang="en-US" altLang="ja-JP" sz="2000" b="0" i="1" smtClean="0">
+                                  <a:latin typeface="Cambria Math" panose="02040503050406030204" pitchFamily="18" charset="0"/>
+                                </a:rPr>
+                                <m:t>𝜂</m:t>
+                              </m:r>
+                            </m:oMath>
+                          </a14:m>
+                          <a:r>
+                            <a:rPr kumimoji="1" lang="en-US" altLang="ja-JP" sz="2000" dirty="0"/>
+                            <a:t>; </a:t>
+                          </a:r>
+                          <a:r>
+                            <a:rPr kumimoji="1" lang="ja-JP" altLang="en-US" sz="2000" dirty="0"/>
+                            <a:t>学習率</a:t>
+                          </a:r>
+                        </a:p>
+                      </a:txBody>
+                      <a:tcPr>
+                        <a:lnT w="12700" cap="flat" cmpd="sng" algn="ctr">
+                          <a:solidFill>
+                            <a:schemeClr val="tx1"/>
+                          </a:solidFill>
+                          <a:prstDash val="solid"/>
+                          <a:round/>
+                          <a:headEnd type="none" w="med" len="med"/>
+                          <a:tailEnd type="none" w="med" len="med"/>
+                        </a:lnT>
+                        <a:lnB w="12700" cap="flat" cmpd="sng" algn="ctr">
+                          <a:solidFill>
+                            <a:schemeClr val="tx1"/>
+                          </a:solidFill>
+                          <a:prstDash val="solid"/>
+                          <a:round/>
+                          <a:headEnd type="none" w="med" len="med"/>
+                          <a:tailEnd type="none" w="med" len="med"/>
+                        </a:lnB>
+                      </a:tcPr>
+                    </a:tc>
+                    <a:extLst>
+                      <a:ext uri="{0D108BD9-81ED-4DB2-BD59-A6C34878D82A}">
+                        <a16:rowId xmlns:a16="http://schemas.microsoft.com/office/drawing/2014/main" val="4278813793"/>
+                      </a:ext>
+                    </a:extLst>
+                  </a:tr>
+                  <a:tr h="370840">
+                    <a:tc>
+                      <a:txBody>
+                        <a:bodyPr/>
+                        <a:lstStyle/>
+                        <a:p>
+                          <a:r>
+                            <a:rPr kumimoji="1" lang="en-US" altLang="ja-JP" sz="2000" dirty="0"/>
+                            <a:t>For </a:t>
+                          </a:r>
+                          <a14:m>
+                            <m:oMath xmlns:m="http://schemas.openxmlformats.org/officeDocument/2006/math">
+                              <m:r>
+                                <a:rPr kumimoji="1" lang="en-US" altLang="ja-JP" sz="2000" b="0" i="1" smtClean="0">
+                                  <a:latin typeface="Cambria Math" panose="02040503050406030204" pitchFamily="18" charset="0"/>
+                                </a:rPr>
+                                <m:t>𝑘</m:t>
+                              </m:r>
+                              <m:r>
+                                <a:rPr kumimoji="1" lang="en-US" altLang="ja-JP" sz="2000" b="0" i="1" smtClean="0">
+                                  <a:latin typeface="Cambria Math" panose="02040503050406030204" pitchFamily="18" charset="0"/>
+                                </a:rPr>
+                                <m:t>=0,1,…,</m:t>
+                              </m:r>
+                              <m:r>
+                                <a:rPr kumimoji="1" lang="en-US" altLang="ja-JP" sz="2000" b="0" i="1" smtClean="0">
+                                  <a:latin typeface="Cambria Math" panose="02040503050406030204" pitchFamily="18" charset="0"/>
+                                </a:rPr>
+                                <m:t>𝐾</m:t>
+                              </m:r>
+                            </m:oMath>
+                          </a14:m>
+                          <a:r>
+                            <a:rPr kumimoji="1" lang="ja-JP" altLang="en-US" sz="2000" dirty="0"/>
+                            <a:t> </a:t>
+                          </a:r>
+                          <a:r>
+                            <a:rPr kumimoji="1" lang="en-US" altLang="ja-JP" sz="2000" dirty="0"/>
+                            <a:t>Do</a:t>
+                          </a:r>
+                        </a:p>
+                        <a:p>
+                          <a:r>
+                            <a:rPr kumimoji="1" lang="en-US" altLang="ja-JP" sz="2000" dirty="0"/>
+                            <a:t>    </a:t>
+                          </a:r>
+                          <a:r>
+                            <a:rPr kumimoji="1" lang="ja-JP" altLang="en-US" sz="2000" dirty="0"/>
+                            <a:t>ミニバッチ</a:t>
+                          </a:r>
+                          <a14:m>
+                            <m:oMath xmlns:m="http://schemas.openxmlformats.org/officeDocument/2006/math">
+                              <m:sSub>
+                                <m:sSubPr>
+                                  <m:ctrlPr>
+                                    <a:rPr kumimoji="1" lang="en-US" altLang="ja-JP" sz="2000" b="0" i="1" smtClean="0">
+                                      <a:latin typeface="Cambria Math" panose="02040503050406030204" pitchFamily="18" charset="0"/>
+                                    </a:rPr>
+                                  </m:ctrlPr>
+                                </m:sSubPr>
+                                <m:e>
+                                  <m:r>
+                                    <a:rPr kumimoji="1" lang="en-US" altLang="ja-JP" sz="2000" b="0" i="1" smtClean="0">
+                                      <a:latin typeface="Cambria Math" panose="02040503050406030204" pitchFamily="18" charset="0"/>
+                                    </a:rPr>
+                                    <m:t>ℬ</m:t>
+                                  </m:r>
+                                </m:e>
+                                <m:sub>
+                                  <m:r>
+                                    <a:rPr kumimoji="1" lang="en-US" altLang="ja-JP" sz="2000" b="0" i="1" smtClean="0">
+                                      <a:latin typeface="Cambria Math" panose="02040503050406030204" pitchFamily="18" charset="0"/>
+                                    </a:rPr>
+                                    <m:t>𝑘</m:t>
+                                  </m:r>
+                                </m:sub>
+                              </m:sSub>
+                            </m:oMath>
+                          </a14:m>
+                          <a:r>
+                            <a:rPr kumimoji="1" lang="ja-JP" altLang="en-US" sz="2000" dirty="0"/>
+                            <a:t>をサンプリング</a:t>
+                          </a:r>
+                          <a:endParaRPr kumimoji="1" lang="en-US" altLang="ja-JP" sz="2000" dirty="0"/>
+                        </a:p>
+                        <a:p>
+                          <a:r>
+                            <a:rPr kumimoji="1" lang="ja-JP" altLang="en-US" sz="2000" dirty="0"/>
+                            <a:t>    </a:t>
+                          </a:r>
+                          <a14:m>
+                            <m:oMath xmlns:m="http://schemas.openxmlformats.org/officeDocument/2006/math">
+                              <m:sSub>
+                                <m:sSubPr>
+                                  <m:ctrlPr>
+                                    <a:rPr kumimoji="1" lang="en-US" altLang="ja-JP" sz="2000" b="0" i="1" smtClean="0">
+                                      <a:latin typeface="Cambria Math" panose="02040503050406030204" pitchFamily="18" charset="0"/>
+                                    </a:rPr>
+                                  </m:ctrlPr>
+                                </m:sSubPr>
+                                <m:e>
+                                  <m:r>
+                                    <a:rPr kumimoji="1" lang="en-US" altLang="ja-JP" sz="2000" b="0" i="1" smtClean="0">
+                                      <a:latin typeface="Cambria Math" panose="02040503050406030204" pitchFamily="18" charset="0"/>
+                                    </a:rPr>
+                                    <m:t>𝑤</m:t>
+                                  </m:r>
+                                </m:e>
+                                <m:sub>
+                                  <m:r>
+                                    <a:rPr kumimoji="1" lang="en-US" altLang="ja-JP" sz="2000" b="0" i="1" smtClean="0">
+                                      <a:latin typeface="Cambria Math" panose="02040503050406030204" pitchFamily="18" charset="0"/>
+                                    </a:rPr>
+                                    <m:t>𝑘</m:t>
+                                  </m:r>
+                                  <m:r>
+                                    <a:rPr kumimoji="1" lang="en-US" altLang="ja-JP" sz="2000" b="0" i="1" smtClean="0">
+                                      <a:latin typeface="Cambria Math" panose="02040503050406030204" pitchFamily="18" charset="0"/>
+                                    </a:rPr>
+                                    <m:t>+1</m:t>
+                                  </m:r>
+                                </m:sub>
+                              </m:sSub>
+                              <m:r>
+                                <a:rPr kumimoji="1" lang="en-US" altLang="ja-JP" sz="2000" b="0" i="1" smtClean="0">
+                                  <a:latin typeface="Cambria Math" panose="02040503050406030204" pitchFamily="18" charset="0"/>
+                                </a:rPr>
+                                <m:t>=</m:t>
+                              </m:r>
+                              <m:sSub>
+                                <m:sSubPr>
+                                  <m:ctrlPr>
+                                    <a:rPr kumimoji="1" lang="en-US" altLang="ja-JP" sz="2000" b="0" i="1" smtClean="0">
+                                      <a:latin typeface="Cambria Math" panose="02040503050406030204" pitchFamily="18" charset="0"/>
+                                    </a:rPr>
+                                  </m:ctrlPr>
+                                </m:sSubPr>
+                                <m:e>
+                                  <m:r>
+                                    <a:rPr kumimoji="1" lang="en-US" altLang="ja-JP" sz="2000" b="0" i="1" smtClean="0">
+                                      <a:latin typeface="Cambria Math" panose="02040503050406030204" pitchFamily="18" charset="0"/>
+                                    </a:rPr>
+                                    <m:t>𝑤</m:t>
+                                  </m:r>
+                                </m:e>
+                                <m:sub>
+                                  <m:r>
+                                    <a:rPr kumimoji="1" lang="en-US" altLang="ja-JP" sz="2000" b="0" i="1" smtClean="0">
+                                      <a:latin typeface="Cambria Math" panose="02040503050406030204" pitchFamily="18" charset="0"/>
+                                    </a:rPr>
+                                    <m:t>𝑘</m:t>
+                                  </m:r>
+                                </m:sub>
+                              </m:sSub>
+                              <m:r>
+                                <a:rPr kumimoji="1" lang="en-US" altLang="ja-JP" sz="2000" b="0" i="1" smtClean="0">
+                                  <a:latin typeface="Cambria Math" panose="02040503050406030204" pitchFamily="18" charset="0"/>
+                                </a:rPr>
+                                <m:t>−</m:t>
+                              </m:r>
+                              <m:r>
+                                <a:rPr kumimoji="1" lang="en-US" altLang="ja-JP" sz="2000" b="0" i="1" smtClean="0">
+                                  <a:latin typeface="Cambria Math" panose="02040503050406030204" pitchFamily="18" charset="0"/>
+                                </a:rPr>
+                                <m:t>𝜂</m:t>
+                              </m:r>
+                              <m:r>
+                                <m:rPr>
+                                  <m:sty m:val="p"/>
+                                </m:rPr>
+                                <a:rPr kumimoji="1" lang="en-US" altLang="ja-JP" sz="2000" b="0" i="0" smtClean="0">
+                                  <a:latin typeface="Cambria Math" panose="02040503050406030204" pitchFamily="18" charset="0"/>
+                                </a:rPr>
+                                <m:t>∇</m:t>
+                              </m:r>
+                              <m:sSub>
+                                <m:sSubPr>
+                                  <m:ctrlPr>
+                                    <a:rPr kumimoji="1" lang="en-US" altLang="ja-JP" sz="2000" b="0" i="1" smtClean="0">
+                                      <a:latin typeface="Cambria Math" panose="02040503050406030204" pitchFamily="18" charset="0"/>
+                                    </a:rPr>
+                                  </m:ctrlPr>
+                                </m:sSubPr>
+                                <m:e>
+                                  <m:r>
+                                    <a:rPr kumimoji="1" lang="en-US" altLang="ja-JP" sz="2000" b="0" i="1" smtClean="0">
+                                      <a:latin typeface="Cambria Math" panose="02040503050406030204" pitchFamily="18" charset="0"/>
+                                    </a:rPr>
+                                    <m:t>𝑓</m:t>
+                                  </m:r>
+                                </m:e>
+                                <m:sub>
+                                  <m:sSub>
+                                    <m:sSubPr>
+                                      <m:ctrlPr>
+                                        <a:rPr kumimoji="1" lang="en-US" altLang="ja-JP" sz="2000" b="0" i="1" smtClean="0">
+                                          <a:latin typeface="Cambria Math" panose="02040503050406030204" pitchFamily="18" charset="0"/>
+                                        </a:rPr>
+                                      </m:ctrlPr>
+                                    </m:sSubPr>
+                                    <m:e>
+                                      <m:r>
+                                        <a:rPr kumimoji="1" lang="en-US" altLang="ja-JP" sz="2000" b="0" i="1" smtClean="0">
+                                          <a:latin typeface="Cambria Math" panose="02040503050406030204" pitchFamily="18" charset="0"/>
+                                        </a:rPr>
+                                        <m:t>ℬ</m:t>
+                                      </m:r>
+                                    </m:e>
+                                    <m:sub>
+                                      <m:r>
+                                        <a:rPr kumimoji="1" lang="en-US" altLang="ja-JP" sz="2000" b="0" i="1" smtClean="0">
+                                          <a:latin typeface="Cambria Math" panose="02040503050406030204" pitchFamily="18" charset="0"/>
+                                        </a:rPr>
+                                        <m:t>𝑘</m:t>
+                                      </m:r>
+                                    </m:sub>
+                                  </m:sSub>
+                                </m:sub>
+                              </m:sSub>
+                              <m:d>
+                                <m:dPr>
+                                  <m:ctrlPr>
+                                    <a:rPr kumimoji="1" lang="en-US" altLang="ja-JP" sz="2000" b="0" i="1" smtClean="0">
+                                      <a:latin typeface="Cambria Math" panose="02040503050406030204" pitchFamily="18" charset="0"/>
+                                    </a:rPr>
+                                  </m:ctrlPr>
+                                </m:dPr>
+                                <m:e>
+                                  <m:sSub>
+                                    <m:sSubPr>
+                                      <m:ctrlPr>
+                                        <a:rPr kumimoji="1" lang="en-US" altLang="ja-JP" sz="2000" b="0" i="1" smtClean="0">
+                                          <a:latin typeface="Cambria Math" panose="02040503050406030204" pitchFamily="18" charset="0"/>
+                                        </a:rPr>
+                                      </m:ctrlPr>
+                                    </m:sSubPr>
+                                    <m:e>
+                                      <m:r>
+                                        <a:rPr kumimoji="1" lang="en-US" altLang="ja-JP" sz="2000" b="0" i="1" smtClean="0">
+                                          <a:latin typeface="Cambria Math" panose="02040503050406030204" pitchFamily="18" charset="0"/>
+                                        </a:rPr>
+                                        <m:t>𝑤</m:t>
+                                      </m:r>
+                                    </m:e>
+                                    <m:sub>
+                                      <m:r>
+                                        <a:rPr kumimoji="1" lang="en-US" altLang="ja-JP" sz="2000" b="0" i="1" smtClean="0">
+                                          <a:latin typeface="Cambria Math" panose="02040503050406030204" pitchFamily="18" charset="0"/>
+                                        </a:rPr>
+                                        <m:t>𝑘</m:t>
+                                      </m:r>
+                                    </m:sub>
+                                  </m:sSub>
+                                </m:e>
+                              </m:d>
+                            </m:oMath>
+                          </a14:m>
+                          <a:endParaRPr kumimoji="1" lang="en-US" altLang="ja-JP" sz="2000" dirty="0"/>
+                        </a:p>
+                      </a:txBody>
+                      <a:tcPr>
+                        <a:lnT w="12700" cap="flat" cmpd="sng" algn="ctr">
+                          <a:solidFill>
+                            <a:schemeClr val="tx1"/>
+                          </a:solidFill>
+                          <a:prstDash val="solid"/>
+                          <a:round/>
+                          <a:headEnd type="none" w="med" len="med"/>
+                          <a:tailEnd type="none" w="med" len="med"/>
+                        </a:lnT>
+                        <a:lnB w="12700" cap="flat" cmpd="sng" algn="ctr">
+                          <a:solidFill>
+                            <a:schemeClr val="tx1"/>
+                          </a:solidFill>
+                          <a:prstDash val="solid"/>
+                          <a:round/>
+                          <a:headEnd type="none" w="med" len="med"/>
+                          <a:tailEnd type="none" w="med" len="med"/>
+                        </a:lnB>
+                      </a:tcPr>
+                    </a:tc>
+                    <a:extLst>
+                      <a:ext uri="{0D108BD9-81ED-4DB2-BD59-A6C34878D82A}">
+                        <a16:rowId xmlns:a16="http://schemas.microsoft.com/office/drawing/2014/main" val="3445629740"/>
+                      </a:ext>
+                    </a:extLst>
+                  </a:tr>
+                  <a:tr h="370840">
+                    <a:tc>
+                      <a:txBody>
+                        <a:bodyPr/>
+                        <a:lstStyle/>
+                        <a:p>
+                          <a:r>
+                            <a:rPr kumimoji="1" lang="en-US" altLang="ja-JP" sz="2000" dirty="0"/>
+                            <a:t>Ret. </a:t>
+                          </a:r>
+                          <a14:m>
+                            <m:oMath xmlns:m="http://schemas.openxmlformats.org/officeDocument/2006/math">
+                              <m:sSub>
+                                <m:sSubPr>
+                                  <m:ctrlPr>
+                                    <a:rPr kumimoji="1" lang="en-US" altLang="ja-JP" sz="2000" b="0" i="1" smtClean="0">
+                                      <a:latin typeface="Cambria Math" panose="02040503050406030204" pitchFamily="18" charset="0"/>
+                                    </a:rPr>
+                                  </m:ctrlPr>
+                                </m:sSubPr>
+                                <m:e>
+                                  <m:r>
+                                    <a:rPr kumimoji="1" lang="en-US" altLang="ja-JP" sz="2000" b="0" i="1" smtClean="0">
+                                      <a:latin typeface="Cambria Math" panose="02040503050406030204" pitchFamily="18" charset="0"/>
+                                    </a:rPr>
+                                    <m:t>𝑤</m:t>
+                                  </m:r>
+                                </m:e>
+                                <m:sub>
+                                  <m:r>
+                                    <a:rPr kumimoji="1" lang="en-US" altLang="ja-JP" sz="2000" b="0" i="1" smtClean="0">
+                                      <a:latin typeface="Cambria Math" panose="02040503050406030204" pitchFamily="18" charset="0"/>
+                                    </a:rPr>
+                                    <m:t>𝐾</m:t>
+                                  </m:r>
+                                </m:sub>
+                              </m:sSub>
+                            </m:oMath>
+                          </a14:m>
+                          <a:endParaRPr kumimoji="1" lang="ja-JP" altLang="en-US" sz="2000" dirty="0"/>
+                        </a:p>
+                      </a:txBody>
+                      <a:tcPr>
+                        <a:lnT w="12700" cap="flat" cmpd="sng" algn="ctr">
+                          <a:solidFill>
+                            <a:schemeClr val="tx1"/>
+                          </a:solidFill>
+                          <a:prstDash val="solid"/>
+                          <a:round/>
+                          <a:headEnd type="none" w="med" len="med"/>
+                          <a:tailEnd type="none" w="med" len="med"/>
+                        </a:lnT>
+                        <a:lnB w="12700" cap="flat" cmpd="sng" algn="ctr">
+                          <a:solidFill>
+                            <a:schemeClr val="tx1"/>
+                          </a:solidFill>
+                          <a:prstDash val="solid"/>
+                          <a:round/>
+                          <a:headEnd type="none" w="med" len="med"/>
+                          <a:tailEnd type="none" w="med" len="med"/>
+                        </a:lnB>
+                      </a:tcPr>
+                    </a:tc>
+                    <a:extLst>
+                      <a:ext uri="{0D108BD9-81ED-4DB2-BD59-A6C34878D82A}">
+                        <a16:rowId xmlns:a16="http://schemas.microsoft.com/office/drawing/2014/main" val="3831119886"/>
+                      </a:ext>
+                    </a:extLst>
+                  </a:tr>
+                </a:tbl>
+              </a:graphicData>
+            </a:graphic>
+          </p:graphicFrame>
+        </mc:Choice>
+        <mc:Fallback>
+          <p:graphicFrame>
+            <p:nvGraphicFramePr>
+              <p:cNvPr id="5" name="表 4">
+                <a:extLst>
+                  <a:ext uri="{FF2B5EF4-FFF2-40B4-BE49-F238E27FC236}">
+                    <a16:creationId xmlns:a16="http://schemas.microsoft.com/office/drawing/2014/main" id="{1606E017-E85D-EE34-924F-9959E06D1C5A}"/>
+                  </a:ext>
+                </a:extLst>
+              </p:cNvPr>
+              <p:cNvGraphicFramePr>
+                <a:graphicFrameLocks noGrp="1"/>
+              </p:cNvGraphicFramePr>
+              <p:nvPr>
+                <p:extLst>
+                  <p:ext uri="{D42A27DB-BD31-4B8C-83A1-F6EECF244321}">
+                    <p14:modId xmlns:p14="http://schemas.microsoft.com/office/powerpoint/2010/main" val="162040509"/>
+                  </p:ext>
+                </p:extLst>
+              </p:nvPr>
+            </p:nvGraphicFramePr>
+            <p:xfrm>
+              <a:off x="125969" y="2317559"/>
+              <a:ext cx="5970031" cy="2222881"/>
+            </p:xfrm>
+            <a:graphic>
+              <a:graphicData uri="http://schemas.openxmlformats.org/drawingml/2006/table">
+                <a:tbl>
+                  <a:tblPr firstRow="1" bandRow="1">
+                    <a:tableStyleId>{2D5ABB26-0587-4C30-8999-92F81FD0307C}</a:tableStyleId>
+                  </a:tblPr>
+                  <a:tblGrid>
+                    <a:gridCol w="5970031">
+                      <a:extLst>
+                        <a:ext uri="{9D8B030D-6E8A-4147-A177-3AD203B41FA5}">
+                          <a16:colId xmlns:a16="http://schemas.microsoft.com/office/drawing/2014/main" val="1752847787"/>
+                        </a:ext>
+                      </a:extLst>
+                    </a:gridCol>
+                  </a:tblGrid>
+                  <a:tr h="396240">
+                    <a:tc>
+                      <a:txBody>
+                        <a:bodyPr/>
+                        <a:lstStyle/>
+                        <a:p>
+                          <a:r>
+                            <a:rPr kumimoji="1" lang="en-US" altLang="ja-JP" sz="2000" dirty="0"/>
+                            <a:t>Alg. </a:t>
+                          </a:r>
+                          <a:r>
+                            <a:rPr kumimoji="1" lang="ja-JP" altLang="en-US" sz="2000" dirty="0"/>
+                            <a:t>確率的勾配降下法</a:t>
+                          </a:r>
+                        </a:p>
+                      </a:txBody>
+                      <a:tcPr>
+                        <a:lnT w="12700" cap="flat" cmpd="sng" algn="ctr">
+                          <a:solidFill>
+                            <a:schemeClr val="tx1"/>
+                          </a:solidFill>
+                          <a:prstDash val="solid"/>
+                          <a:round/>
+                          <a:headEnd type="none" w="med" len="med"/>
+                          <a:tailEnd type="none" w="med" len="med"/>
+                        </a:lnT>
+                        <a:lnB w="12700" cap="flat" cmpd="sng" algn="ctr">
+                          <a:solidFill>
+                            <a:schemeClr val="tx1"/>
+                          </a:solidFill>
+                          <a:prstDash val="solid"/>
+                          <a:round/>
+                          <a:headEnd type="none" w="med" len="med"/>
+                          <a:tailEnd type="none" w="med" len="med"/>
+                        </a:lnB>
+                      </a:tcPr>
+                    </a:tc>
+                    <a:extLst>
+                      <a:ext uri="{0D108BD9-81ED-4DB2-BD59-A6C34878D82A}">
+                        <a16:rowId xmlns:a16="http://schemas.microsoft.com/office/drawing/2014/main" val="2770879385"/>
+                      </a:ext>
+                    </a:extLst>
+                  </a:tr>
+                  <a:tr h="396240">
+                    <a:tc>
+                      <a:txBody>
+                        <a:bodyPr/>
+                        <a:lstStyle/>
+                        <a:p>
+                          <a:endParaRPr lang="ja-JP"/>
+                        </a:p>
+                      </a:txBody>
+                      <a:tcPr>
+                        <a:lnT w="12700" cap="flat" cmpd="sng" algn="ctr">
+                          <a:solidFill>
+                            <a:schemeClr val="tx1"/>
+                          </a:solidFill>
+                          <a:prstDash val="solid"/>
+                          <a:round/>
+                          <a:headEnd type="none" w="med" len="med"/>
+                          <a:tailEnd type="none" w="med" len="med"/>
+                        </a:lnT>
+                        <a:lnB w="12700" cap="flat" cmpd="sng" algn="ctr">
+                          <a:solidFill>
+                            <a:schemeClr val="tx1"/>
+                          </a:solidFill>
+                          <a:prstDash val="solid"/>
+                          <a:round/>
+                          <a:headEnd type="none" w="med" len="med"/>
+                          <a:tailEnd type="none" w="med" len="med"/>
+                        </a:lnB>
+                        <a:blipFill>
+                          <a:blip r:embed="rId2"/>
+                          <a:stretch>
+                            <a:fillRect t="-107692" r="-204" b="-384615"/>
+                          </a:stretch>
+                        </a:blipFill>
+                      </a:tcPr>
+                    </a:tc>
+                    <a:extLst>
+                      <a:ext uri="{0D108BD9-81ED-4DB2-BD59-A6C34878D82A}">
+                        <a16:rowId xmlns:a16="http://schemas.microsoft.com/office/drawing/2014/main" val="4278813793"/>
+                      </a:ext>
+                    </a:extLst>
+                  </a:tr>
+                  <a:tr h="1034161">
+                    <a:tc>
+                      <a:txBody>
+                        <a:bodyPr/>
+                        <a:lstStyle/>
+                        <a:p>
+                          <a:endParaRPr lang="ja-JP"/>
+                        </a:p>
+                      </a:txBody>
+                      <a:tcPr>
+                        <a:lnT w="12700" cap="flat" cmpd="sng" algn="ctr">
+                          <a:solidFill>
+                            <a:schemeClr val="tx1"/>
+                          </a:solidFill>
+                          <a:prstDash val="solid"/>
+                          <a:round/>
+                          <a:headEnd type="none" w="med" len="med"/>
+                          <a:tailEnd type="none" w="med" len="med"/>
+                        </a:lnT>
+                        <a:lnB w="12700" cap="flat" cmpd="sng" algn="ctr">
+                          <a:solidFill>
+                            <a:schemeClr val="tx1"/>
+                          </a:solidFill>
+                          <a:prstDash val="solid"/>
+                          <a:round/>
+                          <a:headEnd type="none" w="med" len="med"/>
+                          <a:tailEnd type="none" w="med" len="med"/>
+                        </a:lnB>
+                        <a:blipFill>
+                          <a:blip r:embed="rId2"/>
+                          <a:stretch>
+                            <a:fillRect t="-79412" r="-204" b="-47059"/>
+                          </a:stretch>
+                        </a:blipFill>
+                      </a:tcPr>
+                    </a:tc>
+                    <a:extLst>
+                      <a:ext uri="{0D108BD9-81ED-4DB2-BD59-A6C34878D82A}">
+                        <a16:rowId xmlns:a16="http://schemas.microsoft.com/office/drawing/2014/main" val="3445629740"/>
+                      </a:ext>
+                    </a:extLst>
+                  </a:tr>
+                  <a:tr h="396240">
+                    <a:tc>
+                      <a:txBody>
+                        <a:bodyPr/>
+                        <a:lstStyle/>
+                        <a:p>
+                          <a:endParaRPr lang="ja-JP"/>
+                        </a:p>
+                      </a:txBody>
+                      <a:tcPr>
+                        <a:lnT w="12700" cap="flat" cmpd="sng" algn="ctr">
+                          <a:solidFill>
+                            <a:schemeClr val="tx1"/>
+                          </a:solidFill>
+                          <a:prstDash val="solid"/>
+                          <a:round/>
+                          <a:headEnd type="none" w="med" len="med"/>
+                          <a:tailEnd type="none" w="med" len="med"/>
+                        </a:lnT>
+                        <a:lnB w="12700" cap="flat" cmpd="sng" algn="ctr">
+                          <a:solidFill>
+                            <a:schemeClr val="tx1"/>
+                          </a:solidFill>
+                          <a:prstDash val="solid"/>
+                          <a:round/>
+                          <a:headEnd type="none" w="med" len="med"/>
+                          <a:tailEnd type="none" w="med" len="med"/>
+                        </a:lnB>
+                        <a:blipFill>
+                          <a:blip r:embed="rId2"/>
+                          <a:stretch>
+                            <a:fillRect t="-469231" r="-204" b="-23077"/>
+                          </a:stretch>
+                        </a:blipFill>
+                      </a:tcPr>
+                    </a:tc>
+                    <a:extLst>
+                      <a:ext uri="{0D108BD9-81ED-4DB2-BD59-A6C34878D82A}">
+                        <a16:rowId xmlns:a16="http://schemas.microsoft.com/office/drawing/2014/main" val="3831119886"/>
+                      </a:ext>
+                    </a:extLst>
+                  </a:tr>
+                </a:tbl>
+              </a:graphicData>
+            </a:graphic>
+          </p:graphicFrame>
+        </mc:Fallback>
+      </mc:AlternateContent>
+    </p:spTree>
+    <p:extLst>
+      <p:ext uri="{BB962C8B-B14F-4D97-AF65-F5344CB8AC3E}">
+        <p14:creationId xmlns:p14="http://schemas.microsoft.com/office/powerpoint/2010/main" val="2764451273"/>
+      </p:ext>
+    </p:extLst>
+  </p:cSld>
+  <p:clrMapOvr>
+    <a:masterClrMapping/>
+  </p:clrMapOvr>
+</p:sld>
+</file>
+
+<file path=ppt/slides/slide5.xml><?xml version="1.0" encoding="utf-8"?>
+<p:sld xmlns:a="http://schemas.openxmlformats.org/drawingml/2006/main" xmlns:r="http://schemas.openxmlformats.org/officeDocument/2006/relationships" xmlns:p="http://schemas.openxmlformats.org/presentationml/2006/main">
+  <p:cSld>
+    <p:spTree>
+      <p:nvGrpSpPr>
+        <p:cNvPr id="1" name=""/>
+        <p:cNvGrpSpPr/>
+        <p:nvPr/>
+      </p:nvGrpSpPr>
+      <p:grpSpPr>
+        <a:xfrm>
+          <a:off x="0" y="0"/>
+          <a:ext cx="0" cy="0"/>
+          <a:chOff x="0" y="0"/>
+          <a:chExt cx="0" cy="0"/>
+        </a:xfrm>
+      </p:grpSpPr>
+      <p:sp>
+        <p:nvSpPr>
+          <p:cNvPr id="2" name="タイトル 1">
             <a:extLst>
               <a:ext uri="{FF2B5EF4-FFF2-40B4-BE49-F238E27FC236}">
-                <a16:creationId xmlns:a16="http://schemas.microsoft.com/office/drawing/2014/main" id="{567C7F6A-A773-B4A0-3D4C-18E7909C3A6A}"/>
+                <a16:creationId xmlns:a16="http://schemas.microsoft.com/office/drawing/2014/main" id="{F38D3469-E485-E1E8-19D3-AFD207F014C8}"/>
               </a:ext>
             </a:extLst>
           </p:cNvPr>
-          <p:cNvPicPr>
-            <a:picLocks noChangeAspect="1" noChangeArrowheads="1"/>
-          </p:cNvPicPr>
-          <p:nvPr/>
-        </p:nvPicPr>
-        <p:blipFill>
-          <a:blip r:embed="rId2">
-            <a:extLst>
-              <a:ext uri="{28A0092B-C50C-407E-A947-70E740481C1C}">
-                <a14:useLocalDpi xmlns:a14="http://schemas.microsoft.com/office/drawing/2010/main" val="0"/>
-              </a:ext>
-            </a:extLst>
-          </a:blip>
-          <a:srcRect/>
-          <a:stretch>
-            <a:fillRect/>
-          </a:stretch>
-        </p:blipFill>
-        <p:spPr bwMode="auto">
-          <a:xfrm>
-            <a:off x="1516033" y="1355490"/>
-            <a:ext cx="3862301" cy="2983752"/>
-          </a:xfrm>
-          <a:prstGeom prst="rect">
-            <a:avLst/>
-          </a:prstGeom>
-          <a:noFill/>
-          <a:extLst>
-            <a:ext uri="{909E8E84-426E-40DD-AFC4-6F175D3DCCD1}">
-              <a14:hiddenFill xmlns:a14="http://schemas.microsoft.com/office/drawing/2010/main">
-                <a:solidFill>
-                  <a:srgbClr val="FFFFFF"/>
-                </a:solidFill>
-              </a14:hiddenFill>
-            </a:ext>
-          </a:extLst>
-        </p:spPr>
-      </p:pic>
-      <p:pic>
-        <p:nvPicPr>
-          <p:cNvPr id="5" name="Picture 2">
+          <p:cNvSpPr>
+            <a:spLocks noGrp="1"/>
+          </p:cNvSpPr>
+          <p:nvPr>
+            <p:ph type="title"/>
+          </p:nvPr>
+        </p:nvSpPr>
+        <p:spPr/>
+        <p:txBody>
+          <a:bodyPr>
+            <a:normAutofit fontScale="90000"/>
+          </a:bodyPr>
+          <a:lstStyle/>
+          <a:p>
+            <a:r>
+              <a:rPr kumimoji="1" lang="ja-JP" altLang="en-US" dirty="0"/>
+              <a:t>引用の記法</a:t>
+            </a:r>
+          </a:p>
+        </p:txBody>
+      </p:sp>
+      <p:sp>
+        <p:nvSpPr>
+          <p:cNvPr id="3" name="コンテンツ プレースホルダー 2">
             <a:extLst>
               <a:ext uri="{FF2B5EF4-FFF2-40B4-BE49-F238E27FC236}">
-                <a16:creationId xmlns:a16="http://schemas.microsoft.com/office/drawing/2014/main" id="{2F1D12F2-F830-2E89-BED8-E0E26E9C774F}"/>
+                <a16:creationId xmlns:a16="http://schemas.microsoft.com/office/drawing/2014/main" id="{8DCD1AE0-8804-EFE2-7EEC-E53DEAB04C39}"/>
               </a:ext>
             </a:extLst>
           </p:cNvPr>
-          <p:cNvPicPr>
-            <a:picLocks noChangeArrowheads="1"/>
-          </p:cNvPicPr>
-          <p:nvPr/>
-        </p:nvPicPr>
-        <p:blipFill>
-          <a:blip r:embed="rId2">
+          <p:cNvSpPr>
+            <a:spLocks noGrp="1"/>
+          </p:cNvSpPr>
+          <p:nvPr>
+            <p:ph idx="1"/>
+          </p:nvPr>
+        </p:nvSpPr>
+        <p:spPr/>
+        <p:txBody>
+          <a:bodyPr>
+            <a:normAutofit/>
+          </a:bodyPr>
+          <a:lstStyle/>
+          <a:p>
+            <a:pPr marL="0" indent="0">
+              <a:buNone/>
+            </a:pPr>
+            <a:r>
+              <a:rPr kumimoji="1" lang="ja-JP" altLang="en-US" dirty="0"/>
+              <a:t>「電子情報通信学会和文論文誌　投稿のしおり」を参考</a:t>
+            </a:r>
+            <a:endParaRPr kumimoji="1" lang="en-US" altLang="ja-JP" dirty="0"/>
+          </a:p>
+          <a:p>
+            <a:pPr marL="457200" lvl="1" indent="0">
+              <a:buNone/>
+            </a:pPr>
+            <a:r>
+              <a:rPr lang="en-US" altLang="ja-JP" dirty="0">
+                <a:hlinkClick r:id="rId2"/>
+              </a:rPr>
+              <a:t>https://www.ieice.org/jpn/shiori/ess_2.html</a:t>
+            </a:r>
+            <a:endParaRPr lang="en-US" altLang="ja-JP" dirty="0"/>
+          </a:p>
+          <a:p>
+            <a:pPr marL="457200" lvl="1" indent="0">
+              <a:buNone/>
+            </a:pPr>
+            <a:r>
+              <a:rPr lang="en-US" altLang="ja-JP" dirty="0"/>
+              <a:t>※</a:t>
+            </a:r>
+            <a:r>
+              <a:rPr lang="ja-JP" altLang="en-US" dirty="0"/>
+              <a:t> 他のフォーマットでも良いが，理由がなければ上記に準拠</a:t>
+            </a:r>
+            <a:endParaRPr kumimoji="1" lang="en-US" altLang="ja-JP" dirty="0"/>
+          </a:p>
+          <a:p>
+            <a:r>
+              <a:rPr kumimoji="1" lang="ja-JP" altLang="en-US" dirty="0"/>
+              <a:t>英文論文を引用する場合</a:t>
+            </a:r>
+            <a:endParaRPr kumimoji="1" lang="en-US" altLang="ja-JP" dirty="0"/>
+          </a:p>
+          <a:p>
+            <a:endParaRPr lang="en-US" altLang="ja-JP" dirty="0"/>
+          </a:p>
+          <a:p>
+            <a:r>
+              <a:rPr kumimoji="1" lang="ja-JP" altLang="en-US" dirty="0"/>
+              <a:t>和文論文を引用する場合</a:t>
+            </a:r>
+            <a:endParaRPr kumimoji="1" lang="en-US" altLang="ja-JP" dirty="0"/>
+          </a:p>
+          <a:p>
+            <a:endParaRPr lang="en-US" altLang="ja-JP" dirty="0"/>
+          </a:p>
+          <a:p>
+            <a:r>
+              <a:rPr kumimoji="1" lang="ja-JP" altLang="en-US" dirty="0"/>
+              <a:t>書籍を引用する場合</a:t>
+            </a:r>
+            <a:endParaRPr kumimoji="1" lang="en-US" altLang="ja-JP" dirty="0"/>
+          </a:p>
+          <a:p>
+            <a:endParaRPr lang="en-US" altLang="ja-JP" sz="1100" dirty="0"/>
+          </a:p>
+          <a:p>
+            <a:r>
+              <a:rPr kumimoji="1" lang="en-US" altLang="ja-JP" dirty="0"/>
+              <a:t>Web</a:t>
+            </a:r>
+            <a:r>
+              <a:rPr kumimoji="1" lang="ja-JP" altLang="en-US" dirty="0"/>
+              <a:t>サイトを引用する場合（ハイパーリンクは削除！）</a:t>
+            </a:r>
+          </a:p>
+        </p:txBody>
+      </p:sp>
+      <p:sp>
+        <p:nvSpPr>
+          <p:cNvPr id="4" name="スライド番号プレースホルダー 3">
             <a:extLst>
-              <a:ext uri="{28A0092B-C50C-407E-A947-70E740481C1C}">
-                <a14:useLocalDpi xmlns:a14="http://schemas.microsoft.com/office/drawing/2010/main" val="0"/>
+              <a:ext uri="{FF2B5EF4-FFF2-40B4-BE49-F238E27FC236}">
+                <a16:creationId xmlns:a16="http://schemas.microsoft.com/office/drawing/2014/main" id="{6B95457E-68F9-2DC2-16A7-37DDE28508E6}"/>
               </a:ext>
             </a:extLst>
-          </a:blip>
-          <a:srcRect/>
-          <a:stretch>
-            <a:fillRect/>
-          </a:stretch>
-        </p:blipFill>
-        <p:spPr bwMode="auto">
-          <a:xfrm>
-            <a:off x="6768398" y="1355490"/>
-            <a:ext cx="2980800" cy="2983752"/>
-          </a:xfrm>
-          <a:prstGeom prst="rect">
-            <a:avLst/>
-          </a:prstGeom>
-          <a:noFill/>
-          <a:extLst>
-            <a:ext uri="{909E8E84-426E-40DD-AFC4-6F175D3DCCD1}">
-              <a14:hiddenFill xmlns:a14="http://schemas.microsoft.com/office/drawing/2010/main">
-                <a:solidFill>
-                  <a:srgbClr val="FFFFFF"/>
-                </a:solidFill>
-              </a14:hiddenFill>
-            </a:ext>
-          </a:extLst>
-        </p:spPr>
-      </p:pic>
+          </p:cNvPr>
+          <p:cNvSpPr>
+            <a:spLocks noGrp="1"/>
+          </p:cNvSpPr>
+          <p:nvPr>
+            <p:ph type="sldNum" sz="quarter" idx="12"/>
+          </p:nvPr>
+        </p:nvSpPr>
+        <p:spPr/>
+        <p:txBody>
+          <a:bodyPr/>
+          <a:lstStyle/>
+          <a:p>
+            <a:fld id="{9C0FEE9A-3EB6-844C-8184-5D808DF01412}" type="slidenum">
+              <a:rPr kumimoji="1" lang="ja-JP" altLang="en-US" smtClean="0"/>
+              <a:t>5</a:t>
+            </a:fld>
+            <a:endParaRPr kumimoji="1" lang="ja-JP" altLang="en-US"/>
+          </a:p>
+        </p:txBody>
+      </p:sp>
       <p:sp>
         <p:nvSpPr>
           <p:cNvPr id="6" name="テキスト ボックス 5">
             <a:extLst>
               <a:ext uri="{FF2B5EF4-FFF2-40B4-BE49-F238E27FC236}">
-                <a16:creationId xmlns:a16="http://schemas.microsoft.com/office/drawing/2014/main" id="{C5720118-F126-0B4E-274E-04AAC9D80449}"/>
+                <a16:creationId xmlns:a16="http://schemas.microsoft.com/office/drawing/2014/main" id="{042B130D-A8D8-4C76-35BE-86E915522D87}"/>
               </a:ext>
             </a:extLst>
           </p:cNvPr>
@@ -5421,8 +5552,8 @@
         </p:nvSpPr>
         <p:spPr>
           <a:xfrm>
-            <a:off x="1979987" y="4336364"/>
-            <a:ext cx="2934392" cy="461665"/>
+            <a:off x="125969" y="2703764"/>
+            <a:ext cx="11940062" cy="461665"/>
           </a:xfrm>
           <a:prstGeom prst="rect">
             <a:avLst/>
@@ -5435,13 +5566,75 @@
           </a:bodyPr>
           <a:lstStyle/>
           <a:p>
-            <a:pPr algn="ctr"/>
-            <a:r>
-              <a:rPr kumimoji="1" lang="ja-JP" altLang="en-US" sz="2400">
+            <a:r>
+              <a:rPr lang="en-US" altLang="ja-JP" sz="1200" dirty="0">
                 <a:latin typeface="BIZ UDGothic" panose="020B0400000000000000" pitchFamily="49" charset="-128"/>
                 <a:ea typeface="BIZ UDGothic" panose="020B0400000000000000" pitchFamily="49" charset="-128"/>
               </a:rPr>
-              <a:t>横縦比の変更なし</a:t>
+              <a:t>[1] </a:t>
+            </a:r>
+            <a:r>
+              <a:rPr kumimoji="1" lang="en-US" altLang="ja-JP" sz="1200" dirty="0">
+                <a:latin typeface="BIZ UDGothic" panose="020B0400000000000000" pitchFamily="49" charset="-128"/>
+                <a:ea typeface="BIZ UDGothic" panose="020B0400000000000000" pitchFamily="49" charset="-128"/>
+              </a:rPr>
+              <a:t>R. </a:t>
+            </a:r>
+            <a:r>
+              <a:rPr kumimoji="1" lang="en-US" altLang="ja-JP" sz="1200" dirty="0" err="1">
+                <a:latin typeface="BIZ UDGothic" panose="020B0400000000000000" pitchFamily="49" charset="-128"/>
+                <a:ea typeface="BIZ UDGothic" panose="020B0400000000000000" pitchFamily="49" charset="-128"/>
+              </a:rPr>
+              <a:t>Yamatomi</a:t>
+            </a:r>
+            <a:r>
+              <a:rPr kumimoji="1" lang="en-US" altLang="ja-JP" sz="1200" dirty="0">
+                <a:latin typeface="BIZ UDGothic" panose="020B0400000000000000" pitchFamily="49" charset="-128"/>
+                <a:ea typeface="BIZ UDGothic" panose="020B0400000000000000" pitchFamily="49" charset="-128"/>
+              </a:rPr>
+              <a:t>, S. </a:t>
+            </a:r>
+            <a:r>
+              <a:rPr kumimoji="1" lang="en-US" altLang="ja-JP" sz="1200" dirty="0" err="1">
+                <a:latin typeface="BIZ UDGothic" panose="020B0400000000000000" pitchFamily="49" charset="-128"/>
+                <a:ea typeface="BIZ UDGothic" panose="020B0400000000000000" pitchFamily="49" charset="-128"/>
+              </a:rPr>
+              <a:t>Mahboubi</a:t>
+            </a:r>
+            <a:r>
+              <a:rPr kumimoji="1" lang="en-US" altLang="ja-JP" sz="1200" dirty="0">
+                <a:latin typeface="BIZ UDGothic" panose="020B0400000000000000" pitchFamily="49" charset="-128"/>
+                <a:ea typeface="BIZ UDGothic" panose="020B0400000000000000" pitchFamily="49" charset="-128"/>
+              </a:rPr>
+              <a:t>, and H. </a:t>
+            </a:r>
+            <a:r>
+              <a:rPr kumimoji="1" lang="en-US" altLang="ja-JP" sz="1200" dirty="0" err="1">
+                <a:latin typeface="BIZ UDGothic" panose="020B0400000000000000" pitchFamily="49" charset="-128"/>
+                <a:ea typeface="BIZ UDGothic" panose="020B0400000000000000" pitchFamily="49" charset="-128"/>
+              </a:rPr>
+              <a:t>Ninomiya,“Generative</a:t>
+            </a:r>
+            <a:r>
+              <a:rPr kumimoji="1" lang="en-US" altLang="ja-JP" sz="1200" dirty="0">
+                <a:latin typeface="BIZ UDGothic" panose="020B0400000000000000" pitchFamily="49" charset="-128"/>
+                <a:ea typeface="BIZ UDGothic" panose="020B0400000000000000" pitchFamily="49" charset="-128"/>
+              </a:rPr>
+              <a:t> Model of Suitable Meme Sentences for Images using </a:t>
+            </a:r>
+            <a:r>
+              <a:rPr kumimoji="1" lang="en-US" altLang="ja-JP" sz="1200" dirty="0" err="1">
+                <a:latin typeface="BIZ UDGothic" panose="020B0400000000000000" pitchFamily="49" charset="-128"/>
+                <a:ea typeface="BIZ UDGothic" panose="020B0400000000000000" pitchFamily="49" charset="-128"/>
+              </a:rPr>
+              <a:t>AutoEncoder</a:t>
+            </a:r>
+            <a:r>
+              <a:rPr kumimoji="1" lang="en-US" altLang="ja-JP" sz="1200" dirty="0">
+                <a:latin typeface="BIZ UDGothic" panose="020B0400000000000000" pitchFamily="49" charset="-128"/>
+                <a:ea typeface="BIZ UDGothic" panose="020B0400000000000000" pitchFamily="49" charset="-128"/>
+              </a:rPr>
+              <a:t>,”Proc. of the 20th Pacific Rim International Conference on Artificial Intelligence, pp.237-248, Nov. 2023.</a:t>
             </a:r>
           </a:p>
         </p:txBody>
@@ -5451,7 +5644,7 @@
           <p:cNvPr id="7" name="テキスト ボックス 6">
             <a:extLst>
               <a:ext uri="{FF2B5EF4-FFF2-40B4-BE49-F238E27FC236}">
-                <a16:creationId xmlns:a16="http://schemas.microsoft.com/office/drawing/2014/main" id="{64F0ED82-C03D-D407-B455-D4AB241702F5}"/>
+                <a16:creationId xmlns:a16="http://schemas.microsoft.com/office/drawing/2014/main" id="{B6D11ACE-42DF-3B64-7D6C-2D8D974723ED}"/>
               </a:ext>
             </a:extLst>
           </p:cNvPr>
@@ -5460,8 +5653,8 @@
         </p:nvSpPr>
         <p:spPr>
           <a:xfrm>
-            <a:off x="6791602" y="4346263"/>
-            <a:ext cx="2934392" cy="461665"/>
+            <a:off x="125969" y="3799581"/>
+            <a:ext cx="11940062" cy="461665"/>
           </a:xfrm>
           <a:prstGeom prst="rect">
             <a:avLst/>
@@ -5474,87 +5667,743 @@
           </a:bodyPr>
           <a:lstStyle/>
           <a:p>
-            <a:pPr algn="ctr"/>
-            <a:r>
-              <a:rPr kumimoji="1" lang="ja-JP" altLang="en-US" sz="2400">
+            <a:r>
+              <a:rPr kumimoji="1" lang="en-US" altLang="ja-JP" sz="1200" dirty="0">
                 <a:latin typeface="BIZ UDGothic" panose="020B0400000000000000" pitchFamily="49" charset="-128"/>
                 <a:ea typeface="BIZ UDGothic" panose="020B0400000000000000" pitchFamily="49" charset="-128"/>
               </a:rPr>
-              <a:t>横縦比の変更あり</a:t>
-            </a:r>
+              <a:t>[2] </a:t>
+            </a:r>
+            <a:r>
+              <a:rPr lang="ja-JP" altLang="en-US" sz="1200" kern="100" dirty="0">
+                <a:effectLst/>
+                <a:latin typeface="BIZ UDGothic" panose="020B0400000000000000" pitchFamily="49" charset="-128"/>
+                <a:ea typeface="BIZ UDGothic" panose="020B0400000000000000" pitchFamily="49" charset="-128"/>
+                <a:cs typeface="Times New Roman" panose="02020603050405020304" pitchFamily="18" charset="0"/>
+              </a:rPr>
+              <a:t>山富龍，シェヘラザードマハブービ，二宮洋，</a:t>
+            </a:r>
+            <a:r>
+              <a:rPr lang="en-US" altLang="ja-JP" sz="1200" kern="100" dirty="0">
+                <a:effectLst/>
+                <a:latin typeface="BIZ UDGothic" panose="020B0400000000000000" pitchFamily="49" charset="-128"/>
+                <a:ea typeface="BIZ UDGothic" panose="020B0400000000000000" pitchFamily="49" charset="-128"/>
+                <a:cs typeface="Times New Roman" panose="02020603050405020304" pitchFamily="18" charset="0"/>
+              </a:rPr>
+              <a:t>“</a:t>
+            </a:r>
+            <a:r>
+              <a:rPr lang="en" altLang="ja-JP" sz="1200" kern="100" dirty="0" err="1">
+                <a:effectLst/>
+                <a:latin typeface="BIZ UDGothic" panose="020B0400000000000000" pitchFamily="49" charset="-128"/>
+                <a:ea typeface="BIZ UDGothic" panose="020B0400000000000000" pitchFamily="49" charset="-128"/>
+                <a:cs typeface="Times New Roman" panose="02020603050405020304" pitchFamily="18" charset="0"/>
+              </a:rPr>
+              <a:t>AutoEncoder</a:t>
+            </a:r>
+            <a:r>
+              <a:rPr lang="ja-JP" altLang="en-US" sz="1200" kern="100" dirty="0">
+                <a:effectLst/>
+                <a:latin typeface="BIZ UDGothic" panose="020B0400000000000000" pitchFamily="49" charset="-128"/>
+                <a:ea typeface="BIZ UDGothic" panose="020B0400000000000000" pitchFamily="49" charset="-128"/>
+                <a:cs typeface="Times New Roman" panose="02020603050405020304" pitchFamily="18" charset="0"/>
+              </a:rPr>
+              <a:t>と</a:t>
+            </a:r>
+            <a:r>
+              <a:rPr lang="en" altLang="ja-JP" sz="1200" kern="100" dirty="0">
+                <a:effectLst/>
+                <a:latin typeface="BIZ UDGothic" panose="020B0400000000000000" pitchFamily="49" charset="-128"/>
+                <a:ea typeface="BIZ UDGothic" panose="020B0400000000000000" pitchFamily="49" charset="-128"/>
+                <a:cs typeface="Times New Roman" panose="02020603050405020304" pitchFamily="18" charset="0"/>
+              </a:rPr>
+              <a:t>Pix2Seq</a:t>
+            </a:r>
+            <a:r>
+              <a:rPr lang="ja-JP" altLang="en-US" sz="1200" kern="100" dirty="0">
+                <a:effectLst/>
+                <a:latin typeface="BIZ UDGothic" panose="020B0400000000000000" pitchFamily="49" charset="-128"/>
+                <a:ea typeface="BIZ UDGothic" panose="020B0400000000000000" pitchFamily="49" charset="-128"/>
+                <a:cs typeface="Times New Roman" panose="02020603050405020304" pitchFamily="18" charset="0"/>
+              </a:rPr>
+              <a:t>を用いた大喜利生成</a:t>
+            </a:r>
+            <a:r>
+              <a:rPr lang="en" altLang="ja-JP" sz="1200" kern="100" dirty="0">
+                <a:effectLst/>
+                <a:latin typeface="BIZ UDGothic" panose="020B0400000000000000" pitchFamily="49" charset="-128"/>
+                <a:ea typeface="BIZ UDGothic" panose="020B0400000000000000" pitchFamily="49" charset="-128"/>
+                <a:cs typeface="Times New Roman" panose="02020603050405020304" pitchFamily="18" charset="0"/>
+              </a:rPr>
+              <a:t>AI</a:t>
+            </a:r>
+            <a:r>
+              <a:rPr lang="ja-JP" altLang="en-US" sz="1200" kern="100" dirty="0">
+                <a:effectLst/>
+                <a:latin typeface="BIZ UDGothic" panose="020B0400000000000000" pitchFamily="49" charset="-128"/>
+                <a:ea typeface="BIZ UDGothic" panose="020B0400000000000000" pitchFamily="49" charset="-128"/>
+                <a:cs typeface="Times New Roman" panose="02020603050405020304" pitchFamily="18" charset="0"/>
+              </a:rPr>
+              <a:t>の実装に関する研究，</a:t>
+            </a:r>
+            <a:r>
+              <a:rPr lang="en-US" altLang="ja-JP" sz="1200" kern="100" dirty="0">
+                <a:effectLst/>
+                <a:latin typeface="BIZ UDGothic" panose="020B0400000000000000" pitchFamily="49" charset="-128"/>
+                <a:ea typeface="BIZ UDGothic" panose="020B0400000000000000" pitchFamily="49" charset="-128"/>
+                <a:cs typeface="Times New Roman" panose="02020603050405020304" pitchFamily="18" charset="0"/>
+              </a:rPr>
+              <a:t>”</a:t>
+            </a:r>
+            <a:r>
+              <a:rPr lang="ja-JP" altLang="en-US" sz="1200" kern="100" dirty="0">
+                <a:effectLst/>
+                <a:latin typeface="BIZ UDGothic" panose="020B0400000000000000" pitchFamily="49" charset="-128"/>
+                <a:ea typeface="BIZ UDGothic" panose="020B0400000000000000" pitchFamily="49" charset="-128"/>
+                <a:cs typeface="Times New Roman" panose="02020603050405020304" pitchFamily="18" charset="0"/>
+              </a:rPr>
+              <a:t>信学技報，</a:t>
+            </a:r>
+            <a:r>
+              <a:rPr lang="en" altLang="ja-JP" sz="1200" kern="100" dirty="0">
+                <a:effectLst/>
+                <a:latin typeface="BIZ UDGothic" panose="020B0400000000000000" pitchFamily="49" charset="-128"/>
+                <a:ea typeface="BIZ UDGothic" panose="020B0400000000000000" pitchFamily="49" charset="-128"/>
+                <a:cs typeface="Times New Roman" panose="02020603050405020304" pitchFamily="18" charset="0"/>
+              </a:rPr>
+              <a:t>vol.122</a:t>
+            </a:r>
+            <a:r>
+              <a:rPr lang="ja-JP" altLang="en" sz="1200" kern="100" dirty="0">
+                <a:effectLst/>
+                <a:latin typeface="BIZ UDGothic" panose="020B0400000000000000" pitchFamily="49" charset="-128"/>
+                <a:ea typeface="BIZ UDGothic" panose="020B0400000000000000" pitchFamily="49" charset="-128"/>
+                <a:cs typeface="Times New Roman" panose="02020603050405020304" pitchFamily="18" charset="0"/>
+              </a:rPr>
+              <a:t>，</a:t>
+            </a:r>
+            <a:r>
+              <a:rPr lang="en" altLang="ja-JP" sz="1200" kern="100" dirty="0">
+                <a:effectLst/>
+                <a:latin typeface="BIZ UDGothic" panose="020B0400000000000000" pitchFamily="49" charset="-128"/>
+                <a:ea typeface="BIZ UDGothic" panose="020B0400000000000000" pitchFamily="49" charset="-128"/>
+                <a:cs typeface="Times New Roman" panose="02020603050405020304" pitchFamily="18" charset="0"/>
+              </a:rPr>
+              <a:t>no.453</a:t>
+            </a:r>
+            <a:r>
+              <a:rPr lang="ja-JP" altLang="en" sz="1200" kern="100" dirty="0">
+                <a:effectLst/>
+                <a:latin typeface="BIZ UDGothic" panose="020B0400000000000000" pitchFamily="49" charset="-128"/>
+                <a:ea typeface="BIZ UDGothic" panose="020B0400000000000000" pitchFamily="49" charset="-128"/>
+                <a:cs typeface="Times New Roman" panose="02020603050405020304" pitchFamily="18" charset="0"/>
+              </a:rPr>
+              <a:t>，</a:t>
+            </a:r>
+            <a:r>
+              <a:rPr lang="en" altLang="ja-JP" sz="1200" kern="100" dirty="0">
+                <a:effectLst/>
+                <a:latin typeface="BIZ UDGothic" panose="020B0400000000000000" pitchFamily="49" charset="-128"/>
+                <a:ea typeface="BIZ UDGothic" panose="020B0400000000000000" pitchFamily="49" charset="-128"/>
+                <a:cs typeface="Times New Roman" panose="02020603050405020304" pitchFamily="18" charset="0"/>
+              </a:rPr>
+              <a:t>CCS2022-73</a:t>
+            </a:r>
+            <a:r>
+              <a:rPr lang="ja-JP" altLang="en" sz="1200" kern="100" dirty="0">
+                <a:effectLst/>
+                <a:latin typeface="BIZ UDGothic" panose="020B0400000000000000" pitchFamily="49" charset="-128"/>
+                <a:ea typeface="BIZ UDGothic" panose="020B0400000000000000" pitchFamily="49" charset="-128"/>
+                <a:cs typeface="Times New Roman" panose="02020603050405020304" pitchFamily="18" charset="0"/>
+              </a:rPr>
+              <a:t>，</a:t>
+            </a:r>
+            <a:r>
+              <a:rPr lang="en" altLang="ja-JP" sz="1200" kern="100" dirty="0">
+                <a:effectLst/>
+                <a:latin typeface="BIZ UDGothic" panose="020B0400000000000000" pitchFamily="49" charset="-128"/>
+                <a:ea typeface="BIZ UDGothic" panose="020B0400000000000000" pitchFamily="49" charset="-128"/>
+                <a:cs typeface="Times New Roman" panose="02020603050405020304" pitchFamily="18" charset="0"/>
+              </a:rPr>
+              <a:t>pp.59-62</a:t>
+            </a:r>
+            <a:r>
+              <a:rPr lang="ja-JP" altLang="en" sz="1200" kern="100" dirty="0">
+                <a:effectLst/>
+                <a:latin typeface="BIZ UDGothic" panose="020B0400000000000000" pitchFamily="49" charset="-128"/>
+                <a:ea typeface="BIZ UDGothic" panose="020B0400000000000000" pitchFamily="49" charset="-128"/>
+                <a:cs typeface="Times New Roman" panose="02020603050405020304" pitchFamily="18" charset="0"/>
+              </a:rPr>
+              <a:t>，</a:t>
+            </a:r>
+            <a:r>
+              <a:rPr lang="en" altLang="ja-JP" sz="1200" kern="100" dirty="0">
+                <a:effectLst/>
+                <a:latin typeface="BIZ UDGothic" panose="020B0400000000000000" pitchFamily="49" charset="-128"/>
+                <a:ea typeface="BIZ UDGothic" panose="020B0400000000000000" pitchFamily="49" charset="-128"/>
+                <a:cs typeface="Times New Roman" panose="02020603050405020304" pitchFamily="18" charset="0"/>
+              </a:rPr>
+              <a:t>Mar. 2023</a:t>
+            </a:r>
+            <a:r>
+              <a:rPr lang="ja-JP" altLang="en" sz="1200" kern="100" dirty="0">
+                <a:effectLst/>
+                <a:latin typeface="BIZ UDGothic" panose="020B0400000000000000" pitchFamily="49" charset="-128"/>
+                <a:ea typeface="BIZ UDGothic" panose="020B0400000000000000" pitchFamily="49" charset="-128"/>
+                <a:cs typeface="Times New Roman" panose="02020603050405020304" pitchFamily="18" charset="0"/>
+              </a:rPr>
+              <a:t>．</a:t>
+            </a:r>
+            <a:endParaRPr lang="ja-JP" altLang="ja-JP" sz="1200" kern="100" dirty="0">
+              <a:effectLst/>
+              <a:latin typeface="BIZ UDGothic" panose="020B0400000000000000" pitchFamily="49" charset="-128"/>
+              <a:ea typeface="BIZ UDGothic" panose="020B0400000000000000" pitchFamily="49" charset="-128"/>
+              <a:cs typeface="Times New Roman" panose="02020603050405020304" pitchFamily="18" charset="0"/>
+            </a:endParaRPr>
           </a:p>
         </p:txBody>
       </p:sp>
       <p:sp>
         <p:nvSpPr>
-          <p:cNvPr id="8" name="四角形吹き出し 7">
+          <p:cNvPr id="8" name="テキスト ボックス 7">
             <a:extLst>
               <a:ext uri="{FF2B5EF4-FFF2-40B4-BE49-F238E27FC236}">
-                <a16:creationId xmlns:a16="http://schemas.microsoft.com/office/drawing/2014/main" id="{F7CB39A9-3A40-A1CB-7A2B-BDC9B2B98D0D}"/>
+                <a16:creationId xmlns:a16="http://schemas.microsoft.com/office/drawing/2014/main" id="{55D33B4B-B0EC-224F-36D0-014DDD71D842}"/>
               </a:ext>
             </a:extLst>
           </p:cNvPr>
-          <p:cNvSpPr/>
+          <p:cNvSpPr txBox="1"/>
           <p:nvPr/>
         </p:nvSpPr>
         <p:spPr>
           <a:xfrm>
-            <a:off x="8686799" y="1862049"/>
-            <a:ext cx="2527070" cy="540327"/>
+            <a:off x="125969" y="4910897"/>
+            <a:ext cx="11940062" cy="276999"/>
           </a:xfrm>
-          <a:prstGeom prst="wedgeRectCallout">
-            <a:avLst>
-              <a:gd name="adj1" fmla="val -33333"/>
-              <a:gd name="adj2" fmla="val 94808"/>
-            </a:avLst>
+          <a:prstGeom prst="rect">
+            <a:avLst/>
           </a:prstGeom>
-          <a:solidFill>
-            <a:schemeClr val="bg1"/>
-          </a:solidFill>
-          <a:ln>
-            <a:solidFill>
-              <a:schemeClr val="tx1"/>
-            </a:solidFill>
-          </a:ln>
+          <a:noFill/>
         </p:spPr>
-        <p:style>
-          <a:lnRef idx="2">
-            <a:schemeClr val="accent1">
-              <a:shade val="15000"/>
-            </a:schemeClr>
-          </a:lnRef>
-          <a:fillRef idx="1">
-            <a:schemeClr val="accent1"/>
-          </a:fillRef>
-          <a:effectRef idx="0">
-            <a:schemeClr val="accent1"/>
-          </a:effectRef>
-          <a:fontRef idx="minor">
-            <a:schemeClr val="lt1"/>
-          </a:fontRef>
-        </p:style>
         <p:txBody>
-          <a:bodyPr lIns="0" tIns="0" rIns="0" bIns="0" rtlCol="0" anchor="ctr"/>
+          <a:bodyPr wrap="square" rtlCol="0">
+            <a:spAutoFit/>
+          </a:bodyPr>
           <a:lstStyle/>
           <a:p>
-            <a:pPr algn="ctr"/>
-            <a:r>
-              <a:rPr kumimoji="1" lang="ja-JP" altLang="en-US" sz="2400">
-                <a:solidFill>
-                  <a:schemeClr val="tx1"/>
-                </a:solidFill>
+            <a:r>
+              <a:rPr kumimoji="1" lang="en-US" altLang="ja-JP" sz="1200" dirty="0">
                 <a:latin typeface="BIZ UDGothic" panose="020B0400000000000000" pitchFamily="49" charset="-128"/>
                 <a:ea typeface="BIZ UDGothic" panose="020B0400000000000000" pitchFamily="49" charset="-128"/>
               </a:rPr>
-              <a:t>フォントが崩れる</a:t>
-            </a:r>
+              <a:t>[3] </a:t>
+            </a:r>
+            <a:r>
+              <a:rPr kumimoji="1" lang="ja-JP" altLang="en-US" sz="1200">
+                <a:latin typeface="BIZ UDGothic" panose="020B0400000000000000" pitchFamily="49" charset="-128"/>
+                <a:ea typeface="BIZ UDGothic" panose="020B0400000000000000" pitchFamily="49" charset="-128"/>
+              </a:rPr>
+              <a:t>斎藤康毅，</a:t>
+            </a:r>
+            <a:r>
+              <a:rPr lang="ja-JP" altLang="en-US" sz="1200" i="0">
+                <a:solidFill>
+                  <a:srgbClr val="0F1111"/>
+                </a:solidFill>
+                <a:effectLst/>
+                <a:latin typeface="BIZ UDGothic" panose="020B0400000000000000" pitchFamily="49" charset="-128"/>
+                <a:ea typeface="BIZ UDGothic" panose="020B0400000000000000" pitchFamily="49" charset="-128"/>
+              </a:rPr>
+              <a:t>ゼロから作る</a:t>
+            </a:r>
+            <a:r>
+              <a:rPr lang="en" altLang="ja-JP" sz="1200" i="0" dirty="0">
+                <a:solidFill>
+                  <a:srgbClr val="0F1111"/>
+                </a:solidFill>
+                <a:effectLst/>
+                <a:latin typeface="BIZ UDGothic" panose="020B0400000000000000" pitchFamily="49" charset="-128"/>
+                <a:ea typeface="BIZ UDGothic" panose="020B0400000000000000" pitchFamily="49" charset="-128"/>
+              </a:rPr>
+              <a:t>Deep Learning ―Python</a:t>
+            </a:r>
+            <a:r>
+              <a:rPr lang="ja-JP" altLang="en-US" sz="1200" i="0">
+                <a:solidFill>
+                  <a:srgbClr val="0F1111"/>
+                </a:solidFill>
+                <a:effectLst/>
+                <a:latin typeface="BIZ UDGothic" panose="020B0400000000000000" pitchFamily="49" charset="-128"/>
+                <a:ea typeface="BIZ UDGothic" panose="020B0400000000000000" pitchFamily="49" charset="-128"/>
+              </a:rPr>
+              <a:t>で学ぶディープラーニングの理論と実装，オライリージャパン，</a:t>
+            </a:r>
+            <a:r>
+              <a:rPr lang="en-US" altLang="ja-JP" sz="1200" i="0" dirty="0">
+                <a:solidFill>
+                  <a:srgbClr val="0F1111"/>
+                </a:solidFill>
+                <a:effectLst/>
+                <a:latin typeface="BIZ UDGothic" panose="020B0400000000000000" pitchFamily="49" charset="-128"/>
+                <a:ea typeface="BIZ UDGothic" panose="020B0400000000000000" pitchFamily="49" charset="-128"/>
+              </a:rPr>
+              <a:t>2016</a:t>
+            </a:r>
+            <a:r>
+              <a:rPr lang="ja-JP" altLang="en-US" sz="1200" i="0">
+                <a:solidFill>
+                  <a:srgbClr val="0F1111"/>
+                </a:solidFill>
+                <a:effectLst/>
+                <a:latin typeface="BIZ UDGothic" panose="020B0400000000000000" pitchFamily="49" charset="-128"/>
+                <a:ea typeface="BIZ UDGothic" panose="020B0400000000000000" pitchFamily="49" charset="-128"/>
+              </a:rPr>
+              <a:t>．</a:t>
+            </a:r>
+          </a:p>
+        </p:txBody>
+      </p:sp>
+      <p:sp>
+        <p:nvSpPr>
+          <p:cNvPr id="9" name="テキスト ボックス 8">
+            <a:extLst>
+              <a:ext uri="{FF2B5EF4-FFF2-40B4-BE49-F238E27FC236}">
+                <a16:creationId xmlns:a16="http://schemas.microsoft.com/office/drawing/2014/main" id="{342990F6-5662-BB31-904B-01209E80F142}"/>
+              </a:ext>
+            </a:extLst>
+          </p:cNvPr>
+          <p:cNvSpPr txBox="1"/>
+          <p:nvPr/>
+        </p:nvSpPr>
+        <p:spPr>
+          <a:xfrm>
+            <a:off x="125969" y="5880658"/>
+            <a:ext cx="11940062" cy="276999"/>
+          </a:xfrm>
+          <a:prstGeom prst="rect">
+            <a:avLst/>
+          </a:prstGeom>
+          <a:noFill/>
+        </p:spPr>
+        <p:txBody>
+          <a:bodyPr wrap="square" rtlCol="0">
+            <a:spAutoFit/>
+          </a:bodyPr>
+          <a:lstStyle/>
+          <a:p>
+            <a:r>
+              <a:rPr kumimoji="1" lang="en-US" altLang="ja-JP" sz="1200" dirty="0">
+                <a:latin typeface="BIZ UDGothic" panose="020B0400000000000000" pitchFamily="49" charset="-128"/>
+                <a:ea typeface="BIZ UDGothic" panose="020B0400000000000000" pitchFamily="49" charset="-128"/>
+              </a:rPr>
+              <a:t>[4] </a:t>
+            </a:r>
+            <a:r>
+              <a:rPr lang="ja-JP" altLang="en-US" sz="1200" b="0" i="0" dirty="0">
+                <a:effectLst/>
+                <a:latin typeface="BIZ UDGothic" panose="020B0400000000000000" pitchFamily="49" charset="-128"/>
+                <a:ea typeface="BIZ UDGothic" panose="020B0400000000000000" pitchFamily="49" charset="-128"/>
+              </a:rPr>
+              <a:t>株式会社オモロキ</a:t>
+            </a:r>
+            <a:r>
+              <a:rPr lang="ja-JP" altLang="en-US" sz="1200" b="0" dirty="0">
+                <a:latin typeface="BIZ UDGothic" panose="020B0400000000000000" pitchFamily="49" charset="-128"/>
+                <a:ea typeface="BIZ UDGothic" panose="020B0400000000000000" pitchFamily="49" charset="-128"/>
+              </a:rPr>
+              <a:t>，</a:t>
+            </a:r>
+            <a:r>
+              <a:rPr lang="en-US" altLang="ja-JP" sz="1200" kern="100" dirty="0">
+                <a:effectLst/>
+                <a:latin typeface="BIZ UDGothic" panose="020B0400000000000000" pitchFamily="49" charset="-128"/>
+                <a:ea typeface="BIZ UDGothic" panose="020B0400000000000000" pitchFamily="49" charset="-128"/>
+                <a:cs typeface="Times New Roman" panose="02020603050405020304" pitchFamily="18" charset="0"/>
+              </a:rPr>
+              <a:t>“</a:t>
+            </a:r>
+            <a:r>
+              <a:rPr lang="ja-JP" altLang="en-US" sz="1200" b="0" dirty="0">
+                <a:latin typeface="BIZ UDGothic" panose="020B0400000000000000" pitchFamily="49" charset="-128"/>
+                <a:ea typeface="BIZ UDGothic" panose="020B0400000000000000" pitchFamily="49" charset="-128"/>
+              </a:rPr>
+              <a:t>ボケて</a:t>
+            </a:r>
+            <a:r>
+              <a:rPr lang="ja-JP" altLang="en-US" sz="1200" kern="100" dirty="0">
+                <a:effectLst/>
+                <a:latin typeface="BIZ UDGothic" panose="020B0400000000000000" pitchFamily="49" charset="-128"/>
+                <a:ea typeface="BIZ UDGothic" panose="020B0400000000000000" pitchFamily="49" charset="-128"/>
+                <a:cs typeface="Times New Roman" panose="02020603050405020304" pitchFamily="18" charset="0"/>
+              </a:rPr>
+              <a:t>，</a:t>
+            </a:r>
+            <a:r>
+              <a:rPr lang="en-US" altLang="ja-JP" sz="1200" kern="100" dirty="0">
+                <a:effectLst/>
+                <a:latin typeface="BIZ UDGothic" panose="020B0400000000000000" pitchFamily="49" charset="-128"/>
+                <a:ea typeface="BIZ UDGothic" panose="020B0400000000000000" pitchFamily="49" charset="-128"/>
+                <a:cs typeface="Times New Roman" panose="02020603050405020304" pitchFamily="18" charset="0"/>
+              </a:rPr>
+              <a:t>”</a:t>
+            </a:r>
+            <a:r>
+              <a:rPr lang="en" altLang="ja-JP" sz="1200" kern="100" dirty="0">
+                <a:effectLst/>
+                <a:latin typeface="BIZ UDGothic" panose="020B0400000000000000" pitchFamily="49" charset="-128"/>
+                <a:ea typeface="BIZ UDGothic" panose="020B0400000000000000" pitchFamily="49" charset="-128"/>
+                <a:cs typeface="Times New Roman" panose="02020603050405020304" pitchFamily="18" charset="0"/>
+              </a:rPr>
+              <a:t>https://</a:t>
+            </a:r>
+            <a:r>
+              <a:rPr lang="en" altLang="ja-JP" sz="1200" kern="100" dirty="0" err="1">
+                <a:effectLst/>
+                <a:latin typeface="BIZ UDGothic" panose="020B0400000000000000" pitchFamily="49" charset="-128"/>
+                <a:ea typeface="BIZ UDGothic" panose="020B0400000000000000" pitchFamily="49" charset="-128"/>
+                <a:cs typeface="Times New Roman" panose="02020603050405020304" pitchFamily="18" charset="0"/>
+              </a:rPr>
+              <a:t>bokete.jp</a:t>
+            </a:r>
+            <a:r>
+              <a:rPr lang="en" altLang="ja-JP" sz="1200" kern="100" dirty="0">
+                <a:effectLst/>
+                <a:latin typeface="BIZ UDGothic" panose="020B0400000000000000" pitchFamily="49" charset="-128"/>
+                <a:ea typeface="BIZ UDGothic" panose="020B0400000000000000" pitchFamily="49" charset="-128"/>
+                <a:cs typeface="Times New Roman" panose="02020603050405020304" pitchFamily="18" charset="0"/>
+              </a:rPr>
+              <a:t>/</a:t>
+            </a:r>
+            <a:r>
+              <a:rPr lang="ja-JP" altLang="en-US" sz="1200" kern="100" dirty="0">
+                <a:effectLst/>
+                <a:latin typeface="BIZ UDGothic" panose="020B0400000000000000" pitchFamily="49" charset="-128"/>
+                <a:ea typeface="BIZ UDGothic" panose="020B0400000000000000" pitchFamily="49" charset="-128"/>
+                <a:cs typeface="Times New Roman" panose="02020603050405020304" pitchFamily="18" charset="0"/>
+              </a:rPr>
+              <a:t>，参照</a:t>
+            </a:r>
+            <a:r>
+              <a:rPr lang="en-US" altLang="ja-JP" sz="1200" kern="100" dirty="0">
+                <a:effectLst/>
+                <a:latin typeface="BIZ UDGothic" panose="020B0400000000000000" pitchFamily="49" charset="-128"/>
+                <a:ea typeface="BIZ UDGothic" panose="020B0400000000000000" pitchFamily="49" charset="-128"/>
+                <a:cs typeface="Times New Roman" panose="02020603050405020304" pitchFamily="18" charset="0"/>
+              </a:rPr>
+              <a:t>:Oct. 1, 2024.</a:t>
+            </a:r>
+            <a:endParaRPr lang="ja-JP" altLang="en-US" sz="1200" i="0" dirty="0">
+              <a:effectLst/>
+              <a:latin typeface="BIZ UDGothic" panose="020B0400000000000000" pitchFamily="49" charset="-128"/>
+              <a:ea typeface="BIZ UDGothic" panose="020B0400000000000000" pitchFamily="49" charset="-128"/>
+            </a:endParaRPr>
           </a:p>
         </p:txBody>
       </p:sp>
     </p:spTree>
     <p:extLst>
       <p:ext uri="{BB962C8B-B14F-4D97-AF65-F5344CB8AC3E}">
-        <p14:creationId xmlns:p14="http://schemas.microsoft.com/office/powerpoint/2010/main" val="1629070085"/>
+        <p14:creationId xmlns:p14="http://schemas.microsoft.com/office/powerpoint/2010/main" val="3198982946"/>
+      </p:ext>
+    </p:extLst>
+  </p:cSld>
+  <p:clrMapOvr>
+    <a:masterClrMapping/>
+  </p:clrMapOvr>
+</p:sld>
+</file>
+
+<file path=ppt/slides/slide6.xml><?xml version="1.0" encoding="utf-8"?>
+<p:sld xmlns:a="http://schemas.openxmlformats.org/drawingml/2006/main" xmlns:r="http://schemas.openxmlformats.org/officeDocument/2006/relationships" xmlns:p="http://schemas.openxmlformats.org/presentationml/2006/main">
+  <p:cSld>
+    <p:spTree>
+      <p:nvGrpSpPr>
+        <p:cNvPr id="1" name=""/>
+        <p:cNvGrpSpPr/>
+        <p:nvPr/>
+      </p:nvGrpSpPr>
+      <p:grpSpPr>
+        <a:xfrm>
+          <a:off x="0" y="0"/>
+          <a:ext cx="0" cy="0"/>
+          <a:chOff x="0" y="0"/>
+          <a:chExt cx="0" cy="0"/>
+        </a:xfrm>
+      </p:grpSpPr>
+      <p:sp>
+        <p:nvSpPr>
+          <p:cNvPr id="2" name="タイトル 1">
+            <a:extLst>
+              <a:ext uri="{FF2B5EF4-FFF2-40B4-BE49-F238E27FC236}">
+                <a16:creationId xmlns:a16="http://schemas.microsoft.com/office/drawing/2014/main" id="{487FC0EA-D556-8E2A-7D9D-798D6C59D71C}"/>
+              </a:ext>
+            </a:extLst>
+          </p:cNvPr>
+          <p:cNvSpPr>
+            <a:spLocks noGrp="1"/>
+          </p:cNvSpPr>
+          <p:nvPr>
+            <p:ph type="title"/>
+          </p:nvPr>
+        </p:nvSpPr>
+        <p:spPr/>
+        <p:txBody>
+          <a:bodyPr>
+            <a:normAutofit fontScale="90000"/>
+          </a:bodyPr>
+          <a:lstStyle/>
+          <a:p>
+            <a:r>
+              <a:rPr kumimoji="1" lang="en-US" altLang="ja-JP" dirty="0"/>
+              <a:t>1</a:t>
+            </a:r>
+            <a:r>
+              <a:rPr kumimoji="1" lang="ja-JP" altLang="en-US" dirty="0"/>
+              <a:t>カラム テンプレート</a:t>
+            </a:r>
+          </a:p>
+        </p:txBody>
+      </p:sp>
+      <p:sp>
+        <p:nvSpPr>
+          <p:cNvPr id="3" name="コンテンツ プレースホルダー 2">
+            <a:extLst>
+              <a:ext uri="{FF2B5EF4-FFF2-40B4-BE49-F238E27FC236}">
+                <a16:creationId xmlns:a16="http://schemas.microsoft.com/office/drawing/2014/main" id="{17367776-7A7B-93E0-CD83-A6528ECA0D77}"/>
+              </a:ext>
+            </a:extLst>
+          </p:cNvPr>
+          <p:cNvSpPr>
+            <a:spLocks noGrp="1"/>
+          </p:cNvSpPr>
+          <p:nvPr>
+            <p:ph idx="1"/>
+          </p:nvPr>
+        </p:nvSpPr>
+        <p:spPr/>
+        <p:txBody>
+          <a:bodyPr/>
+          <a:lstStyle/>
+          <a:p>
+            <a:pPr marL="0" indent="0">
+              <a:buNone/>
+            </a:pPr>
+            <a:endParaRPr kumimoji="1" lang="ja-JP" altLang="en-US" dirty="0"/>
+          </a:p>
+        </p:txBody>
+      </p:sp>
+      <p:sp>
+        <p:nvSpPr>
+          <p:cNvPr id="4" name="スライド番号プレースホルダー 3">
+            <a:extLst>
+              <a:ext uri="{FF2B5EF4-FFF2-40B4-BE49-F238E27FC236}">
+                <a16:creationId xmlns:a16="http://schemas.microsoft.com/office/drawing/2014/main" id="{EEE3C0D6-9A3C-BD21-A899-F0A3AABF5706}"/>
+              </a:ext>
+            </a:extLst>
+          </p:cNvPr>
+          <p:cNvSpPr>
+            <a:spLocks noGrp="1"/>
+          </p:cNvSpPr>
+          <p:nvPr>
+            <p:ph type="sldNum" sz="quarter" idx="12"/>
+          </p:nvPr>
+        </p:nvSpPr>
+        <p:spPr/>
+        <p:txBody>
+          <a:bodyPr/>
+          <a:lstStyle/>
+          <a:p>
+            <a:fld id="{9C0FEE9A-3EB6-844C-8184-5D808DF01412}" type="slidenum">
+              <a:rPr kumimoji="1" lang="ja-JP" altLang="en-US" smtClean="0"/>
+              <a:t>6</a:t>
+            </a:fld>
+            <a:endParaRPr kumimoji="1" lang="ja-JP" altLang="en-US"/>
+          </a:p>
+        </p:txBody>
+      </p:sp>
+      <p:sp>
+        <p:nvSpPr>
+          <p:cNvPr id="5" name="テキスト ボックス 4">
+            <a:extLst>
+              <a:ext uri="{FF2B5EF4-FFF2-40B4-BE49-F238E27FC236}">
+                <a16:creationId xmlns:a16="http://schemas.microsoft.com/office/drawing/2014/main" id="{314E0B6E-945A-2E49-D257-34F89DA8B594}"/>
+              </a:ext>
+            </a:extLst>
+          </p:cNvPr>
+          <p:cNvSpPr txBox="1"/>
+          <p:nvPr/>
+        </p:nvSpPr>
+        <p:spPr>
+          <a:xfrm>
+            <a:off x="-809338" y="1309255"/>
+            <a:ext cx="184731" cy="461665"/>
+          </a:xfrm>
+          <a:prstGeom prst="rect">
+            <a:avLst/>
+          </a:prstGeom>
+          <a:noFill/>
+        </p:spPr>
+        <p:txBody>
+          <a:bodyPr wrap="none" rtlCol="0">
+            <a:spAutoFit/>
+          </a:bodyPr>
+          <a:lstStyle/>
+          <a:p>
+            <a:pPr algn="ctr"/>
+            <a:endParaRPr kumimoji="1" lang="ja-JP" altLang="en-US" sz="2400">
+              <a:latin typeface="BIZ UDGothic" panose="020B0400000000000000" pitchFamily="49" charset="-128"/>
+              <a:ea typeface="BIZ UDGothic" panose="020B0400000000000000" pitchFamily="49" charset="-128"/>
+            </a:endParaRPr>
+          </a:p>
+        </p:txBody>
+      </p:sp>
+    </p:spTree>
+    <p:extLst>
+      <p:ext uri="{BB962C8B-B14F-4D97-AF65-F5344CB8AC3E}">
+        <p14:creationId xmlns:p14="http://schemas.microsoft.com/office/powerpoint/2010/main" val="1385369761"/>
+      </p:ext>
+    </p:extLst>
+  </p:cSld>
+  <p:clrMapOvr>
+    <a:masterClrMapping/>
+  </p:clrMapOvr>
+</p:sld>
+</file>
+
+<file path=ppt/slides/slide7.xml><?xml version="1.0" encoding="utf-8"?>
+<p:sld xmlns:a="http://schemas.openxmlformats.org/drawingml/2006/main" xmlns:r="http://schemas.openxmlformats.org/officeDocument/2006/relationships" xmlns:p="http://schemas.openxmlformats.org/presentationml/2006/main">
+  <p:cSld>
+    <p:spTree>
+      <p:nvGrpSpPr>
+        <p:cNvPr id="1" name=""/>
+        <p:cNvGrpSpPr/>
+        <p:nvPr/>
+      </p:nvGrpSpPr>
+      <p:grpSpPr>
+        <a:xfrm>
+          <a:off x="0" y="0"/>
+          <a:ext cx="0" cy="0"/>
+          <a:chOff x="0" y="0"/>
+          <a:chExt cx="0" cy="0"/>
+        </a:xfrm>
+      </p:grpSpPr>
+      <p:sp>
+        <p:nvSpPr>
+          <p:cNvPr id="2" name="タイトル 1">
+            <a:extLst>
+              <a:ext uri="{FF2B5EF4-FFF2-40B4-BE49-F238E27FC236}">
+                <a16:creationId xmlns:a16="http://schemas.microsoft.com/office/drawing/2014/main" id="{F23FAC32-585E-3A6A-2398-072BDED40180}"/>
+              </a:ext>
+            </a:extLst>
+          </p:cNvPr>
+          <p:cNvSpPr>
+            <a:spLocks noGrp="1"/>
+          </p:cNvSpPr>
+          <p:nvPr>
+            <p:ph type="title"/>
+          </p:nvPr>
+        </p:nvSpPr>
+        <p:spPr/>
+        <p:txBody>
+          <a:bodyPr>
+            <a:normAutofit fontScale="90000"/>
+          </a:bodyPr>
+          <a:lstStyle/>
+          <a:p>
+            <a:r>
+              <a:rPr kumimoji="1" lang="en-US" altLang="ja-JP" dirty="0"/>
+              <a:t>2</a:t>
+            </a:r>
+            <a:r>
+              <a:rPr kumimoji="1" lang="ja-JP" altLang="en-US" dirty="0"/>
+              <a:t>カラム テンプレート</a:t>
+            </a:r>
+          </a:p>
+        </p:txBody>
+      </p:sp>
+      <p:sp>
+        <p:nvSpPr>
+          <p:cNvPr id="3" name="コンテンツ プレースホルダー 2">
+            <a:extLst>
+              <a:ext uri="{FF2B5EF4-FFF2-40B4-BE49-F238E27FC236}">
+                <a16:creationId xmlns:a16="http://schemas.microsoft.com/office/drawing/2014/main" id="{29BB8BDE-2C62-7A94-EA57-2905A0F7190E}"/>
+              </a:ext>
+            </a:extLst>
+          </p:cNvPr>
+          <p:cNvSpPr>
+            <a:spLocks noGrp="1"/>
+          </p:cNvSpPr>
+          <p:nvPr>
+            <p:ph sz="half" idx="1"/>
+          </p:nvPr>
+        </p:nvSpPr>
+        <p:spPr/>
+        <p:txBody>
+          <a:bodyPr/>
+          <a:lstStyle/>
+          <a:p>
+            <a:endParaRPr kumimoji="1" lang="ja-JP" altLang="en-US"/>
+          </a:p>
+        </p:txBody>
+      </p:sp>
+      <p:sp>
+        <p:nvSpPr>
+          <p:cNvPr id="4" name="コンテンツ プレースホルダー 3">
+            <a:extLst>
+              <a:ext uri="{FF2B5EF4-FFF2-40B4-BE49-F238E27FC236}">
+                <a16:creationId xmlns:a16="http://schemas.microsoft.com/office/drawing/2014/main" id="{3C6130C0-32DE-A52E-67B8-E1AB4BF39A80}"/>
+              </a:ext>
+            </a:extLst>
+          </p:cNvPr>
+          <p:cNvSpPr>
+            <a:spLocks noGrp="1"/>
+          </p:cNvSpPr>
+          <p:nvPr>
+            <p:ph sz="half" idx="2"/>
+          </p:nvPr>
+        </p:nvSpPr>
+        <p:spPr/>
+        <p:txBody>
+          <a:bodyPr/>
+          <a:lstStyle/>
+          <a:p>
+            <a:endParaRPr kumimoji="1" lang="ja-JP" altLang="en-US"/>
+          </a:p>
+        </p:txBody>
+      </p:sp>
+      <p:sp>
+        <p:nvSpPr>
+          <p:cNvPr id="5" name="スライド番号プレースホルダー 4">
+            <a:extLst>
+              <a:ext uri="{FF2B5EF4-FFF2-40B4-BE49-F238E27FC236}">
+                <a16:creationId xmlns:a16="http://schemas.microsoft.com/office/drawing/2014/main" id="{1E85E263-675E-C473-9CC5-3C5CD1930E7B}"/>
+              </a:ext>
+            </a:extLst>
+          </p:cNvPr>
+          <p:cNvSpPr>
+            <a:spLocks noGrp="1"/>
+          </p:cNvSpPr>
+          <p:nvPr>
+            <p:ph type="sldNum" sz="quarter" idx="12"/>
+          </p:nvPr>
+        </p:nvSpPr>
+        <p:spPr/>
+        <p:txBody>
+          <a:bodyPr/>
+          <a:lstStyle/>
+          <a:p>
+            <a:fld id="{9C0FEE9A-3EB6-844C-8184-5D808DF01412}" type="slidenum">
+              <a:rPr kumimoji="1" lang="ja-JP" altLang="en-US" smtClean="0"/>
+              <a:t>7</a:t>
+            </a:fld>
+            <a:endParaRPr kumimoji="1" lang="ja-JP" altLang="en-US"/>
+          </a:p>
+        </p:txBody>
+      </p:sp>
+    </p:spTree>
+    <p:extLst>
+      <p:ext uri="{BB962C8B-B14F-4D97-AF65-F5344CB8AC3E}">
+        <p14:creationId xmlns:p14="http://schemas.microsoft.com/office/powerpoint/2010/main" val="49776739"/>
       </p:ext>
     </p:extLst>
   </p:cSld>

--- a/templates/research.pptx
+++ b/templates/research.pptx
@@ -5,10 +5,10 @@
     <p:sldMasterId id="2147483648" r:id="rId1"/>
   </p:sldMasterIdLst>
   <p:notesMasterIdLst>
-    <p:notesMasterId r:id="rId9"/>
+    <p:notesMasterId r:id="rId14"/>
   </p:notesMasterIdLst>
   <p:handoutMasterIdLst>
-    <p:handoutMasterId r:id="rId10"/>
+    <p:handoutMasterId r:id="rId15"/>
   </p:handoutMasterIdLst>
   <p:sldIdLst>
     <p:sldId id="261" r:id="rId2"/>
@@ -16,8 +16,13 @@
     <p:sldId id="259" r:id="rId4"/>
     <p:sldId id="265" r:id="rId5"/>
     <p:sldId id="258" r:id="rId6"/>
-    <p:sldId id="262" r:id="rId7"/>
-    <p:sldId id="263" r:id="rId8"/>
+    <p:sldId id="270" r:id="rId7"/>
+    <p:sldId id="262" r:id="rId8"/>
+    <p:sldId id="263" r:id="rId9"/>
+    <p:sldId id="267" r:id="rId10"/>
+    <p:sldId id="266" r:id="rId11"/>
+    <p:sldId id="268" r:id="rId12"/>
+    <p:sldId id="269" r:id="rId13"/>
   </p:sldIdLst>
   <p:sldSz cx="12192000" cy="6858000"/>
   <p:notesSz cx="6858000" cy="9144000"/>
@@ -232,7 +237,7 @@
           <a:p>
             <a:fld id="{1D5D4A56-4347-7E47-805C-A4CC550EB7FE}" type="datetimeFigureOut">
               <a:rPr kumimoji="1" lang="ja-JP" altLang="en-US" smtClean="0"/>
-              <a:t>2026/8/24</a:t>
+              <a:t>2026/9/27</a:t>
             </a:fld>
             <a:endParaRPr kumimoji="1" lang="ja-JP" altLang="en-US"/>
           </a:p>
@@ -425,7 +430,7 @@
           <a:p>
             <a:fld id="{1B171477-B974-724E-B5A2-6B597495C72D}" type="datetimeFigureOut">
               <a:rPr kumimoji="1" lang="ja-JP" altLang="en-US" smtClean="0"/>
-              <a:t>2026/8/24</a:t>
+              <a:t>2026/9/27</a:t>
             </a:fld>
             <a:endParaRPr kumimoji="1" lang="ja-JP" altLang="en-US"/>
           </a:p>
@@ -764,7 +769,7 @@
           <a:p>
             <a:fld id="{A42D0FF2-8DB4-A340-91B5-0FC7B27917C5}" type="datetime1">
               <a:rPr kumimoji="1" lang="ja-JP" altLang="en-US" smtClean="0"/>
-              <a:t>2026/8/24</a:t>
+              <a:t>2026/9/27</a:t>
             </a:fld>
             <a:endParaRPr kumimoji="1" lang="ja-JP" altLang="en-US" dirty="0"/>
           </a:p>
@@ -1012,7 +1017,7 @@
         </p:blipFill>
         <p:spPr bwMode="auto">
           <a:xfrm>
-            <a:off x="9941931" y="5780147"/>
+            <a:off x="7313458" y="5780147"/>
             <a:ext cx="2124100" cy="618670"/>
           </a:xfrm>
           <a:prstGeom prst="rect">
@@ -1058,8 +1063,65 @@
         </p:blipFill>
         <p:spPr>
           <a:xfrm>
-            <a:off x="7283867" y="5780147"/>
+            <a:off x="9516179" y="5799163"/>
             <a:ext cx="2658064" cy="628269"/>
+          </a:xfrm>
+          <a:prstGeom prst="rect">
+            <a:avLst/>
+          </a:prstGeom>
+        </p:spPr>
+      </p:pic>
+      <p:pic>
+        <p:nvPicPr>
+          <p:cNvPr id="16" name="図 15">
+            <a:extLst>
+              <a:ext uri="{FF2B5EF4-FFF2-40B4-BE49-F238E27FC236}">
+                <a16:creationId xmlns:a16="http://schemas.microsoft.com/office/drawing/2014/main" id="{5A5F1533-9AB0-CF43-65E3-87A27349B2B2}"/>
+              </a:ext>
+            </a:extLst>
+          </p:cNvPr>
+          <p:cNvPicPr>
+            <a:picLocks noChangeAspect="1"/>
+          </p:cNvPicPr>
+          <p:nvPr userDrawn="1"/>
+        </p:nvPicPr>
+        <p:blipFill>
+          <a:blip r:embed="rId4">
+            <a:extLst>
+              <a:ext uri="{BEBA8EAE-BF5A-486C-A8C5-ECC9F3942E4B}">
+                <a14:imgProps xmlns:a14="http://schemas.microsoft.com/office/drawing/2010/main">
+                  <a14:imgLayer r:embed="rId5">
+                    <a14:imgEffect>
+                      <a14:backgroundRemoval t="9434" b="96855" l="1563" r="97266">
+                        <a14:foregroundMark x1="20117" y1="81132" x2="20117" y2="81132"/>
+                        <a14:foregroundMark x1="22656" y1="80503" x2="35742" y2="77987"/>
+                        <a14:foregroundMark x1="35742" y1="77987" x2="35742" y2="77987"/>
+                        <a14:foregroundMark x1="53906" y1="18239" x2="53906" y2="32704"/>
+                        <a14:foregroundMark x1="53418" y1="14465" x2="53809" y2="22642"/>
+                        <a14:foregroundMark x1="54004" y1="23899" x2="53320" y2="44654"/>
+                        <a14:foregroundMark x1="97363" y1="92453" x2="93164" y2="85535"/>
+                        <a14:foregroundMark x1="6641" y1="93082" x2="5566" y2="93082"/>
+                        <a14:foregroundMark x1="1563" y1="96855" x2="1563" y2="96855"/>
+                        <a14:foregroundMark x1="54492" y1="30189" x2="54492" y2="30189"/>
+                        <a14:foregroundMark x1="53906" y1="42767" x2="53906" y2="42767"/>
+                        <a14:foregroundMark x1="54004" y1="37736" x2="54004" y2="37736"/>
+                        <a14:foregroundMark x1="53125" y1="42138" x2="53125" y2="42138"/>
+                        <a14:foregroundMark x1="53027" y1="42138" x2="53027" y2="42138"/>
+                      </a14:backgroundRemoval>
+                    </a14:imgEffect>
+                  </a14:imgLayer>
+                </a14:imgProps>
+              </a:ext>
+            </a:extLst>
+          </a:blip>
+          <a:stretch>
+            <a:fillRect/>
+          </a:stretch>
+        </p:blipFill>
+        <p:spPr>
+          <a:xfrm>
+            <a:off x="1" y="5560820"/>
+            <a:ext cx="5752730" cy="893246"/>
           </a:xfrm>
           <a:prstGeom prst="rect">
             <a:avLst/>
@@ -1170,14 +1232,14 @@
           <a:p>
             <a:pPr lvl="0"/>
             <a:r>
-              <a:rPr kumimoji="1" lang="ja-JP" altLang="en-US"/>
+              <a:rPr kumimoji="1" lang="ja-JP" altLang="en-US" dirty="0"/>
               <a:t>マスター テキストの書式設定</a:t>
             </a:r>
           </a:p>
           <a:p>
             <a:pPr lvl="1"/>
             <a:r>
-              <a:rPr kumimoji="1" lang="ja-JP" altLang="en-US"/>
+              <a:rPr kumimoji="1" lang="ja-JP" altLang="en-US" dirty="0"/>
               <a:t>第 </a:t>
             </a:r>
             <a:r>
@@ -1185,14 +1247,14 @@
               <a:t>2 </a:t>
             </a:r>
             <a:r>
-              <a:rPr kumimoji="1" lang="ja-JP" altLang="en-US"/>
+              <a:rPr kumimoji="1" lang="ja-JP" altLang="en-US" dirty="0"/>
               <a:t>レベル</a:t>
             </a:r>
           </a:p>
           <a:p>
             <a:pPr lvl="2"/>
             <a:r>
-              <a:rPr kumimoji="1" lang="ja-JP" altLang="en-US"/>
+              <a:rPr kumimoji="1" lang="ja-JP" altLang="en-US" dirty="0"/>
               <a:t>第 </a:t>
             </a:r>
             <a:r>
@@ -1200,14 +1262,14 @@
               <a:t>3 </a:t>
             </a:r>
             <a:r>
-              <a:rPr kumimoji="1" lang="ja-JP" altLang="en-US"/>
+              <a:rPr kumimoji="1" lang="ja-JP" altLang="en-US" dirty="0"/>
               <a:t>レベル</a:t>
             </a:r>
           </a:p>
           <a:p>
             <a:pPr lvl="3"/>
             <a:r>
-              <a:rPr kumimoji="1" lang="ja-JP" altLang="en-US"/>
+              <a:rPr kumimoji="1" lang="ja-JP" altLang="en-US" dirty="0"/>
               <a:t>第 </a:t>
             </a:r>
             <a:r>
@@ -1215,14 +1277,14 @@
               <a:t>4 </a:t>
             </a:r>
             <a:r>
-              <a:rPr kumimoji="1" lang="ja-JP" altLang="en-US"/>
+              <a:rPr kumimoji="1" lang="ja-JP" altLang="en-US" dirty="0"/>
               <a:t>レベル</a:t>
             </a:r>
           </a:p>
           <a:p>
             <a:pPr lvl="4"/>
             <a:r>
-              <a:rPr kumimoji="1" lang="ja-JP" altLang="en-US"/>
+              <a:rPr kumimoji="1" lang="ja-JP" altLang="en-US" dirty="0"/>
               <a:t>第 </a:t>
             </a:r>
             <a:r>
@@ -1230,7 +1292,7 @@
               <a:t>5 </a:t>
             </a:r>
             <a:r>
-              <a:rPr kumimoji="1" lang="ja-JP" altLang="en-US"/>
+              <a:rPr kumimoji="1" lang="ja-JP" altLang="en-US" dirty="0"/>
               <a:t>レベル</a:t>
             </a:r>
           </a:p>
@@ -1259,7 +1321,7 @@
           <a:p>
             <a:fld id="{DA2D38D8-431E-2148-A67E-C99D9FDB14AB}" type="datetime1">
               <a:rPr kumimoji="1" lang="ja-JP" altLang="en-US" smtClean="0"/>
-              <a:t>2026/8/24</a:t>
+              <a:t>2026/9/27</a:t>
             </a:fld>
             <a:endParaRPr kumimoji="1" lang="ja-JP" altLang="en-US"/>
           </a:p>
@@ -1604,7 +1666,7 @@
           <a:p>
             <a:fld id="{1D60C9B8-7821-394F-9014-0DAE5FBA846C}" type="datetime1">
               <a:rPr kumimoji="1" lang="ja-JP" altLang="en-US" smtClean="0"/>
-              <a:t>2026/8/24</a:t>
+              <a:t>2026/9/27</a:t>
             </a:fld>
             <a:endParaRPr kumimoji="1" lang="ja-JP" altLang="en-US"/>
           </a:p>
@@ -1878,14 +1940,14 @@
           <a:p>
             <a:pPr lvl="0"/>
             <a:r>
-              <a:rPr kumimoji="1" lang="ja-JP" altLang="en-US"/>
+              <a:rPr kumimoji="1" lang="ja-JP" altLang="en-US" dirty="0"/>
               <a:t>マスター テキストの書式設定</a:t>
             </a:r>
           </a:p>
           <a:p>
             <a:pPr lvl="1"/>
             <a:r>
-              <a:rPr kumimoji="1" lang="ja-JP" altLang="en-US"/>
+              <a:rPr kumimoji="1" lang="ja-JP" altLang="en-US" dirty="0"/>
               <a:t>第 </a:t>
             </a:r>
             <a:r>
@@ -1893,14 +1955,14 @@
               <a:t>2 </a:t>
             </a:r>
             <a:r>
-              <a:rPr kumimoji="1" lang="ja-JP" altLang="en-US"/>
+              <a:rPr kumimoji="1" lang="ja-JP" altLang="en-US" dirty="0"/>
               <a:t>レベル</a:t>
             </a:r>
           </a:p>
           <a:p>
             <a:pPr lvl="2"/>
             <a:r>
-              <a:rPr kumimoji="1" lang="ja-JP" altLang="en-US"/>
+              <a:rPr kumimoji="1" lang="ja-JP" altLang="en-US" dirty="0"/>
               <a:t>第 </a:t>
             </a:r>
             <a:r>
@@ -1908,14 +1970,14 @@
               <a:t>3 </a:t>
             </a:r>
             <a:r>
-              <a:rPr kumimoji="1" lang="ja-JP" altLang="en-US"/>
+              <a:rPr kumimoji="1" lang="ja-JP" altLang="en-US" dirty="0"/>
               <a:t>レベル</a:t>
             </a:r>
           </a:p>
           <a:p>
             <a:pPr lvl="3"/>
             <a:r>
-              <a:rPr kumimoji="1" lang="ja-JP" altLang="en-US"/>
+              <a:rPr kumimoji="1" lang="ja-JP" altLang="en-US" dirty="0"/>
               <a:t>第 </a:t>
             </a:r>
             <a:r>
@@ -1923,14 +1985,14 @@
               <a:t>4 </a:t>
             </a:r>
             <a:r>
-              <a:rPr kumimoji="1" lang="ja-JP" altLang="en-US"/>
+              <a:rPr kumimoji="1" lang="ja-JP" altLang="en-US" dirty="0"/>
               <a:t>レベル</a:t>
             </a:r>
           </a:p>
           <a:p>
             <a:pPr lvl="4"/>
             <a:r>
-              <a:rPr kumimoji="1" lang="ja-JP" altLang="en-US"/>
+              <a:rPr kumimoji="1" lang="ja-JP" altLang="en-US" dirty="0"/>
               <a:t>第 </a:t>
             </a:r>
             <a:r>
@@ -1938,7 +2000,7 @@
               <a:t>5 </a:t>
             </a:r>
             <a:r>
-              <a:rPr kumimoji="1" lang="ja-JP" altLang="en-US"/>
+              <a:rPr kumimoji="1" lang="ja-JP" altLang="en-US" dirty="0"/>
               <a:t>レベル</a:t>
             </a:r>
           </a:p>
@@ -1985,7 +2047,7 @@
           <a:p>
             <a:fld id="{C8DD7B46-612B-4747-AC0E-56DE60A5EB0D}" type="datetime1">
               <a:rPr lang="ja-JP" altLang="en-US" smtClean="0"/>
-              <a:t>2026/8/24</a:t>
+              <a:t>2026/9/27</a:t>
             </a:fld>
             <a:endParaRPr lang="ja-JP" altLang="en-US"/>
           </a:p>
@@ -2117,7 +2179,7 @@
       </a:lvl1pPr>
     </p:titleStyle>
     <p:bodyStyle>
-      <a:lvl1pPr marL="228600" indent="-228600" algn="l" defTabSz="914400" rtl="0" eaLnBrk="1" latinLnBrk="0" hangingPunct="1">
+      <a:lvl1pPr marL="0" indent="0" algn="l" defTabSz="914400" rtl="0" eaLnBrk="1" latinLnBrk="0" hangingPunct="1">
         <a:lnSpc>
           <a:spcPct val="100000"/>
         </a:lnSpc>
@@ -2125,7 +2187,7 @@
           <a:spcPts val="1000"/>
         </a:spcBef>
         <a:buFont typeface="Arial" panose="020B0604020202020204" pitchFamily="34" charset="0"/>
-        <a:buChar char="•"/>
+        <a:buNone/>
         <a:defRPr kumimoji="1" sz="2800" kern="1200">
           <a:solidFill>
             <a:schemeClr val="tx1"/>
@@ -2135,7 +2197,7 @@
           <a:cs typeface="+mn-cs"/>
         </a:defRPr>
       </a:lvl1pPr>
-      <a:lvl2pPr marL="685800" indent="-228600" algn="l" defTabSz="914400" rtl="0" eaLnBrk="1" latinLnBrk="0" hangingPunct="1">
+      <a:lvl2pPr marL="457200" indent="0" algn="l" defTabSz="914400" rtl="0" eaLnBrk="1" latinLnBrk="0" hangingPunct="1">
         <a:lnSpc>
           <a:spcPct val="100000"/>
         </a:lnSpc>
@@ -2143,7 +2205,7 @@
           <a:spcPts val="500"/>
         </a:spcBef>
         <a:buFont typeface="Arial" panose="020B0604020202020204" pitchFamily="34" charset="0"/>
-        <a:buChar char="•"/>
+        <a:buNone/>
         <a:defRPr kumimoji="1" sz="2400" kern="1200">
           <a:solidFill>
             <a:schemeClr val="tx1"/>
@@ -2153,7 +2215,7 @@
           <a:cs typeface="+mn-cs"/>
         </a:defRPr>
       </a:lvl2pPr>
-      <a:lvl3pPr marL="1143000" indent="-228600" algn="l" defTabSz="914400" rtl="0" eaLnBrk="1" latinLnBrk="0" hangingPunct="1">
+      <a:lvl3pPr marL="914400" indent="0" algn="l" defTabSz="914400" rtl="0" eaLnBrk="1" latinLnBrk="0" hangingPunct="1">
         <a:lnSpc>
           <a:spcPct val="100000"/>
         </a:lnSpc>
@@ -2161,7 +2223,7 @@
           <a:spcPts val="500"/>
         </a:spcBef>
         <a:buFont typeface="Arial" panose="020B0604020202020204" pitchFamily="34" charset="0"/>
-        <a:buChar char="•"/>
+        <a:buNone/>
         <a:defRPr kumimoji="1" sz="2000" kern="1200">
           <a:solidFill>
             <a:schemeClr val="tx1"/>
@@ -2171,7 +2233,7 @@
           <a:cs typeface="+mn-cs"/>
         </a:defRPr>
       </a:lvl3pPr>
-      <a:lvl4pPr marL="1600200" indent="-228600" algn="l" defTabSz="914400" rtl="0" eaLnBrk="1" latinLnBrk="0" hangingPunct="1">
+      <a:lvl4pPr marL="1371600" indent="0" algn="l" defTabSz="914400" rtl="0" eaLnBrk="1" latinLnBrk="0" hangingPunct="1">
         <a:lnSpc>
           <a:spcPct val="100000"/>
         </a:lnSpc>
@@ -2179,7 +2241,7 @@
           <a:spcPts val="500"/>
         </a:spcBef>
         <a:buFont typeface="Arial" panose="020B0604020202020204" pitchFamily="34" charset="0"/>
-        <a:buChar char="•"/>
+        <a:buNone/>
         <a:defRPr kumimoji="1" sz="1800" kern="1200">
           <a:solidFill>
             <a:schemeClr val="tx1"/>
@@ -2189,7 +2251,7 @@
           <a:cs typeface="+mn-cs"/>
         </a:defRPr>
       </a:lvl4pPr>
-      <a:lvl5pPr marL="2057400" indent="-228600" algn="l" defTabSz="914400" rtl="0" eaLnBrk="1" latinLnBrk="0" hangingPunct="1">
+      <a:lvl5pPr marL="1828800" indent="0" algn="l" defTabSz="914400" rtl="0" eaLnBrk="1" latinLnBrk="0" hangingPunct="1">
         <a:lnSpc>
           <a:spcPct val="100000"/>
         </a:lnSpc>
@@ -2197,7 +2259,7 @@
           <a:spcPts val="500"/>
         </a:spcBef>
         <a:buFont typeface="Arial" panose="020B0604020202020204" pitchFamily="34" charset="0"/>
-        <a:buChar char="•"/>
+        <a:buNone/>
         <a:defRPr kumimoji="1" sz="1800" kern="1200">
           <a:solidFill>
             <a:schemeClr val="tx1"/>
@@ -2524,8 +2586,1529 @@
 </p:sld>
 </file>
 
+<file path=ppt/slides/slide10.xml><?xml version="1.0" encoding="utf-8"?>
+<p:sld xmlns:a="http://schemas.openxmlformats.org/drawingml/2006/main" xmlns:r="http://schemas.openxmlformats.org/officeDocument/2006/relationships" xmlns:p="http://schemas.openxmlformats.org/presentationml/2006/main" show="0">
+  <p:cSld>
+    <p:spTree>
+      <p:nvGrpSpPr>
+        <p:cNvPr id="1" name=""/>
+        <p:cNvGrpSpPr/>
+        <p:nvPr/>
+      </p:nvGrpSpPr>
+      <p:grpSpPr>
+        <a:xfrm>
+          <a:off x="0" y="0"/>
+          <a:ext cx="0" cy="0"/>
+          <a:chOff x="0" y="0"/>
+          <a:chExt cx="0" cy="0"/>
+        </a:xfrm>
+      </p:grpSpPr>
+      <p:sp>
+        <p:nvSpPr>
+          <p:cNvPr id="2" name="タイトル 1">
+            <a:extLst>
+              <a:ext uri="{FF2B5EF4-FFF2-40B4-BE49-F238E27FC236}">
+                <a16:creationId xmlns:a16="http://schemas.microsoft.com/office/drawing/2014/main" id="{5CB2C852-3C80-86AC-23A9-585B10E45066}"/>
+              </a:ext>
+            </a:extLst>
+          </p:cNvPr>
+          <p:cNvSpPr>
+            <a:spLocks noGrp="1"/>
+          </p:cNvSpPr>
+          <p:nvPr>
+            <p:ph type="title"/>
+          </p:nvPr>
+        </p:nvSpPr>
+        <p:spPr/>
+        <p:txBody>
+          <a:bodyPr>
+            <a:normAutofit fontScale="90000"/>
+          </a:bodyPr>
+          <a:lstStyle/>
+          <a:p>
+            <a:r>
+              <a:rPr lang="en-US" altLang="ja-JP" dirty="0"/>
+              <a:t>3BOX</a:t>
+            </a:r>
+            <a:r>
+              <a:rPr lang="ja-JP" altLang="en-US" dirty="0"/>
+              <a:t>テンプレート</a:t>
+            </a:r>
+            <a:endParaRPr kumimoji="1" lang="ja-JP" altLang="en-US" dirty="0"/>
+          </a:p>
+        </p:txBody>
+      </p:sp>
+      <p:sp>
+        <p:nvSpPr>
+          <p:cNvPr id="3" name="コンテンツ プレースホルダー 2">
+            <a:extLst>
+              <a:ext uri="{FF2B5EF4-FFF2-40B4-BE49-F238E27FC236}">
+                <a16:creationId xmlns:a16="http://schemas.microsoft.com/office/drawing/2014/main" id="{3E572A7B-4267-85BE-1F19-4513891893AE}"/>
+              </a:ext>
+            </a:extLst>
+          </p:cNvPr>
+          <p:cNvSpPr>
+            <a:spLocks noGrp="1"/>
+          </p:cNvSpPr>
+          <p:nvPr>
+            <p:ph idx="1"/>
+          </p:nvPr>
+        </p:nvSpPr>
+        <p:spPr/>
+        <p:txBody>
+          <a:bodyPr/>
+          <a:lstStyle/>
+          <a:p>
+            <a:endParaRPr kumimoji="1" lang="ja-JP" altLang="en-US" dirty="0"/>
+          </a:p>
+        </p:txBody>
+      </p:sp>
+      <p:sp>
+        <p:nvSpPr>
+          <p:cNvPr id="4" name="スライド番号プレースホルダー 3">
+            <a:extLst>
+              <a:ext uri="{FF2B5EF4-FFF2-40B4-BE49-F238E27FC236}">
+                <a16:creationId xmlns:a16="http://schemas.microsoft.com/office/drawing/2014/main" id="{6788ACEF-A7C4-3676-96F1-216CE3487A96}"/>
+              </a:ext>
+            </a:extLst>
+          </p:cNvPr>
+          <p:cNvSpPr>
+            <a:spLocks noGrp="1"/>
+          </p:cNvSpPr>
+          <p:nvPr>
+            <p:ph type="sldNum" sz="quarter" idx="12"/>
+          </p:nvPr>
+        </p:nvSpPr>
+        <p:spPr/>
+        <p:txBody>
+          <a:bodyPr/>
+          <a:lstStyle/>
+          <a:p>
+            <a:fld id="{9C0FEE9A-3EB6-844C-8184-5D808DF01412}" type="slidenum">
+              <a:rPr kumimoji="1" lang="ja-JP" altLang="en-US" smtClean="0"/>
+              <a:t>10</a:t>
+            </a:fld>
+            <a:endParaRPr kumimoji="1" lang="ja-JP" altLang="en-US"/>
+          </a:p>
+        </p:txBody>
+      </p:sp>
+      <p:sp>
+        <p:nvSpPr>
+          <p:cNvPr id="6" name="四角形: 角を丸くする 5">
+            <a:extLst>
+              <a:ext uri="{FF2B5EF4-FFF2-40B4-BE49-F238E27FC236}">
+                <a16:creationId xmlns:a16="http://schemas.microsoft.com/office/drawing/2014/main" id="{4B42A8C6-2C21-DB40-6B7C-CF06B0126152}"/>
+              </a:ext>
+            </a:extLst>
+          </p:cNvPr>
+          <p:cNvSpPr/>
+          <p:nvPr/>
+        </p:nvSpPr>
+        <p:spPr>
+          <a:xfrm>
+            <a:off x="125969" y="813575"/>
+            <a:ext cx="3780000" cy="5563759"/>
+          </a:xfrm>
+          <a:prstGeom prst="roundRect">
+            <a:avLst>
+              <a:gd name="adj" fmla="val 5227"/>
+            </a:avLst>
+          </a:prstGeom>
+          <a:solidFill>
+            <a:schemeClr val="bg1"/>
+          </a:solidFill>
+          <a:ln>
+            <a:solidFill>
+              <a:schemeClr val="tx1"/>
+            </a:solidFill>
+          </a:ln>
+        </p:spPr>
+        <p:style>
+          <a:lnRef idx="2">
+            <a:schemeClr val="accent1">
+              <a:shade val="15000"/>
+            </a:schemeClr>
+          </a:lnRef>
+          <a:fillRef idx="1">
+            <a:schemeClr val="accent1"/>
+          </a:fillRef>
+          <a:effectRef idx="0">
+            <a:schemeClr val="accent1"/>
+          </a:effectRef>
+          <a:fontRef idx="minor">
+            <a:schemeClr val="lt1"/>
+          </a:fontRef>
+        </p:style>
+        <p:txBody>
+          <a:bodyPr lIns="90000" tIns="90000" rIns="90000" bIns="90000" rtlCol="0" anchor="t">
+            <a:noAutofit/>
+          </a:bodyPr>
+          <a:lstStyle/>
+          <a:p>
+            <a:pPr algn="ctr"/>
+            <a:r>
+              <a:rPr kumimoji="1" lang="ja-JP" altLang="en-US" sz="2800" dirty="0">
+                <a:solidFill>
+                  <a:schemeClr val="tx1"/>
+                </a:solidFill>
+                <a:latin typeface="BIZ UDGothic" panose="020B0400000000000000" pitchFamily="49" charset="-128"/>
+                <a:ea typeface="BIZ UDGothic" panose="020B0400000000000000" pitchFamily="49" charset="-128"/>
+              </a:rPr>
+              <a:t>ボックスタイトル</a:t>
+            </a:r>
+            <a:endParaRPr kumimoji="1" lang="en-US" altLang="ja-JP" sz="2800" dirty="0">
+              <a:solidFill>
+                <a:schemeClr val="tx1"/>
+              </a:solidFill>
+              <a:latin typeface="BIZ UDGothic" panose="020B0400000000000000" pitchFamily="49" charset="-128"/>
+              <a:ea typeface="BIZ UDGothic" panose="020B0400000000000000" pitchFamily="49" charset="-128"/>
+            </a:endParaRPr>
+          </a:p>
+          <a:p>
+            <a:pPr algn="ctr"/>
+            <a:r>
+              <a:rPr kumimoji="1" lang="ja-JP" altLang="en-US" sz="2400" dirty="0">
+                <a:solidFill>
+                  <a:schemeClr val="tx1"/>
+                </a:solidFill>
+                <a:latin typeface="BIZ UDGothic" panose="020B0400000000000000" pitchFamily="49" charset="-128"/>
+                <a:ea typeface="BIZ UDGothic" panose="020B0400000000000000" pitchFamily="49" charset="-128"/>
+              </a:rPr>
+              <a:t>テキストを入力</a:t>
+            </a:r>
+          </a:p>
+        </p:txBody>
+      </p:sp>
+      <p:sp>
+        <p:nvSpPr>
+          <p:cNvPr id="10" name="四角形: 角を丸くする 9">
+            <a:extLst>
+              <a:ext uri="{FF2B5EF4-FFF2-40B4-BE49-F238E27FC236}">
+                <a16:creationId xmlns:a16="http://schemas.microsoft.com/office/drawing/2014/main" id="{4B85FEA8-A5FF-C589-B1BF-F3777BA5E206}"/>
+              </a:ext>
+            </a:extLst>
+          </p:cNvPr>
+          <p:cNvSpPr/>
+          <p:nvPr/>
+        </p:nvSpPr>
+        <p:spPr>
+          <a:xfrm>
+            <a:off x="4206000" y="813575"/>
+            <a:ext cx="3780000" cy="5563759"/>
+          </a:xfrm>
+          <a:prstGeom prst="roundRect">
+            <a:avLst>
+              <a:gd name="adj" fmla="val 5227"/>
+            </a:avLst>
+          </a:prstGeom>
+          <a:solidFill>
+            <a:schemeClr val="bg1"/>
+          </a:solidFill>
+          <a:ln>
+            <a:solidFill>
+              <a:schemeClr val="tx1"/>
+            </a:solidFill>
+          </a:ln>
+        </p:spPr>
+        <p:style>
+          <a:lnRef idx="2">
+            <a:schemeClr val="accent1">
+              <a:shade val="15000"/>
+            </a:schemeClr>
+          </a:lnRef>
+          <a:fillRef idx="1">
+            <a:schemeClr val="accent1"/>
+          </a:fillRef>
+          <a:effectRef idx="0">
+            <a:schemeClr val="accent1"/>
+          </a:effectRef>
+          <a:fontRef idx="minor">
+            <a:schemeClr val="lt1"/>
+          </a:fontRef>
+        </p:style>
+        <p:txBody>
+          <a:bodyPr lIns="90000" tIns="90000" rIns="90000" bIns="90000" rtlCol="0" anchor="t">
+            <a:noAutofit/>
+          </a:bodyPr>
+          <a:lstStyle/>
+          <a:p>
+            <a:pPr algn="ctr"/>
+            <a:r>
+              <a:rPr kumimoji="1" lang="ja-JP" altLang="en-US" sz="2800" dirty="0">
+                <a:solidFill>
+                  <a:schemeClr val="tx1"/>
+                </a:solidFill>
+                <a:latin typeface="BIZ UDGothic" panose="020B0400000000000000" pitchFamily="49" charset="-128"/>
+                <a:ea typeface="BIZ UDGothic" panose="020B0400000000000000" pitchFamily="49" charset="-128"/>
+              </a:rPr>
+              <a:t>ボックスタイトル</a:t>
+            </a:r>
+            <a:endParaRPr kumimoji="1" lang="en-US" altLang="ja-JP" sz="2800" dirty="0">
+              <a:solidFill>
+                <a:schemeClr val="tx1"/>
+              </a:solidFill>
+              <a:latin typeface="BIZ UDGothic" panose="020B0400000000000000" pitchFamily="49" charset="-128"/>
+              <a:ea typeface="BIZ UDGothic" panose="020B0400000000000000" pitchFamily="49" charset="-128"/>
+            </a:endParaRPr>
+          </a:p>
+          <a:p>
+            <a:pPr algn="ctr"/>
+            <a:r>
+              <a:rPr kumimoji="1" lang="ja-JP" altLang="en-US" sz="2400" dirty="0">
+                <a:solidFill>
+                  <a:schemeClr val="tx1"/>
+                </a:solidFill>
+                <a:latin typeface="BIZ UDGothic" panose="020B0400000000000000" pitchFamily="49" charset="-128"/>
+                <a:ea typeface="BIZ UDGothic" panose="020B0400000000000000" pitchFamily="49" charset="-128"/>
+              </a:rPr>
+              <a:t>テキストを入力</a:t>
+            </a:r>
+          </a:p>
+        </p:txBody>
+      </p:sp>
+      <p:sp>
+        <p:nvSpPr>
+          <p:cNvPr id="12" name="四角形: 角を丸くする 11">
+            <a:extLst>
+              <a:ext uri="{FF2B5EF4-FFF2-40B4-BE49-F238E27FC236}">
+                <a16:creationId xmlns:a16="http://schemas.microsoft.com/office/drawing/2014/main" id="{B87F3500-01F3-7970-2F69-B03FC7E88CD0}"/>
+              </a:ext>
+            </a:extLst>
+          </p:cNvPr>
+          <p:cNvSpPr/>
+          <p:nvPr/>
+        </p:nvSpPr>
+        <p:spPr>
+          <a:xfrm>
+            <a:off x="8286031" y="813575"/>
+            <a:ext cx="3780000" cy="5563759"/>
+          </a:xfrm>
+          <a:prstGeom prst="roundRect">
+            <a:avLst>
+              <a:gd name="adj" fmla="val 5227"/>
+            </a:avLst>
+          </a:prstGeom>
+          <a:solidFill>
+            <a:schemeClr val="bg1"/>
+          </a:solidFill>
+          <a:ln>
+            <a:solidFill>
+              <a:schemeClr val="tx1"/>
+            </a:solidFill>
+          </a:ln>
+        </p:spPr>
+        <p:style>
+          <a:lnRef idx="2">
+            <a:schemeClr val="accent1">
+              <a:shade val="15000"/>
+            </a:schemeClr>
+          </a:lnRef>
+          <a:fillRef idx="1">
+            <a:schemeClr val="accent1"/>
+          </a:fillRef>
+          <a:effectRef idx="0">
+            <a:schemeClr val="accent1"/>
+          </a:effectRef>
+          <a:fontRef idx="minor">
+            <a:schemeClr val="lt1"/>
+          </a:fontRef>
+        </p:style>
+        <p:txBody>
+          <a:bodyPr lIns="90000" tIns="90000" rIns="90000" bIns="90000" rtlCol="0" anchor="t">
+            <a:noAutofit/>
+          </a:bodyPr>
+          <a:lstStyle/>
+          <a:p>
+            <a:pPr algn="ctr"/>
+            <a:r>
+              <a:rPr kumimoji="1" lang="ja-JP" altLang="en-US" sz="2800" dirty="0">
+                <a:solidFill>
+                  <a:schemeClr val="tx1"/>
+                </a:solidFill>
+                <a:latin typeface="BIZ UDGothic" panose="020B0400000000000000" pitchFamily="49" charset="-128"/>
+                <a:ea typeface="BIZ UDGothic" panose="020B0400000000000000" pitchFamily="49" charset="-128"/>
+              </a:rPr>
+              <a:t>ボックスタイトル</a:t>
+            </a:r>
+            <a:endParaRPr kumimoji="1" lang="en-US" altLang="ja-JP" sz="2800" dirty="0">
+              <a:solidFill>
+                <a:schemeClr val="tx1"/>
+              </a:solidFill>
+              <a:latin typeface="BIZ UDGothic" panose="020B0400000000000000" pitchFamily="49" charset="-128"/>
+              <a:ea typeface="BIZ UDGothic" panose="020B0400000000000000" pitchFamily="49" charset="-128"/>
+            </a:endParaRPr>
+          </a:p>
+          <a:p>
+            <a:pPr algn="ctr"/>
+            <a:r>
+              <a:rPr kumimoji="1" lang="ja-JP" altLang="en-US" sz="2400" dirty="0">
+                <a:solidFill>
+                  <a:schemeClr val="tx1"/>
+                </a:solidFill>
+                <a:latin typeface="BIZ UDGothic" panose="020B0400000000000000" pitchFamily="49" charset="-128"/>
+                <a:ea typeface="BIZ UDGothic" panose="020B0400000000000000" pitchFamily="49" charset="-128"/>
+              </a:rPr>
+              <a:t>テキストを入力</a:t>
+            </a:r>
+          </a:p>
+        </p:txBody>
+      </p:sp>
+    </p:spTree>
+    <p:extLst>
+      <p:ext uri="{BB962C8B-B14F-4D97-AF65-F5344CB8AC3E}">
+        <p14:creationId xmlns:p14="http://schemas.microsoft.com/office/powerpoint/2010/main" val="2193446220"/>
+      </p:ext>
+    </p:extLst>
+  </p:cSld>
+  <p:clrMapOvr>
+    <a:masterClrMapping/>
+  </p:clrMapOvr>
+</p:sld>
+</file>
+
+<file path=ppt/slides/slide11.xml><?xml version="1.0" encoding="utf-8"?>
+<p:sld xmlns:a="http://schemas.openxmlformats.org/drawingml/2006/main" xmlns:r="http://schemas.openxmlformats.org/officeDocument/2006/relationships" xmlns:p="http://schemas.openxmlformats.org/presentationml/2006/main" show="0">
+  <p:cSld>
+    <p:spTree>
+      <p:nvGrpSpPr>
+        <p:cNvPr id="1" name="">
+          <a:extLst>
+            <a:ext uri="{FF2B5EF4-FFF2-40B4-BE49-F238E27FC236}">
+              <a16:creationId xmlns:a16="http://schemas.microsoft.com/office/drawing/2014/main" id="{2AFEEF4A-DD8F-B0C8-FB1D-B440555689DA}"/>
+            </a:ext>
+          </a:extLst>
+        </p:cNvPr>
+        <p:cNvGrpSpPr/>
+        <p:nvPr/>
+      </p:nvGrpSpPr>
+      <p:grpSpPr>
+        <a:xfrm>
+          <a:off x="0" y="0"/>
+          <a:ext cx="0" cy="0"/>
+          <a:chOff x="0" y="0"/>
+          <a:chExt cx="0" cy="0"/>
+        </a:xfrm>
+      </p:grpSpPr>
+      <p:sp>
+        <p:nvSpPr>
+          <p:cNvPr id="2" name="タイトル 1">
+            <a:extLst>
+              <a:ext uri="{FF2B5EF4-FFF2-40B4-BE49-F238E27FC236}">
+                <a16:creationId xmlns:a16="http://schemas.microsoft.com/office/drawing/2014/main" id="{863499B7-FA7D-AB71-5287-FF1DEAA1C986}"/>
+              </a:ext>
+            </a:extLst>
+          </p:cNvPr>
+          <p:cNvSpPr>
+            <a:spLocks noGrp="1"/>
+          </p:cNvSpPr>
+          <p:nvPr>
+            <p:ph type="title"/>
+          </p:nvPr>
+        </p:nvSpPr>
+        <p:spPr/>
+        <p:txBody>
+          <a:bodyPr>
+            <a:normAutofit fontScale="90000"/>
+          </a:bodyPr>
+          <a:lstStyle/>
+          <a:p>
+            <a:r>
+              <a:rPr lang="en-US" altLang="ja-JP" dirty="0"/>
+              <a:t>4BOX</a:t>
+            </a:r>
+            <a:r>
+              <a:rPr lang="ja-JP" altLang="en-US" dirty="0"/>
+              <a:t>テンプレート</a:t>
+            </a:r>
+            <a:endParaRPr kumimoji="1" lang="ja-JP" altLang="en-US" dirty="0"/>
+          </a:p>
+        </p:txBody>
+      </p:sp>
+      <p:sp>
+        <p:nvSpPr>
+          <p:cNvPr id="3" name="コンテンツ プレースホルダー 2">
+            <a:extLst>
+              <a:ext uri="{FF2B5EF4-FFF2-40B4-BE49-F238E27FC236}">
+                <a16:creationId xmlns:a16="http://schemas.microsoft.com/office/drawing/2014/main" id="{9115D794-B8A9-54C6-92B4-D2AB88682DE1}"/>
+              </a:ext>
+            </a:extLst>
+          </p:cNvPr>
+          <p:cNvSpPr>
+            <a:spLocks noGrp="1"/>
+          </p:cNvSpPr>
+          <p:nvPr>
+            <p:ph sz="half" idx="1"/>
+          </p:nvPr>
+        </p:nvSpPr>
+        <p:spPr/>
+        <p:txBody>
+          <a:bodyPr/>
+          <a:lstStyle/>
+          <a:p>
+            <a:endParaRPr kumimoji="1" lang="ja-JP" altLang="en-US"/>
+          </a:p>
+        </p:txBody>
+      </p:sp>
+      <p:sp>
+        <p:nvSpPr>
+          <p:cNvPr id="4" name="コンテンツ プレースホルダー 3">
+            <a:extLst>
+              <a:ext uri="{FF2B5EF4-FFF2-40B4-BE49-F238E27FC236}">
+                <a16:creationId xmlns:a16="http://schemas.microsoft.com/office/drawing/2014/main" id="{DB0FC5C2-2EE1-1821-1F63-B5191606A4A4}"/>
+              </a:ext>
+            </a:extLst>
+          </p:cNvPr>
+          <p:cNvSpPr>
+            <a:spLocks noGrp="1"/>
+          </p:cNvSpPr>
+          <p:nvPr>
+            <p:ph sz="half" idx="2"/>
+          </p:nvPr>
+        </p:nvSpPr>
+        <p:spPr/>
+        <p:txBody>
+          <a:bodyPr/>
+          <a:lstStyle/>
+          <a:p>
+            <a:endParaRPr kumimoji="1" lang="ja-JP" altLang="en-US"/>
+          </a:p>
+        </p:txBody>
+      </p:sp>
+      <p:sp>
+        <p:nvSpPr>
+          <p:cNvPr id="5" name="スライド番号プレースホルダー 4">
+            <a:extLst>
+              <a:ext uri="{FF2B5EF4-FFF2-40B4-BE49-F238E27FC236}">
+                <a16:creationId xmlns:a16="http://schemas.microsoft.com/office/drawing/2014/main" id="{C5CBC8A6-12EC-63B3-3631-B66BE01EB642}"/>
+              </a:ext>
+            </a:extLst>
+          </p:cNvPr>
+          <p:cNvSpPr>
+            <a:spLocks noGrp="1"/>
+          </p:cNvSpPr>
+          <p:nvPr>
+            <p:ph type="sldNum" sz="quarter" idx="12"/>
+          </p:nvPr>
+        </p:nvSpPr>
+        <p:spPr/>
+        <p:txBody>
+          <a:bodyPr/>
+          <a:lstStyle/>
+          <a:p>
+            <a:fld id="{9C0FEE9A-3EB6-844C-8184-5D808DF01412}" type="slidenum">
+              <a:rPr kumimoji="1" lang="ja-JP" altLang="en-US" smtClean="0"/>
+              <a:t>11</a:t>
+            </a:fld>
+            <a:endParaRPr kumimoji="1" lang="ja-JP" altLang="en-US"/>
+          </a:p>
+        </p:txBody>
+      </p:sp>
+      <p:sp>
+        <p:nvSpPr>
+          <p:cNvPr id="6" name="四角形: 角を丸くする 5">
+            <a:extLst>
+              <a:ext uri="{FF2B5EF4-FFF2-40B4-BE49-F238E27FC236}">
+                <a16:creationId xmlns:a16="http://schemas.microsoft.com/office/drawing/2014/main" id="{9ABAA079-3331-27E6-4469-BE7F40462375}"/>
+              </a:ext>
+            </a:extLst>
+          </p:cNvPr>
+          <p:cNvSpPr/>
+          <p:nvPr/>
+        </p:nvSpPr>
+        <p:spPr>
+          <a:xfrm>
+            <a:off x="125969" y="813575"/>
+            <a:ext cx="5893831" cy="2700000"/>
+          </a:xfrm>
+          <a:prstGeom prst="roundRect">
+            <a:avLst>
+              <a:gd name="adj" fmla="val 5227"/>
+            </a:avLst>
+          </a:prstGeom>
+          <a:solidFill>
+            <a:schemeClr val="bg1"/>
+          </a:solidFill>
+          <a:ln>
+            <a:solidFill>
+              <a:schemeClr val="tx1"/>
+            </a:solidFill>
+          </a:ln>
+        </p:spPr>
+        <p:style>
+          <a:lnRef idx="2">
+            <a:schemeClr val="accent1">
+              <a:shade val="15000"/>
+            </a:schemeClr>
+          </a:lnRef>
+          <a:fillRef idx="1">
+            <a:schemeClr val="accent1"/>
+          </a:fillRef>
+          <a:effectRef idx="0">
+            <a:schemeClr val="accent1"/>
+          </a:effectRef>
+          <a:fontRef idx="minor">
+            <a:schemeClr val="lt1"/>
+          </a:fontRef>
+        </p:style>
+        <p:txBody>
+          <a:bodyPr lIns="90000" tIns="90000" rIns="90000" bIns="90000" rtlCol="0" anchor="t">
+            <a:noAutofit/>
+          </a:bodyPr>
+          <a:lstStyle/>
+          <a:p>
+            <a:pPr algn="ctr"/>
+            <a:r>
+              <a:rPr kumimoji="1" lang="ja-JP" altLang="en-US" sz="2800" dirty="0">
+                <a:solidFill>
+                  <a:schemeClr val="tx1"/>
+                </a:solidFill>
+                <a:latin typeface="BIZ UDGothic" panose="020B0400000000000000" pitchFamily="49" charset="-128"/>
+                <a:ea typeface="BIZ UDGothic" panose="020B0400000000000000" pitchFamily="49" charset="-128"/>
+              </a:rPr>
+              <a:t>ボックスタイトルを入力</a:t>
+            </a:r>
+            <a:endParaRPr kumimoji="1" lang="en-US" altLang="ja-JP" sz="2800" dirty="0">
+              <a:solidFill>
+                <a:schemeClr val="tx1"/>
+              </a:solidFill>
+              <a:latin typeface="BIZ UDGothic" panose="020B0400000000000000" pitchFamily="49" charset="-128"/>
+              <a:ea typeface="BIZ UDGothic" panose="020B0400000000000000" pitchFamily="49" charset="-128"/>
+            </a:endParaRPr>
+          </a:p>
+          <a:p>
+            <a:r>
+              <a:rPr kumimoji="1" lang="ja-JP" altLang="en-US" sz="2400" dirty="0">
+                <a:solidFill>
+                  <a:schemeClr val="tx1"/>
+                </a:solidFill>
+                <a:latin typeface="BIZ UDGothic" panose="020B0400000000000000" pitchFamily="49" charset="-128"/>
+                <a:ea typeface="BIZ UDGothic" panose="020B0400000000000000" pitchFamily="49" charset="-128"/>
+              </a:rPr>
+              <a:t>テキストを入力</a:t>
+            </a:r>
+          </a:p>
+        </p:txBody>
+      </p:sp>
+      <p:sp>
+        <p:nvSpPr>
+          <p:cNvPr id="9" name="四角形: 角を丸くする 8">
+            <a:extLst>
+              <a:ext uri="{FF2B5EF4-FFF2-40B4-BE49-F238E27FC236}">
+                <a16:creationId xmlns:a16="http://schemas.microsoft.com/office/drawing/2014/main" id="{A7424663-D671-533A-5183-FF1FBA679350}"/>
+              </a:ext>
+            </a:extLst>
+          </p:cNvPr>
+          <p:cNvSpPr/>
+          <p:nvPr/>
+        </p:nvSpPr>
+        <p:spPr>
+          <a:xfrm>
+            <a:off x="125968" y="3677333"/>
+            <a:ext cx="5893831" cy="2700000"/>
+          </a:xfrm>
+          <a:prstGeom prst="roundRect">
+            <a:avLst>
+              <a:gd name="adj" fmla="val 5227"/>
+            </a:avLst>
+          </a:prstGeom>
+          <a:solidFill>
+            <a:schemeClr val="bg1"/>
+          </a:solidFill>
+          <a:ln>
+            <a:solidFill>
+              <a:schemeClr val="tx1"/>
+            </a:solidFill>
+          </a:ln>
+        </p:spPr>
+        <p:style>
+          <a:lnRef idx="2">
+            <a:schemeClr val="accent1">
+              <a:shade val="15000"/>
+            </a:schemeClr>
+          </a:lnRef>
+          <a:fillRef idx="1">
+            <a:schemeClr val="accent1"/>
+          </a:fillRef>
+          <a:effectRef idx="0">
+            <a:schemeClr val="accent1"/>
+          </a:effectRef>
+          <a:fontRef idx="minor">
+            <a:schemeClr val="lt1"/>
+          </a:fontRef>
+        </p:style>
+        <p:txBody>
+          <a:bodyPr lIns="90000" tIns="90000" rIns="90000" bIns="90000" rtlCol="0" anchor="t">
+            <a:noAutofit/>
+          </a:bodyPr>
+          <a:lstStyle/>
+          <a:p>
+            <a:pPr algn="ctr"/>
+            <a:r>
+              <a:rPr kumimoji="1" lang="ja-JP" altLang="en-US" sz="2800" dirty="0">
+                <a:solidFill>
+                  <a:schemeClr val="tx1"/>
+                </a:solidFill>
+                <a:latin typeface="BIZ UDGothic" panose="020B0400000000000000" pitchFamily="49" charset="-128"/>
+                <a:ea typeface="BIZ UDGothic" panose="020B0400000000000000" pitchFamily="49" charset="-128"/>
+              </a:rPr>
+              <a:t>ボックスタイトルを入力</a:t>
+            </a:r>
+            <a:endParaRPr kumimoji="1" lang="en-US" altLang="ja-JP" sz="2800" dirty="0">
+              <a:solidFill>
+                <a:schemeClr val="tx1"/>
+              </a:solidFill>
+              <a:latin typeface="BIZ UDGothic" panose="020B0400000000000000" pitchFamily="49" charset="-128"/>
+              <a:ea typeface="BIZ UDGothic" panose="020B0400000000000000" pitchFamily="49" charset="-128"/>
+            </a:endParaRPr>
+          </a:p>
+          <a:p>
+            <a:r>
+              <a:rPr kumimoji="1" lang="ja-JP" altLang="en-US" sz="2400" dirty="0">
+                <a:solidFill>
+                  <a:schemeClr val="tx1"/>
+                </a:solidFill>
+                <a:latin typeface="BIZ UDGothic" panose="020B0400000000000000" pitchFamily="49" charset="-128"/>
+                <a:ea typeface="BIZ UDGothic" panose="020B0400000000000000" pitchFamily="49" charset="-128"/>
+              </a:rPr>
+              <a:t>テキストを入力</a:t>
+            </a:r>
+          </a:p>
+        </p:txBody>
+      </p:sp>
+      <p:sp>
+        <p:nvSpPr>
+          <p:cNvPr id="11" name="四角形: 角を丸くする 10">
+            <a:extLst>
+              <a:ext uri="{FF2B5EF4-FFF2-40B4-BE49-F238E27FC236}">
+                <a16:creationId xmlns:a16="http://schemas.microsoft.com/office/drawing/2014/main" id="{DFE860BC-CBA7-C814-A392-56E24E72C11D}"/>
+              </a:ext>
+            </a:extLst>
+          </p:cNvPr>
+          <p:cNvSpPr/>
+          <p:nvPr/>
+        </p:nvSpPr>
+        <p:spPr>
+          <a:xfrm>
+            <a:off x="6172199" y="813575"/>
+            <a:ext cx="5893831" cy="2700000"/>
+          </a:xfrm>
+          <a:prstGeom prst="roundRect">
+            <a:avLst>
+              <a:gd name="adj" fmla="val 5227"/>
+            </a:avLst>
+          </a:prstGeom>
+          <a:solidFill>
+            <a:schemeClr val="bg1"/>
+          </a:solidFill>
+          <a:ln>
+            <a:solidFill>
+              <a:schemeClr val="tx1"/>
+            </a:solidFill>
+          </a:ln>
+        </p:spPr>
+        <p:style>
+          <a:lnRef idx="2">
+            <a:schemeClr val="accent1">
+              <a:shade val="15000"/>
+            </a:schemeClr>
+          </a:lnRef>
+          <a:fillRef idx="1">
+            <a:schemeClr val="accent1"/>
+          </a:fillRef>
+          <a:effectRef idx="0">
+            <a:schemeClr val="accent1"/>
+          </a:effectRef>
+          <a:fontRef idx="minor">
+            <a:schemeClr val="lt1"/>
+          </a:fontRef>
+        </p:style>
+        <p:txBody>
+          <a:bodyPr lIns="90000" tIns="90000" rIns="90000" bIns="90000" rtlCol="0" anchor="t">
+            <a:noAutofit/>
+          </a:bodyPr>
+          <a:lstStyle/>
+          <a:p>
+            <a:pPr algn="ctr"/>
+            <a:r>
+              <a:rPr kumimoji="1" lang="ja-JP" altLang="en-US" sz="2800" dirty="0">
+                <a:solidFill>
+                  <a:schemeClr val="tx1"/>
+                </a:solidFill>
+                <a:latin typeface="BIZ UDGothic" panose="020B0400000000000000" pitchFamily="49" charset="-128"/>
+                <a:ea typeface="BIZ UDGothic" panose="020B0400000000000000" pitchFamily="49" charset="-128"/>
+              </a:rPr>
+              <a:t>ボックスタイトルを入力</a:t>
+            </a:r>
+            <a:endParaRPr kumimoji="1" lang="en-US" altLang="ja-JP" sz="2800" dirty="0">
+              <a:solidFill>
+                <a:schemeClr val="tx1"/>
+              </a:solidFill>
+              <a:latin typeface="BIZ UDGothic" panose="020B0400000000000000" pitchFamily="49" charset="-128"/>
+              <a:ea typeface="BIZ UDGothic" panose="020B0400000000000000" pitchFamily="49" charset="-128"/>
+            </a:endParaRPr>
+          </a:p>
+          <a:p>
+            <a:r>
+              <a:rPr kumimoji="1" lang="ja-JP" altLang="en-US" sz="2400" dirty="0">
+                <a:solidFill>
+                  <a:schemeClr val="tx1"/>
+                </a:solidFill>
+                <a:latin typeface="BIZ UDGothic" panose="020B0400000000000000" pitchFamily="49" charset="-128"/>
+                <a:ea typeface="BIZ UDGothic" panose="020B0400000000000000" pitchFamily="49" charset="-128"/>
+              </a:rPr>
+              <a:t>テキストを入力</a:t>
+            </a:r>
+          </a:p>
+        </p:txBody>
+      </p:sp>
+      <p:sp>
+        <p:nvSpPr>
+          <p:cNvPr id="13" name="四角形: 角を丸くする 12">
+            <a:extLst>
+              <a:ext uri="{FF2B5EF4-FFF2-40B4-BE49-F238E27FC236}">
+                <a16:creationId xmlns:a16="http://schemas.microsoft.com/office/drawing/2014/main" id="{B971B9B8-097A-16AD-6E1C-60243D2E189B}"/>
+              </a:ext>
+            </a:extLst>
+          </p:cNvPr>
+          <p:cNvSpPr/>
+          <p:nvPr/>
+        </p:nvSpPr>
+        <p:spPr>
+          <a:xfrm>
+            <a:off x="6172198" y="3677333"/>
+            <a:ext cx="5893831" cy="2700000"/>
+          </a:xfrm>
+          <a:prstGeom prst="roundRect">
+            <a:avLst>
+              <a:gd name="adj" fmla="val 5227"/>
+            </a:avLst>
+          </a:prstGeom>
+          <a:solidFill>
+            <a:schemeClr val="bg1"/>
+          </a:solidFill>
+          <a:ln>
+            <a:solidFill>
+              <a:schemeClr val="tx1"/>
+            </a:solidFill>
+          </a:ln>
+        </p:spPr>
+        <p:style>
+          <a:lnRef idx="2">
+            <a:schemeClr val="accent1">
+              <a:shade val="15000"/>
+            </a:schemeClr>
+          </a:lnRef>
+          <a:fillRef idx="1">
+            <a:schemeClr val="accent1"/>
+          </a:fillRef>
+          <a:effectRef idx="0">
+            <a:schemeClr val="accent1"/>
+          </a:effectRef>
+          <a:fontRef idx="minor">
+            <a:schemeClr val="lt1"/>
+          </a:fontRef>
+        </p:style>
+        <p:txBody>
+          <a:bodyPr lIns="90000" tIns="90000" rIns="90000" bIns="90000" rtlCol="0" anchor="t">
+            <a:noAutofit/>
+          </a:bodyPr>
+          <a:lstStyle/>
+          <a:p>
+            <a:pPr algn="ctr"/>
+            <a:r>
+              <a:rPr kumimoji="1" lang="ja-JP" altLang="en-US" sz="2800" dirty="0">
+                <a:solidFill>
+                  <a:schemeClr val="tx1"/>
+                </a:solidFill>
+                <a:latin typeface="BIZ UDGothic" panose="020B0400000000000000" pitchFamily="49" charset="-128"/>
+                <a:ea typeface="BIZ UDGothic" panose="020B0400000000000000" pitchFamily="49" charset="-128"/>
+              </a:rPr>
+              <a:t>ボックスタイトルを入力</a:t>
+            </a:r>
+            <a:endParaRPr kumimoji="1" lang="en-US" altLang="ja-JP" sz="2800" dirty="0">
+              <a:solidFill>
+                <a:schemeClr val="tx1"/>
+              </a:solidFill>
+              <a:latin typeface="BIZ UDGothic" panose="020B0400000000000000" pitchFamily="49" charset="-128"/>
+              <a:ea typeface="BIZ UDGothic" panose="020B0400000000000000" pitchFamily="49" charset="-128"/>
+            </a:endParaRPr>
+          </a:p>
+          <a:p>
+            <a:r>
+              <a:rPr kumimoji="1" lang="ja-JP" altLang="en-US" sz="2400" dirty="0">
+                <a:solidFill>
+                  <a:schemeClr val="tx1"/>
+                </a:solidFill>
+                <a:latin typeface="BIZ UDGothic" panose="020B0400000000000000" pitchFamily="49" charset="-128"/>
+                <a:ea typeface="BIZ UDGothic" panose="020B0400000000000000" pitchFamily="49" charset="-128"/>
+              </a:rPr>
+              <a:t>テキストを入力</a:t>
+            </a:r>
+          </a:p>
+        </p:txBody>
+      </p:sp>
+    </p:spTree>
+    <p:extLst>
+      <p:ext uri="{BB962C8B-B14F-4D97-AF65-F5344CB8AC3E}">
+        <p14:creationId xmlns:p14="http://schemas.microsoft.com/office/powerpoint/2010/main" val="1346295037"/>
+      </p:ext>
+    </p:extLst>
+  </p:cSld>
+  <p:clrMapOvr>
+    <a:masterClrMapping/>
+  </p:clrMapOvr>
+</p:sld>
+</file>
+
+<file path=ppt/slides/slide12.xml><?xml version="1.0" encoding="utf-8"?>
+<p:sld xmlns:a="http://schemas.openxmlformats.org/drawingml/2006/main" xmlns:r="http://schemas.openxmlformats.org/officeDocument/2006/relationships" xmlns:p="http://schemas.openxmlformats.org/presentationml/2006/main" show="0">
+  <p:cSld>
+    <p:spTree>
+      <p:nvGrpSpPr>
+        <p:cNvPr id="1" name="">
+          <a:extLst>
+            <a:ext uri="{FF2B5EF4-FFF2-40B4-BE49-F238E27FC236}">
+              <a16:creationId xmlns:a16="http://schemas.microsoft.com/office/drawing/2014/main" id="{81DF4193-3695-6CFB-5BE6-728675373F09}"/>
+            </a:ext>
+          </a:extLst>
+        </p:cNvPr>
+        <p:cNvGrpSpPr/>
+        <p:nvPr/>
+      </p:nvGrpSpPr>
+      <p:grpSpPr>
+        <a:xfrm>
+          <a:off x="0" y="0"/>
+          <a:ext cx="0" cy="0"/>
+          <a:chOff x="0" y="0"/>
+          <a:chExt cx="0" cy="0"/>
+        </a:xfrm>
+      </p:grpSpPr>
+      <p:sp>
+        <p:nvSpPr>
+          <p:cNvPr id="2" name="タイトル 1">
+            <a:extLst>
+              <a:ext uri="{FF2B5EF4-FFF2-40B4-BE49-F238E27FC236}">
+                <a16:creationId xmlns:a16="http://schemas.microsoft.com/office/drawing/2014/main" id="{2C15B84E-0377-F358-A003-C525816F40F5}"/>
+              </a:ext>
+            </a:extLst>
+          </p:cNvPr>
+          <p:cNvSpPr>
+            <a:spLocks noGrp="1"/>
+          </p:cNvSpPr>
+          <p:nvPr>
+            <p:ph type="title"/>
+          </p:nvPr>
+        </p:nvSpPr>
+        <p:spPr/>
+        <p:txBody>
+          <a:bodyPr>
+            <a:normAutofit fontScale="90000"/>
+          </a:bodyPr>
+          <a:lstStyle/>
+          <a:p>
+            <a:r>
+              <a:rPr lang="en-US" altLang="ja-JP" dirty="0"/>
+              <a:t>6BOX</a:t>
+            </a:r>
+            <a:r>
+              <a:rPr lang="ja-JP" altLang="en-US" dirty="0"/>
+              <a:t>テンプレート</a:t>
+            </a:r>
+            <a:endParaRPr kumimoji="1" lang="ja-JP" altLang="en-US" dirty="0"/>
+          </a:p>
+        </p:txBody>
+      </p:sp>
+      <p:sp>
+        <p:nvSpPr>
+          <p:cNvPr id="3" name="コンテンツ プレースホルダー 2">
+            <a:extLst>
+              <a:ext uri="{FF2B5EF4-FFF2-40B4-BE49-F238E27FC236}">
+                <a16:creationId xmlns:a16="http://schemas.microsoft.com/office/drawing/2014/main" id="{A7303C74-2FA5-E01C-FC7F-BB7ED1325EBC}"/>
+              </a:ext>
+            </a:extLst>
+          </p:cNvPr>
+          <p:cNvSpPr>
+            <a:spLocks noGrp="1"/>
+          </p:cNvSpPr>
+          <p:nvPr>
+            <p:ph idx="1"/>
+          </p:nvPr>
+        </p:nvSpPr>
+        <p:spPr/>
+        <p:txBody>
+          <a:bodyPr/>
+          <a:lstStyle/>
+          <a:p>
+            <a:endParaRPr kumimoji="1" lang="ja-JP" altLang="en-US" dirty="0"/>
+          </a:p>
+        </p:txBody>
+      </p:sp>
+      <p:sp>
+        <p:nvSpPr>
+          <p:cNvPr id="4" name="スライド番号プレースホルダー 3">
+            <a:extLst>
+              <a:ext uri="{FF2B5EF4-FFF2-40B4-BE49-F238E27FC236}">
+                <a16:creationId xmlns:a16="http://schemas.microsoft.com/office/drawing/2014/main" id="{17C4DA51-1FC0-7277-31C2-09CD0B787A5B}"/>
+              </a:ext>
+            </a:extLst>
+          </p:cNvPr>
+          <p:cNvSpPr>
+            <a:spLocks noGrp="1"/>
+          </p:cNvSpPr>
+          <p:nvPr>
+            <p:ph type="sldNum" sz="quarter" idx="12"/>
+          </p:nvPr>
+        </p:nvSpPr>
+        <p:spPr/>
+        <p:txBody>
+          <a:bodyPr/>
+          <a:lstStyle/>
+          <a:p>
+            <a:fld id="{9C0FEE9A-3EB6-844C-8184-5D808DF01412}" type="slidenum">
+              <a:rPr kumimoji="1" lang="ja-JP" altLang="en-US" smtClean="0"/>
+              <a:t>12</a:t>
+            </a:fld>
+            <a:endParaRPr kumimoji="1" lang="ja-JP" altLang="en-US"/>
+          </a:p>
+        </p:txBody>
+      </p:sp>
+      <p:sp>
+        <p:nvSpPr>
+          <p:cNvPr id="6" name="四角形: 角を丸くする 5">
+            <a:extLst>
+              <a:ext uri="{FF2B5EF4-FFF2-40B4-BE49-F238E27FC236}">
+                <a16:creationId xmlns:a16="http://schemas.microsoft.com/office/drawing/2014/main" id="{9BB15C4B-912C-C893-CAE3-64E1EEEC102C}"/>
+              </a:ext>
+            </a:extLst>
+          </p:cNvPr>
+          <p:cNvSpPr/>
+          <p:nvPr/>
+        </p:nvSpPr>
+        <p:spPr>
+          <a:xfrm>
+            <a:off x="125969" y="813575"/>
+            <a:ext cx="3780000" cy="2700000"/>
+          </a:xfrm>
+          <a:prstGeom prst="roundRect">
+            <a:avLst>
+              <a:gd name="adj" fmla="val 5227"/>
+            </a:avLst>
+          </a:prstGeom>
+          <a:solidFill>
+            <a:schemeClr val="bg1"/>
+          </a:solidFill>
+          <a:ln>
+            <a:solidFill>
+              <a:schemeClr val="tx1"/>
+            </a:solidFill>
+          </a:ln>
+        </p:spPr>
+        <p:style>
+          <a:lnRef idx="2">
+            <a:schemeClr val="accent1">
+              <a:shade val="15000"/>
+            </a:schemeClr>
+          </a:lnRef>
+          <a:fillRef idx="1">
+            <a:schemeClr val="accent1"/>
+          </a:fillRef>
+          <a:effectRef idx="0">
+            <a:schemeClr val="accent1"/>
+          </a:effectRef>
+          <a:fontRef idx="minor">
+            <a:schemeClr val="lt1"/>
+          </a:fontRef>
+        </p:style>
+        <p:txBody>
+          <a:bodyPr lIns="90000" tIns="90000" rIns="90000" bIns="90000" rtlCol="0" anchor="t">
+            <a:noAutofit/>
+          </a:bodyPr>
+          <a:lstStyle/>
+          <a:p>
+            <a:pPr algn="ctr"/>
+            <a:r>
+              <a:rPr kumimoji="1" lang="ja-JP" altLang="en-US" sz="2800" dirty="0">
+                <a:solidFill>
+                  <a:schemeClr val="tx1"/>
+                </a:solidFill>
+                <a:latin typeface="BIZ UDGothic" panose="020B0400000000000000" pitchFamily="49" charset="-128"/>
+                <a:ea typeface="BIZ UDGothic" panose="020B0400000000000000" pitchFamily="49" charset="-128"/>
+              </a:rPr>
+              <a:t>ボックスタイトル</a:t>
+            </a:r>
+            <a:endParaRPr kumimoji="1" lang="en-US" altLang="ja-JP" sz="2800" dirty="0">
+              <a:solidFill>
+                <a:schemeClr val="tx1"/>
+              </a:solidFill>
+              <a:latin typeface="BIZ UDGothic" panose="020B0400000000000000" pitchFamily="49" charset="-128"/>
+              <a:ea typeface="BIZ UDGothic" panose="020B0400000000000000" pitchFamily="49" charset="-128"/>
+            </a:endParaRPr>
+          </a:p>
+          <a:p>
+            <a:pPr algn="ctr"/>
+            <a:r>
+              <a:rPr kumimoji="1" lang="ja-JP" altLang="en-US" sz="2400" dirty="0">
+                <a:solidFill>
+                  <a:schemeClr val="tx1"/>
+                </a:solidFill>
+                <a:latin typeface="BIZ UDGothic" panose="020B0400000000000000" pitchFamily="49" charset="-128"/>
+                <a:ea typeface="BIZ UDGothic" panose="020B0400000000000000" pitchFamily="49" charset="-128"/>
+              </a:rPr>
+              <a:t>テキストを入力</a:t>
+            </a:r>
+          </a:p>
+        </p:txBody>
+      </p:sp>
+      <p:sp>
+        <p:nvSpPr>
+          <p:cNvPr id="10" name="四角形: 角を丸くする 9">
+            <a:extLst>
+              <a:ext uri="{FF2B5EF4-FFF2-40B4-BE49-F238E27FC236}">
+                <a16:creationId xmlns:a16="http://schemas.microsoft.com/office/drawing/2014/main" id="{B7297884-4431-51E5-313F-6EE8F1359F5D}"/>
+              </a:ext>
+            </a:extLst>
+          </p:cNvPr>
+          <p:cNvSpPr/>
+          <p:nvPr/>
+        </p:nvSpPr>
+        <p:spPr>
+          <a:xfrm>
+            <a:off x="4206000" y="813575"/>
+            <a:ext cx="3780000" cy="2700000"/>
+          </a:xfrm>
+          <a:prstGeom prst="roundRect">
+            <a:avLst>
+              <a:gd name="adj" fmla="val 5227"/>
+            </a:avLst>
+          </a:prstGeom>
+          <a:solidFill>
+            <a:schemeClr val="bg1"/>
+          </a:solidFill>
+          <a:ln>
+            <a:solidFill>
+              <a:schemeClr val="tx1"/>
+            </a:solidFill>
+          </a:ln>
+        </p:spPr>
+        <p:style>
+          <a:lnRef idx="2">
+            <a:schemeClr val="accent1">
+              <a:shade val="15000"/>
+            </a:schemeClr>
+          </a:lnRef>
+          <a:fillRef idx="1">
+            <a:schemeClr val="accent1"/>
+          </a:fillRef>
+          <a:effectRef idx="0">
+            <a:schemeClr val="accent1"/>
+          </a:effectRef>
+          <a:fontRef idx="minor">
+            <a:schemeClr val="lt1"/>
+          </a:fontRef>
+        </p:style>
+        <p:txBody>
+          <a:bodyPr lIns="90000" tIns="90000" rIns="90000" bIns="90000" rtlCol="0" anchor="t">
+            <a:noAutofit/>
+          </a:bodyPr>
+          <a:lstStyle/>
+          <a:p>
+            <a:pPr algn="ctr"/>
+            <a:r>
+              <a:rPr kumimoji="1" lang="ja-JP" altLang="en-US" sz="2800" dirty="0">
+                <a:solidFill>
+                  <a:schemeClr val="tx1"/>
+                </a:solidFill>
+                <a:latin typeface="BIZ UDGothic" panose="020B0400000000000000" pitchFamily="49" charset="-128"/>
+                <a:ea typeface="BIZ UDGothic" panose="020B0400000000000000" pitchFamily="49" charset="-128"/>
+              </a:rPr>
+              <a:t>ボックスタイトル</a:t>
+            </a:r>
+            <a:endParaRPr kumimoji="1" lang="en-US" altLang="ja-JP" sz="2800" dirty="0">
+              <a:solidFill>
+                <a:schemeClr val="tx1"/>
+              </a:solidFill>
+              <a:latin typeface="BIZ UDGothic" panose="020B0400000000000000" pitchFamily="49" charset="-128"/>
+              <a:ea typeface="BIZ UDGothic" panose="020B0400000000000000" pitchFamily="49" charset="-128"/>
+            </a:endParaRPr>
+          </a:p>
+          <a:p>
+            <a:pPr algn="ctr"/>
+            <a:r>
+              <a:rPr kumimoji="1" lang="ja-JP" altLang="en-US" sz="2400" dirty="0">
+                <a:solidFill>
+                  <a:schemeClr val="tx1"/>
+                </a:solidFill>
+                <a:latin typeface="BIZ UDGothic" panose="020B0400000000000000" pitchFamily="49" charset="-128"/>
+                <a:ea typeface="BIZ UDGothic" panose="020B0400000000000000" pitchFamily="49" charset="-128"/>
+              </a:rPr>
+              <a:t>テキストを入力</a:t>
+            </a:r>
+          </a:p>
+        </p:txBody>
+      </p:sp>
+      <p:sp>
+        <p:nvSpPr>
+          <p:cNvPr id="12" name="四角形: 角を丸くする 11">
+            <a:extLst>
+              <a:ext uri="{FF2B5EF4-FFF2-40B4-BE49-F238E27FC236}">
+                <a16:creationId xmlns:a16="http://schemas.microsoft.com/office/drawing/2014/main" id="{B00FA8BA-1219-27EE-10DB-ED85978A72E4}"/>
+              </a:ext>
+            </a:extLst>
+          </p:cNvPr>
+          <p:cNvSpPr/>
+          <p:nvPr/>
+        </p:nvSpPr>
+        <p:spPr>
+          <a:xfrm>
+            <a:off x="8286031" y="813575"/>
+            <a:ext cx="3780000" cy="2700000"/>
+          </a:xfrm>
+          <a:prstGeom prst="roundRect">
+            <a:avLst>
+              <a:gd name="adj" fmla="val 5227"/>
+            </a:avLst>
+          </a:prstGeom>
+          <a:solidFill>
+            <a:schemeClr val="bg1"/>
+          </a:solidFill>
+          <a:ln>
+            <a:solidFill>
+              <a:schemeClr val="tx1"/>
+            </a:solidFill>
+          </a:ln>
+        </p:spPr>
+        <p:style>
+          <a:lnRef idx="2">
+            <a:schemeClr val="accent1">
+              <a:shade val="15000"/>
+            </a:schemeClr>
+          </a:lnRef>
+          <a:fillRef idx="1">
+            <a:schemeClr val="accent1"/>
+          </a:fillRef>
+          <a:effectRef idx="0">
+            <a:schemeClr val="accent1"/>
+          </a:effectRef>
+          <a:fontRef idx="minor">
+            <a:schemeClr val="lt1"/>
+          </a:fontRef>
+        </p:style>
+        <p:txBody>
+          <a:bodyPr lIns="90000" tIns="90000" rIns="90000" bIns="90000" rtlCol="0" anchor="t">
+            <a:noAutofit/>
+          </a:bodyPr>
+          <a:lstStyle/>
+          <a:p>
+            <a:pPr algn="ctr"/>
+            <a:r>
+              <a:rPr kumimoji="1" lang="ja-JP" altLang="en-US" sz="2800" dirty="0">
+                <a:solidFill>
+                  <a:schemeClr val="tx1"/>
+                </a:solidFill>
+                <a:latin typeface="BIZ UDGothic" panose="020B0400000000000000" pitchFamily="49" charset="-128"/>
+                <a:ea typeface="BIZ UDGothic" panose="020B0400000000000000" pitchFamily="49" charset="-128"/>
+              </a:rPr>
+              <a:t>ボックスタイトル</a:t>
+            </a:r>
+            <a:endParaRPr kumimoji="1" lang="en-US" altLang="ja-JP" sz="2800" dirty="0">
+              <a:solidFill>
+                <a:schemeClr val="tx1"/>
+              </a:solidFill>
+              <a:latin typeface="BIZ UDGothic" panose="020B0400000000000000" pitchFamily="49" charset="-128"/>
+              <a:ea typeface="BIZ UDGothic" panose="020B0400000000000000" pitchFamily="49" charset="-128"/>
+            </a:endParaRPr>
+          </a:p>
+          <a:p>
+            <a:pPr algn="ctr"/>
+            <a:r>
+              <a:rPr kumimoji="1" lang="ja-JP" altLang="en-US" sz="2400" dirty="0">
+                <a:solidFill>
+                  <a:schemeClr val="tx1"/>
+                </a:solidFill>
+                <a:latin typeface="BIZ UDGothic" panose="020B0400000000000000" pitchFamily="49" charset="-128"/>
+                <a:ea typeface="BIZ UDGothic" panose="020B0400000000000000" pitchFamily="49" charset="-128"/>
+              </a:rPr>
+              <a:t>テキストを入力</a:t>
+            </a:r>
+          </a:p>
+        </p:txBody>
+      </p:sp>
+      <p:sp>
+        <p:nvSpPr>
+          <p:cNvPr id="7" name="四角形: 角を丸くする 6">
+            <a:extLst>
+              <a:ext uri="{FF2B5EF4-FFF2-40B4-BE49-F238E27FC236}">
+                <a16:creationId xmlns:a16="http://schemas.microsoft.com/office/drawing/2014/main" id="{0EC34A7F-F7CD-5380-12BB-772514657E8D}"/>
+              </a:ext>
+            </a:extLst>
+          </p:cNvPr>
+          <p:cNvSpPr/>
+          <p:nvPr/>
+        </p:nvSpPr>
+        <p:spPr>
+          <a:xfrm>
+            <a:off x="125969" y="3677336"/>
+            <a:ext cx="3780000" cy="2700000"/>
+          </a:xfrm>
+          <a:prstGeom prst="roundRect">
+            <a:avLst>
+              <a:gd name="adj" fmla="val 5227"/>
+            </a:avLst>
+          </a:prstGeom>
+          <a:solidFill>
+            <a:schemeClr val="bg1"/>
+          </a:solidFill>
+          <a:ln>
+            <a:solidFill>
+              <a:schemeClr val="tx1"/>
+            </a:solidFill>
+          </a:ln>
+        </p:spPr>
+        <p:style>
+          <a:lnRef idx="2">
+            <a:schemeClr val="accent1">
+              <a:shade val="15000"/>
+            </a:schemeClr>
+          </a:lnRef>
+          <a:fillRef idx="1">
+            <a:schemeClr val="accent1"/>
+          </a:fillRef>
+          <a:effectRef idx="0">
+            <a:schemeClr val="accent1"/>
+          </a:effectRef>
+          <a:fontRef idx="minor">
+            <a:schemeClr val="lt1"/>
+          </a:fontRef>
+        </p:style>
+        <p:txBody>
+          <a:bodyPr lIns="90000" tIns="90000" rIns="90000" bIns="90000" rtlCol="0" anchor="t">
+            <a:noAutofit/>
+          </a:bodyPr>
+          <a:lstStyle/>
+          <a:p>
+            <a:pPr algn="ctr"/>
+            <a:r>
+              <a:rPr kumimoji="1" lang="ja-JP" altLang="en-US" sz="2800" dirty="0">
+                <a:solidFill>
+                  <a:schemeClr val="tx1"/>
+                </a:solidFill>
+                <a:latin typeface="BIZ UDGothic" panose="020B0400000000000000" pitchFamily="49" charset="-128"/>
+                <a:ea typeface="BIZ UDGothic" panose="020B0400000000000000" pitchFamily="49" charset="-128"/>
+              </a:rPr>
+              <a:t>ボックスタイトル</a:t>
+            </a:r>
+            <a:endParaRPr kumimoji="1" lang="en-US" altLang="ja-JP" sz="2800" dirty="0">
+              <a:solidFill>
+                <a:schemeClr val="tx1"/>
+              </a:solidFill>
+              <a:latin typeface="BIZ UDGothic" panose="020B0400000000000000" pitchFamily="49" charset="-128"/>
+              <a:ea typeface="BIZ UDGothic" panose="020B0400000000000000" pitchFamily="49" charset="-128"/>
+            </a:endParaRPr>
+          </a:p>
+          <a:p>
+            <a:pPr algn="ctr"/>
+            <a:r>
+              <a:rPr kumimoji="1" lang="ja-JP" altLang="en-US" sz="2400" dirty="0">
+                <a:solidFill>
+                  <a:schemeClr val="tx1"/>
+                </a:solidFill>
+                <a:latin typeface="BIZ UDGothic" panose="020B0400000000000000" pitchFamily="49" charset="-128"/>
+                <a:ea typeface="BIZ UDGothic" panose="020B0400000000000000" pitchFamily="49" charset="-128"/>
+              </a:rPr>
+              <a:t>テキストを入力</a:t>
+            </a:r>
+          </a:p>
+        </p:txBody>
+      </p:sp>
+      <p:sp>
+        <p:nvSpPr>
+          <p:cNvPr id="9" name="四角形: 角を丸くする 8">
+            <a:extLst>
+              <a:ext uri="{FF2B5EF4-FFF2-40B4-BE49-F238E27FC236}">
+                <a16:creationId xmlns:a16="http://schemas.microsoft.com/office/drawing/2014/main" id="{C9B1B259-8DCF-B3E9-F8C5-CDB31F0B9B47}"/>
+              </a:ext>
+            </a:extLst>
+          </p:cNvPr>
+          <p:cNvSpPr/>
+          <p:nvPr/>
+        </p:nvSpPr>
+        <p:spPr>
+          <a:xfrm>
+            <a:off x="4206000" y="3677336"/>
+            <a:ext cx="3780000" cy="2700000"/>
+          </a:xfrm>
+          <a:prstGeom prst="roundRect">
+            <a:avLst>
+              <a:gd name="adj" fmla="val 5227"/>
+            </a:avLst>
+          </a:prstGeom>
+          <a:solidFill>
+            <a:schemeClr val="bg1"/>
+          </a:solidFill>
+          <a:ln>
+            <a:solidFill>
+              <a:schemeClr val="tx1"/>
+            </a:solidFill>
+          </a:ln>
+        </p:spPr>
+        <p:style>
+          <a:lnRef idx="2">
+            <a:schemeClr val="accent1">
+              <a:shade val="15000"/>
+            </a:schemeClr>
+          </a:lnRef>
+          <a:fillRef idx="1">
+            <a:schemeClr val="accent1"/>
+          </a:fillRef>
+          <a:effectRef idx="0">
+            <a:schemeClr val="accent1"/>
+          </a:effectRef>
+          <a:fontRef idx="minor">
+            <a:schemeClr val="lt1"/>
+          </a:fontRef>
+        </p:style>
+        <p:txBody>
+          <a:bodyPr lIns="90000" tIns="90000" rIns="90000" bIns="90000" rtlCol="0" anchor="t">
+            <a:noAutofit/>
+          </a:bodyPr>
+          <a:lstStyle/>
+          <a:p>
+            <a:pPr algn="ctr"/>
+            <a:r>
+              <a:rPr kumimoji="1" lang="ja-JP" altLang="en-US" sz="2800" dirty="0">
+                <a:solidFill>
+                  <a:schemeClr val="tx1"/>
+                </a:solidFill>
+                <a:latin typeface="BIZ UDGothic" panose="020B0400000000000000" pitchFamily="49" charset="-128"/>
+                <a:ea typeface="BIZ UDGothic" panose="020B0400000000000000" pitchFamily="49" charset="-128"/>
+              </a:rPr>
+              <a:t>ボックスタイトル</a:t>
+            </a:r>
+            <a:endParaRPr kumimoji="1" lang="en-US" altLang="ja-JP" sz="2800" dirty="0">
+              <a:solidFill>
+                <a:schemeClr val="tx1"/>
+              </a:solidFill>
+              <a:latin typeface="BIZ UDGothic" panose="020B0400000000000000" pitchFamily="49" charset="-128"/>
+              <a:ea typeface="BIZ UDGothic" panose="020B0400000000000000" pitchFamily="49" charset="-128"/>
+            </a:endParaRPr>
+          </a:p>
+          <a:p>
+            <a:pPr algn="ctr"/>
+            <a:r>
+              <a:rPr kumimoji="1" lang="ja-JP" altLang="en-US" sz="2400" dirty="0">
+                <a:solidFill>
+                  <a:schemeClr val="tx1"/>
+                </a:solidFill>
+                <a:latin typeface="BIZ UDGothic" panose="020B0400000000000000" pitchFamily="49" charset="-128"/>
+                <a:ea typeface="BIZ UDGothic" panose="020B0400000000000000" pitchFamily="49" charset="-128"/>
+              </a:rPr>
+              <a:t>テキストを入力</a:t>
+            </a:r>
+          </a:p>
+        </p:txBody>
+      </p:sp>
+      <p:sp>
+        <p:nvSpPr>
+          <p:cNvPr id="13" name="四角形: 角を丸くする 12">
+            <a:extLst>
+              <a:ext uri="{FF2B5EF4-FFF2-40B4-BE49-F238E27FC236}">
+                <a16:creationId xmlns:a16="http://schemas.microsoft.com/office/drawing/2014/main" id="{C7E1CECE-DC38-533A-A09D-689BDE8CEE44}"/>
+              </a:ext>
+            </a:extLst>
+          </p:cNvPr>
+          <p:cNvSpPr/>
+          <p:nvPr/>
+        </p:nvSpPr>
+        <p:spPr>
+          <a:xfrm>
+            <a:off x="8286031" y="3677336"/>
+            <a:ext cx="3780000" cy="2700000"/>
+          </a:xfrm>
+          <a:prstGeom prst="roundRect">
+            <a:avLst>
+              <a:gd name="adj" fmla="val 5227"/>
+            </a:avLst>
+          </a:prstGeom>
+          <a:solidFill>
+            <a:schemeClr val="bg1"/>
+          </a:solidFill>
+          <a:ln>
+            <a:solidFill>
+              <a:schemeClr val="tx1"/>
+            </a:solidFill>
+          </a:ln>
+        </p:spPr>
+        <p:style>
+          <a:lnRef idx="2">
+            <a:schemeClr val="accent1">
+              <a:shade val="15000"/>
+            </a:schemeClr>
+          </a:lnRef>
+          <a:fillRef idx="1">
+            <a:schemeClr val="accent1"/>
+          </a:fillRef>
+          <a:effectRef idx="0">
+            <a:schemeClr val="accent1"/>
+          </a:effectRef>
+          <a:fontRef idx="minor">
+            <a:schemeClr val="lt1"/>
+          </a:fontRef>
+        </p:style>
+        <p:txBody>
+          <a:bodyPr lIns="90000" tIns="90000" rIns="90000" bIns="90000" rtlCol="0" anchor="t">
+            <a:noAutofit/>
+          </a:bodyPr>
+          <a:lstStyle/>
+          <a:p>
+            <a:pPr algn="ctr"/>
+            <a:r>
+              <a:rPr kumimoji="1" lang="ja-JP" altLang="en-US" sz="2800" dirty="0">
+                <a:solidFill>
+                  <a:schemeClr val="tx1"/>
+                </a:solidFill>
+                <a:latin typeface="BIZ UDGothic" panose="020B0400000000000000" pitchFamily="49" charset="-128"/>
+                <a:ea typeface="BIZ UDGothic" panose="020B0400000000000000" pitchFamily="49" charset="-128"/>
+              </a:rPr>
+              <a:t>ボックスタイトル</a:t>
+            </a:r>
+            <a:endParaRPr kumimoji="1" lang="en-US" altLang="ja-JP" sz="2800" dirty="0">
+              <a:solidFill>
+                <a:schemeClr val="tx1"/>
+              </a:solidFill>
+              <a:latin typeface="BIZ UDGothic" panose="020B0400000000000000" pitchFamily="49" charset="-128"/>
+              <a:ea typeface="BIZ UDGothic" panose="020B0400000000000000" pitchFamily="49" charset="-128"/>
+            </a:endParaRPr>
+          </a:p>
+          <a:p>
+            <a:pPr algn="ctr"/>
+            <a:r>
+              <a:rPr kumimoji="1" lang="ja-JP" altLang="en-US" sz="2400" dirty="0">
+                <a:solidFill>
+                  <a:schemeClr val="tx1"/>
+                </a:solidFill>
+                <a:latin typeface="BIZ UDGothic" panose="020B0400000000000000" pitchFamily="49" charset="-128"/>
+                <a:ea typeface="BIZ UDGothic" panose="020B0400000000000000" pitchFamily="49" charset="-128"/>
+              </a:rPr>
+              <a:t>テキストを入力</a:t>
+            </a:r>
+          </a:p>
+        </p:txBody>
+      </p:sp>
+    </p:spTree>
+    <p:extLst>
+      <p:ext uri="{BB962C8B-B14F-4D97-AF65-F5344CB8AC3E}">
+        <p14:creationId xmlns:p14="http://schemas.microsoft.com/office/powerpoint/2010/main" val="1433280250"/>
+      </p:ext>
+    </p:extLst>
+  </p:cSld>
+  <p:clrMapOvr>
+    <a:masterClrMapping/>
+  </p:clrMapOvr>
+</p:sld>
+</file>
+
 <file path=ppt/slides/slide2.xml><?xml version="1.0" encoding="utf-8"?>
-<p:sld xmlns:a="http://schemas.openxmlformats.org/drawingml/2006/main" xmlns:r="http://schemas.openxmlformats.org/officeDocument/2006/relationships" xmlns:p="http://schemas.openxmlformats.org/presentationml/2006/main">
+<p:sld xmlns:a="http://schemas.openxmlformats.org/drawingml/2006/main" xmlns:r="http://schemas.openxmlformats.org/officeDocument/2006/relationships" xmlns:p="http://schemas.openxmlformats.org/presentationml/2006/main" show="0">
   <p:cSld>
     <p:spTree>
       <p:nvGrpSpPr>
@@ -2830,7 +4413,7 @@
 </file>
 
 <file path=ppt/slides/slide3.xml><?xml version="1.0" encoding="utf-8"?>
-<p:sld xmlns:a="http://schemas.openxmlformats.org/drawingml/2006/main" xmlns:r="http://schemas.openxmlformats.org/officeDocument/2006/relationships" xmlns:p="http://schemas.openxmlformats.org/presentationml/2006/main">
+<p:sld xmlns:a="http://schemas.openxmlformats.org/drawingml/2006/main" xmlns:r="http://schemas.openxmlformats.org/officeDocument/2006/relationships" xmlns:p="http://schemas.openxmlformats.org/presentationml/2006/main" show="0">
   <p:cSld>
     <p:spTree>
       <p:nvGrpSpPr>
@@ -2979,7 +4562,7 @@
                 <a:pPr marL="0" indent="0">
                   <a:buNone/>
                 </a:pPr>
-                <a:endParaRPr kumimoji="1" lang="en-US" altLang="ja-JP" dirty="0"/>
+                <a:endParaRPr kumimoji="1" lang="en-US" altLang="ja-JP" sz="1400" dirty="0"/>
               </a:p>
               <a:p>
                 <a:pPr marL="0" indent="0">
@@ -3057,7 +4640,7 @@
                 <a:pPr marL="0" indent="0">
                   <a:buNone/>
                 </a:pPr>
-                <a:endParaRPr lang="en-US" altLang="ja-JP" dirty="0"/>
+                <a:endParaRPr lang="en-US" altLang="ja-JP" sz="1400" dirty="0"/>
               </a:p>
               <a:p>
                 <a:pPr marL="0" indent="0">
@@ -3164,13 +4747,13 @@
               <p:nvPr>
                 <p:extLst>
                   <p:ext uri="{D42A27DB-BD31-4B8C-83A1-F6EECF244321}">
-                    <p14:modId xmlns:p14="http://schemas.microsoft.com/office/powerpoint/2010/main" val="1634221325"/>
+                    <p14:modId xmlns:p14="http://schemas.microsoft.com/office/powerpoint/2010/main" val="3054586632"/>
                   </p:ext>
                 </p:extLst>
               </p:nvPr>
             </p:nvGraphicFramePr>
             <p:xfrm>
-              <a:off x="125969" y="4535989"/>
+              <a:off x="125971" y="4186366"/>
               <a:ext cx="11940060" cy="2006854"/>
             </p:xfrm>
             <a:graphic>
@@ -4197,13 +5780,13 @@
               <p:nvPr>
                 <p:extLst>
                   <p:ext uri="{D42A27DB-BD31-4B8C-83A1-F6EECF244321}">
-                    <p14:modId xmlns:p14="http://schemas.microsoft.com/office/powerpoint/2010/main" val="1634221325"/>
+                    <p14:modId xmlns:p14="http://schemas.microsoft.com/office/powerpoint/2010/main" val="3054586632"/>
                   </p:ext>
                 </p:extLst>
               </p:nvPr>
             </p:nvGraphicFramePr>
             <p:xfrm>
-              <a:off x="125969" y="4535989"/>
+              <a:off x="125971" y="4186366"/>
               <a:ext cx="11940060" cy="2006854"/>
             </p:xfrm>
             <a:graphic>
@@ -4306,7 +5889,7 @@
                         <a:blipFill>
                           <a:blip r:embed="rId3"/>
                           <a:stretch>
-                            <a:fillRect l="-153" t="-35000" r="-200766" b="-41000"/>
+                            <a:fillRect l="-153" t="-35000" r="-200766" b="-41500"/>
                           </a:stretch>
                         </a:blipFill>
                       </a:tcPr>
@@ -4323,7 +5906,7 @@
                         <a:blipFill>
                           <a:blip r:embed="rId3"/>
                           <a:stretch>
-                            <a:fillRect l="-100000" t="-35000" r="-100459" b="-41000"/>
+                            <a:fillRect l="-100000" t="-35000" r="-100459" b="-41500"/>
                           </a:stretch>
                         </a:blipFill>
                       </a:tcPr>
@@ -4340,7 +5923,7 @@
                         <a:blipFill>
                           <a:blip r:embed="rId3"/>
                           <a:stretch>
-                            <a:fillRect l="-200306" t="-35000" r="-613" b="-41000"/>
+                            <a:fillRect l="-200306" t="-35000" r="-613" b="-41500"/>
                           </a:stretch>
                         </a:blipFill>
                       </a:tcPr>
@@ -4472,7 +6055,7 @@
 </file>
 
 <file path=ppt/slides/slide4.xml><?xml version="1.0" encoding="utf-8"?>
-<p:sld xmlns:a="http://schemas.openxmlformats.org/drawingml/2006/main" xmlns:r="http://schemas.openxmlformats.org/officeDocument/2006/relationships" xmlns:p="http://schemas.openxmlformats.org/presentationml/2006/main">
+<p:sld xmlns:a="http://schemas.openxmlformats.org/drawingml/2006/main" xmlns:r="http://schemas.openxmlformats.org/officeDocument/2006/relationships" xmlns:p="http://schemas.openxmlformats.org/presentationml/2006/main" show="0">
   <p:cSld>
     <p:spTree>
       <p:nvGrpSpPr>
@@ -4599,10 +6182,10 @@
         <mc:Choice xmlns:a14="http://schemas.microsoft.com/office/drawing/2010/main" Requires="a14">
           <p:graphicFrame>
             <p:nvGraphicFramePr>
-              <p:cNvPr id="5" name="表 4">
+              <p:cNvPr id="7" name="表 6">
                 <a:extLst>
                   <a:ext uri="{FF2B5EF4-FFF2-40B4-BE49-F238E27FC236}">
-                    <a16:creationId xmlns:a16="http://schemas.microsoft.com/office/drawing/2014/main" id="{1606E017-E85D-EE34-924F-9959E06D1C5A}"/>
+                    <a16:creationId xmlns:a16="http://schemas.microsoft.com/office/drawing/2014/main" id="{AC6913EF-0201-08CD-3C41-012E99968ECE}"/>
                   </a:ext>
                 </a:extLst>
               </p:cNvPr>
@@ -4612,14 +6195,14 @@
               <p:nvPr>
                 <p:extLst>
                   <p:ext uri="{D42A27DB-BD31-4B8C-83A1-F6EECF244321}">
-                    <p14:modId xmlns:p14="http://schemas.microsoft.com/office/powerpoint/2010/main" val="162040509"/>
+                    <p14:modId xmlns:p14="http://schemas.microsoft.com/office/powerpoint/2010/main" val="2074774719"/>
                   </p:ext>
                 </p:extLst>
               </p:nvPr>
             </p:nvGraphicFramePr>
             <p:xfrm>
-              <a:off x="125969" y="2317559"/>
-              <a:ext cx="5970031" cy="2222881"/>
+              <a:off x="125969" y="1914147"/>
+              <a:ext cx="5893831" cy="2222881"/>
             </p:xfrm>
             <a:graphic>
               <a:graphicData uri="http://schemas.openxmlformats.org/drawingml/2006/table">
@@ -4628,7 +6211,7 @@
                     <a:tableStyleId>{2D5ABB26-0587-4C30-8999-92F81FD0307C}</a:tableStyleId>
                   </a:tblPr>
                   <a:tblGrid>
-                    <a:gridCol w="5970031">
+                    <a:gridCol w="5893831">
                       <a:extLst>
                         <a:ext uri="{9D8B030D-6E8A-4147-A177-3AD203B41FA5}">
                           <a16:colId xmlns:a16="http://schemas.microsoft.com/office/drawing/2014/main" val="1752847787"/>
@@ -4671,6 +6254,9 @@
                           <a:headEnd type="none" w="med" len="med"/>
                           <a:tailEnd type="none" w="med" len="med"/>
                         </a:lnB>
+                        <a:solidFill>
+                          <a:schemeClr val="bg1"/>
+                        </a:solidFill>
                       </a:tcPr>
                     </a:tc>
                     <a:extLst>
@@ -4765,6 +6351,9 @@
                           <a:headEnd type="none" w="med" len="med"/>
                           <a:tailEnd type="none" w="med" len="med"/>
                         </a:lnB>
+                        <a:solidFill>
+                          <a:schemeClr val="bg1"/>
+                        </a:solidFill>
                       </a:tcPr>
                     </a:tc>
                     <a:extLst>
@@ -5052,6 +6641,9 @@
                           <a:headEnd type="none" w="med" len="med"/>
                           <a:tailEnd type="none" w="med" len="med"/>
                         </a:lnB>
+                        <a:solidFill>
+                          <a:schemeClr val="bg1"/>
+                        </a:solidFill>
                       </a:tcPr>
                     </a:tc>
                     <a:extLst>
@@ -5121,6 +6713,9 @@
                           <a:headEnd type="none" w="med" len="med"/>
                           <a:tailEnd type="none" w="med" len="med"/>
                         </a:lnB>
+                        <a:solidFill>
+                          <a:schemeClr val="bg1"/>
+                        </a:solidFill>
                       </a:tcPr>
                     </a:tc>
                     <a:extLst>
@@ -5137,10 +6732,10 @@
         <mc:Fallback>
           <p:graphicFrame>
             <p:nvGraphicFramePr>
-              <p:cNvPr id="5" name="表 4">
+              <p:cNvPr id="7" name="表 6">
                 <a:extLst>
                   <a:ext uri="{FF2B5EF4-FFF2-40B4-BE49-F238E27FC236}">
-                    <a16:creationId xmlns:a16="http://schemas.microsoft.com/office/drawing/2014/main" id="{1606E017-E85D-EE34-924F-9959E06D1C5A}"/>
+                    <a16:creationId xmlns:a16="http://schemas.microsoft.com/office/drawing/2014/main" id="{AC6913EF-0201-08CD-3C41-012E99968ECE}"/>
                   </a:ext>
                 </a:extLst>
               </p:cNvPr>
@@ -5150,14 +6745,14 @@
               <p:nvPr>
                 <p:extLst>
                   <p:ext uri="{D42A27DB-BD31-4B8C-83A1-F6EECF244321}">
-                    <p14:modId xmlns:p14="http://schemas.microsoft.com/office/powerpoint/2010/main" val="162040509"/>
+                    <p14:modId xmlns:p14="http://schemas.microsoft.com/office/powerpoint/2010/main" val="2074774719"/>
                   </p:ext>
                 </p:extLst>
               </p:nvPr>
             </p:nvGraphicFramePr>
             <p:xfrm>
-              <a:off x="125969" y="2317559"/>
-              <a:ext cx="5970031" cy="2222881"/>
+              <a:off x="125969" y="1914147"/>
+              <a:ext cx="5893831" cy="2222881"/>
             </p:xfrm>
             <a:graphic>
               <a:graphicData uri="http://schemas.openxmlformats.org/drawingml/2006/table">
@@ -5166,7 +6761,7 @@
                     <a:tableStyleId>{2D5ABB26-0587-4C30-8999-92F81FD0307C}</a:tableStyleId>
                   </a:tblPr>
                   <a:tblGrid>
-                    <a:gridCol w="5970031">
+                    <a:gridCol w="5893831">
                       <a:extLst>
                         <a:ext uri="{9D8B030D-6E8A-4147-A177-3AD203B41FA5}">
                           <a16:colId xmlns:a16="http://schemas.microsoft.com/office/drawing/2014/main" val="1752847787"/>
@@ -5209,6 +6804,9 @@
                           <a:headEnd type="none" w="med" len="med"/>
                           <a:tailEnd type="none" w="med" len="med"/>
                         </a:lnB>
+                        <a:solidFill>
+                          <a:schemeClr val="bg1"/>
+                        </a:solidFill>
                       </a:tcPr>
                     </a:tc>
                     <a:extLst>
@@ -5248,7 +6846,7 @@
                         <a:blipFill>
                           <a:blip r:embed="rId2"/>
                           <a:stretch>
-                            <a:fillRect t="-107692" r="-204" b="-384615"/>
+                            <a:fillRect t="-107692" r="-103" b="-384615"/>
                           </a:stretch>
                         </a:blipFill>
                       </a:tcPr>
@@ -5290,7 +6888,7 @@
                         <a:blipFill>
                           <a:blip r:embed="rId2"/>
                           <a:stretch>
-                            <a:fillRect t="-79412" r="-204" b="-47059"/>
+                            <a:fillRect t="-79412" r="-103" b="-47059"/>
                           </a:stretch>
                         </a:blipFill>
                       </a:tcPr>
@@ -5332,7 +6930,776 @@
                         <a:blipFill>
                           <a:blip r:embed="rId2"/>
                           <a:stretch>
-                            <a:fillRect t="-469231" r="-204" b="-23077"/>
+                            <a:fillRect t="-469231" r="-103" b="-23077"/>
+                          </a:stretch>
+                        </a:blipFill>
+                      </a:tcPr>
+                    </a:tc>
+                    <a:extLst>
+                      <a:ext uri="{0D108BD9-81ED-4DB2-BD59-A6C34878D82A}">
+                        <a16:rowId xmlns:a16="http://schemas.microsoft.com/office/drawing/2014/main" val="3831119886"/>
+                      </a:ext>
+                    </a:extLst>
+                  </a:tr>
+                </a:tbl>
+              </a:graphicData>
+            </a:graphic>
+          </p:graphicFrame>
+        </mc:Fallback>
+      </mc:AlternateContent>
+      <mc:AlternateContent xmlns:mc="http://schemas.openxmlformats.org/markup-compatibility/2006">
+        <mc:Choice xmlns:a14="http://schemas.microsoft.com/office/drawing/2010/main" Requires="a14">
+          <p:graphicFrame>
+            <p:nvGraphicFramePr>
+              <p:cNvPr id="9" name="表 8">
+                <a:extLst>
+                  <a:ext uri="{FF2B5EF4-FFF2-40B4-BE49-F238E27FC236}">
+                    <a16:creationId xmlns:a16="http://schemas.microsoft.com/office/drawing/2014/main" id="{94A409E3-866E-8470-CFCB-B3E95A5D2E16}"/>
+                  </a:ext>
+                </a:extLst>
+              </p:cNvPr>
+              <p:cNvGraphicFramePr>
+                <a:graphicFrameLocks noGrp="1"/>
+              </p:cNvGraphicFramePr>
+              <p:nvPr>
+                <p:extLst>
+                  <p:ext uri="{D42A27DB-BD31-4B8C-83A1-F6EECF244321}">
+                    <p14:modId xmlns:p14="http://schemas.microsoft.com/office/powerpoint/2010/main" val="437296671"/>
+                  </p:ext>
+                </p:extLst>
+              </p:nvPr>
+            </p:nvGraphicFramePr>
+            <p:xfrm>
+              <a:off x="125969" y="4319962"/>
+              <a:ext cx="11940062" cy="2222881"/>
+            </p:xfrm>
+            <a:graphic>
+              <a:graphicData uri="http://schemas.openxmlformats.org/drawingml/2006/table">
+                <a:tbl>
+                  <a:tblPr firstRow="1" bandRow="1">
+                    <a:tableStyleId>{2D5ABB26-0587-4C30-8999-92F81FD0307C}</a:tableStyleId>
+                  </a:tblPr>
+                  <a:tblGrid>
+                    <a:gridCol w="11940062">
+                      <a:extLst>
+                        <a:ext uri="{9D8B030D-6E8A-4147-A177-3AD203B41FA5}">
+                          <a16:colId xmlns:a16="http://schemas.microsoft.com/office/drawing/2014/main" val="1752847787"/>
+                        </a:ext>
+                      </a:extLst>
+                    </a:gridCol>
+                  </a:tblGrid>
+                  <a:tr h="370840">
+                    <a:tc>
+                      <a:txBody>
+                        <a:bodyPr/>
+                        <a:lstStyle/>
+                        <a:p>
+                          <a:r>
+                            <a:rPr kumimoji="1" lang="en-US" altLang="ja-JP" sz="2000" dirty="0"/>
+                            <a:t>Alg. </a:t>
+                          </a:r>
+                          <a:r>
+                            <a:rPr kumimoji="1" lang="ja-JP" altLang="en-US" sz="2000" dirty="0"/>
+                            <a:t>確率的勾配降下法</a:t>
+                          </a:r>
+                        </a:p>
+                      </a:txBody>
+                      <a:tcPr>
+                        <a:lnT w="12700" cap="flat" cmpd="sng" algn="ctr">
+                          <a:solidFill>
+                            <a:schemeClr val="tx1"/>
+                          </a:solidFill>
+                          <a:prstDash val="solid"/>
+                          <a:round/>
+                          <a:headEnd type="none" w="med" len="med"/>
+                          <a:tailEnd type="none" w="med" len="med"/>
+                        </a:lnT>
+                        <a:lnB w="12700" cap="flat" cmpd="sng" algn="ctr">
+                          <a:solidFill>
+                            <a:schemeClr val="tx1"/>
+                          </a:solidFill>
+                          <a:prstDash val="solid"/>
+                          <a:round/>
+                          <a:headEnd type="none" w="med" len="med"/>
+                          <a:tailEnd type="none" w="med" len="med"/>
+                        </a:lnB>
+                        <a:solidFill>
+                          <a:schemeClr val="bg1"/>
+                        </a:solidFill>
+                      </a:tcPr>
+                    </a:tc>
+                    <a:extLst>
+                      <a:ext uri="{0D108BD9-81ED-4DB2-BD59-A6C34878D82A}">
+                        <a16:rowId xmlns:a16="http://schemas.microsoft.com/office/drawing/2014/main" val="2770879385"/>
+                      </a:ext>
+                    </a:extLst>
+                  </a:tr>
+                  <a:tr h="370840">
+                    <a:tc>
+                      <a:txBody>
+                        <a:bodyPr/>
+                        <a:lstStyle/>
+                        <a:p>
+                          <a:r>
+                            <a:rPr kumimoji="1" lang="en-US" altLang="ja-JP" sz="2000" dirty="0"/>
+                            <a:t>Req. </a:t>
+                          </a:r>
+                          <a14:m>
+                            <m:oMath xmlns:m="http://schemas.openxmlformats.org/officeDocument/2006/math">
+                              <m:sSub>
+                                <m:sSubPr>
+                                  <m:ctrlPr>
+                                    <a:rPr kumimoji="1" lang="en-US" altLang="ja-JP" sz="2000" b="0" i="1" smtClean="0">
+                                      <a:latin typeface="Cambria Math" panose="02040503050406030204" pitchFamily="18" charset="0"/>
+                                    </a:rPr>
+                                  </m:ctrlPr>
+                                </m:sSubPr>
+                                <m:e>
+                                  <m:r>
+                                    <a:rPr kumimoji="1" lang="en-US" altLang="ja-JP" sz="2000" b="0" i="1" smtClean="0">
+                                      <a:latin typeface="Cambria Math" panose="02040503050406030204" pitchFamily="18" charset="0"/>
+                                    </a:rPr>
+                                    <m:t>𝑤</m:t>
+                                  </m:r>
+                                </m:e>
+                                <m:sub>
+                                  <m:r>
+                                    <a:rPr kumimoji="1" lang="en-US" altLang="ja-JP" sz="2000" b="0" i="1" smtClean="0">
+                                      <a:latin typeface="Cambria Math" panose="02040503050406030204" pitchFamily="18" charset="0"/>
+                                    </a:rPr>
+                                    <m:t>0</m:t>
+                                  </m:r>
+                                </m:sub>
+                              </m:sSub>
+                            </m:oMath>
+                          </a14:m>
+                          <a:r>
+                            <a:rPr kumimoji="1" lang="en-US" altLang="ja-JP" sz="2000" dirty="0"/>
+                            <a:t>; </a:t>
+                          </a:r>
+                          <a:r>
+                            <a:rPr kumimoji="1" lang="ja-JP" altLang="en-US" sz="2000" dirty="0"/>
+                            <a:t>初期パラメーター，</a:t>
+                          </a:r>
+                          <a14:m>
+                            <m:oMath xmlns:m="http://schemas.openxmlformats.org/officeDocument/2006/math">
+                              <m:r>
+                                <a:rPr kumimoji="1" lang="en-US" altLang="ja-JP" sz="2000" b="0" i="1" smtClean="0">
+                                  <a:latin typeface="Cambria Math" panose="02040503050406030204" pitchFamily="18" charset="0"/>
+                                </a:rPr>
+                                <m:t>𝜂</m:t>
+                              </m:r>
+                            </m:oMath>
+                          </a14:m>
+                          <a:r>
+                            <a:rPr kumimoji="1" lang="en-US" altLang="ja-JP" sz="2000" dirty="0"/>
+                            <a:t>; </a:t>
+                          </a:r>
+                          <a:r>
+                            <a:rPr kumimoji="1" lang="ja-JP" altLang="en-US" sz="2000" dirty="0"/>
+                            <a:t>学習率</a:t>
+                          </a:r>
+                        </a:p>
+                      </a:txBody>
+                      <a:tcPr>
+                        <a:lnT w="12700" cap="flat" cmpd="sng" algn="ctr">
+                          <a:solidFill>
+                            <a:schemeClr val="tx1"/>
+                          </a:solidFill>
+                          <a:prstDash val="solid"/>
+                          <a:round/>
+                          <a:headEnd type="none" w="med" len="med"/>
+                          <a:tailEnd type="none" w="med" len="med"/>
+                        </a:lnT>
+                        <a:lnB w="12700" cap="flat" cmpd="sng" algn="ctr">
+                          <a:solidFill>
+                            <a:schemeClr val="tx1"/>
+                          </a:solidFill>
+                          <a:prstDash val="solid"/>
+                          <a:round/>
+                          <a:headEnd type="none" w="med" len="med"/>
+                          <a:tailEnd type="none" w="med" len="med"/>
+                        </a:lnB>
+                        <a:solidFill>
+                          <a:schemeClr val="bg1"/>
+                        </a:solidFill>
+                      </a:tcPr>
+                    </a:tc>
+                    <a:extLst>
+                      <a:ext uri="{0D108BD9-81ED-4DB2-BD59-A6C34878D82A}">
+                        <a16:rowId xmlns:a16="http://schemas.microsoft.com/office/drawing/2014/main" val="4278813793"/>
+                      </a:ext>
+                    </a:extLst>
+                  </a:tr>
+                  <a:tr h="370840">
+                    <a:tc>
+                      <a:txBody>
+                        <a:bodyPr/>
+                        <a:lstStyle/>
+                        <a:p>
+                          <a:r>
+                            <a:rPr kumimoji="1" lang="en-US" altLang="ja-JP" sz="2000" dirty="0"/>
+                            <a:t>For </a:t>
+                          </a:r>
+                          <a14:m>
+                            <m:oMath xmlns:m="http://schemas.openxmlformats.org/officeDocument/2006/math">
+                              <m:r>
+                                <a:rPr kumimoji="1" lang="en-US" altLang="ja-JP" sz="2000" b="0" i="1" smtClean="0">
+                                  <a:latin typeface="Cambria Math" panose="02040503050406030204" pitchFamily="18" charset="0"/>
+                                </a:rPr>
+                                <m:t>𝑘</m:t>
+                              </m:r>
+                              <m:r>
+                                <a:rPr kumimoji="1" lang="en-US" altLang="ja-JP" sz="2000" b="0" i="1" smtClean="0">
+                                  <a:latin typeface="Cambria Math" panose="02040503050406030204" pitchFamily="18" charset="0"/>
+                                </a:rPr>
+                                <m:t>=0,1,…,</m:t>
+                              </m:r>
+                              <m:r>
+                                <a:rPr kumimoji="1" lang="en-US" altLang="ja-JP" sz="2000" b="0" i="1" smtClean="0">
+                                  <a:latin typeface="Cambria Math" panose="02040503050406030204" pitchFamily="18" charset="0"/>
+                                </a:rPr>
+                                <m:t>𝐾</m:t>
+                              </m:r>
+                            </m:oMath>
+                          </a14:m>
+                          <a:r>
+                            <a:rPr kumimoji="1" lang="ja-JP" altLang="en-US" sz="2000" dirty="0"/>
+                            <a:t> </a:t>
+                          </a:r>
+                          <a:r>
+                            <a:rPr kumimoji="1" lang="en-US" altLang="ja-JP" sz="2000" dirty="0"/>
+                            <a:t>Do</a:t>
+                          </a:r>
+                        </a:p>
+                        <a:p>
+                          <a:r>
+                            <a:rPr kumimoji="1" lang="en-US" altLang="ja-JP" sz="2000" dirty="0"/>
+                            <a:t>    </a:t>
+                          </a:r>
+                          <a:r>
+                            <a:rPr kumimoji="1" lang="ja-JP" altLang="en-US" sz="2000" dirty="0"/>
+                            <a:t>ミニバッチ</a:t>
+                          </a:r>
+                          <a14:m>
+                            <m:oMath xmlns:m="http://schemas.openxmlformats.org/officeDocument/2006/math">
+                              <m:sSub>
+                                <m:sSubPr>
+                                  <m:ctrlPr>
+                                    <a:rPr kumimoji="1" lang="en-US" altLang="ja-JP" sz="2000" b="0" i="1" smtClean="0">
+                                      <a:latin typeface="Cambria Math" panose="02040503050406030204" pitchFamily="18" charset="0"/>
+                                    </a:rPr>
+                                  </m:ctrlPr>
+                                </m:sSubPr>
+                                <m:e>
+                                  <m:r>
+                                    <a:rPr kumimoji="1" lang="en-US" altLang="ja-JP" sz="2000" b="0" i="1" smtClean="0">
+                                      <a:latin typeface="Cambria Math" panose="02040503050406030204" pitchFamily="18" charset="0"/>
+                                    </a:rPr>
+                                    <m:t>ℬ</m:t>
+                                  </m:r>
+                                </m:e>
+                                <m:sub>
+                                  <m:r>
+                                    <a:rPr kumimoji="1" lang="en-US" altLang="ja-JP" sz="2000" b="0" i="1" smtClean="0">
+                                      <a:latin typeface="Cambria Math" panose="02040503050406030204" pitchFamily="18" charset="0"/>
+                                    </a:rPr>
+                                    <m:t>𝑘</m:t>
+                                  </m:r>
+                                </m:sub>
+                              </m:sSub>
+                            </m:oMath>
+                          </a14:m>
+                          <a:r>
+                            <a:rPr kumimoji="1" lang="ja-JP" altLang="en-US" sz="2000" dirty="0"/>
+                            <a:t>をサンプリング</a:t>
+                          </a:r>
+                          <a:endParaRPr kumimoji="1" lang="en-US" altLang="ja-JP" sz="2000" dirty="0"/>
+                        </a:p>
+                        <a:p>
+                          <a:r>
+                            <a:rPr kumimoji="1" lang="ja-JP" altLang="en-US" sz="2000" dirty="0"/>
+                            <a:t>    </a:t>
+                          </a:r>
+                          <a14:m>
+                            <m:oMath xmlns:m="http://schemas.openxmlformats.org/officeDocument/2006/math">
+                              <m:sSub>
+                                <m:sSubPr>
+                                  <m:ctrlPr>
+                                    <a:rPr kumimoji="1" lang="en-US" altLang="ja-JP" sz="2000" b="0" i="1" smtClean="0">
+                                      <a:latin typeface="Cambria Math" panose="02040503050406030204" pitchFamily="18" charset="0"/>
+                                    </a:rPr>
+                                  </m:ctrlPr>
+                                </m:sSubPr>
+                                <m:e>
+                                  <m:r>
+                                    <a:rPr kumimoji="1" lang="en-US" altLang="ja-JP" sz="2000" b="0" i="1" smtClean="0">
+                                      <a:latin typeface="Cambria Math" panose="02040503050406030204" pitchFamily="18" charset="0"/>
+                                    </a:rPr>
+                                    <m:t>𝑤</m:t>
+                                  </m:r>
+                                </m:e>
+                                <m:sub>
+                                  <m:r>
+                                    <a:rPr kumimoji="1" lang="en-US" altLang="ja-JP" sz="2000" b="0" i="1" smtClean="0">
+                                      <a:latin typeface="Cambria Math" panose="02040503050406030204" pitchFamily="18" charset="0"/>
+                                    </a:rPr>
+                                    <m:t>𝑘</m:t>
+                                  </m:r>
+                                  <m:r>
+                                    <a:rPr kumimoji="1" lang="en-US" altLang="ja-JP" sz="2000" b="0" i="1" smtClean="0">
+                                      <a:latin typeface="Cambria Math" panose="02040503050406030204" pitchFamily="18" charset="0"/>
+                                    </a:rPr>
+                                    <m:t>+1</m:t>
+                                  </m:r>
+                                </m:sub>
+                              </m:sSub>
+                              <m:r>
+                                <a:rPr kumimoji="1" lang="en-US" altLang="ja-JP" sz="2000" b="0" i="1" smtClean="0">
+                                  <a:latin typeface="Cambria Math" panose="02040503050406030204" pitchFamily="18" charset="0"/>
+                                </a:rPr>
+                                <m:t>=</m:t>
+                              </m:r>
+                              <m:sSub>
+                                <m:sSubPr>
+                                  <m:ctrlPr>
+                                    <a:rPr kumimoji="1" lang="en-US" altLang="ja-JP" sz="2000" b="0" i="1" smtClean="0">
+                                      <a:latin typeface="Cambria Math" panose="02040503050406030204" pitchFamily="18" charset="0"/>
+                                    </a:rPr>
+                                  </m:ctrlPr>
+                                </m:sSubPr>
+                                <m:e>
+                                  <m:r>
+                                    <a:rPr kumimoji="1" lang="en-US" altLang="ja-JP" sz="2000" b="0" i="1" smtClean="0">
+                                      <a:latin typeface="Cambria Math" panose="02040503050406030204" pitchFamily="18" charset="0"/>
+                                    </a:rPr>
+                                    <m:t>𝑤</m:t>
+                                  </m:r>
+                                </m:e>
+                                <m:sub>
+                                  <m:r>
+                                    <a:rPr kumimoji="1" lang="en-US" altLang="ja-JP" sz="2000" b="0" i="1" smtClean="0">
+                                      <a:latin typeface="Cambria Math" panose="02040503050406030204" pitchFamily="18" charset="0"/>
+                                    </a:rPr>
+                                    <m:t>𝑘</m:t>
+                                  </m:r>
+                                </m:sub>
+                              </m:sSub>
+                              <m:r>
+                                <a:rPr kumimoji="1" lang="en-US" altLang="ja-JP" sz="2000" b="0" i="1" smtClean="0">
+                                  <a:latin typeface="Cambria Math" panose="02040503050406030204" pitchFamily="18" charset="0"/>
+                                </a:rPr>
+                                <m:t>−</m:t>
+                              </m:r>
+                              <m:r>
+                                <a:rPr kumimoji="1" lang="en-US" altLang="ja-JP" sz="2000" b="0" i="1" smtClean="0">
+                                  <a:latin typeface="Cambria Math" panose="02040503050406030204" pitchFamily="18" charset="0"/>
+                                </a:rPr>
+                                <m:t>𝜂</m:t>
+                              </m:r>
+                              <m:r>
+                                <m:rPr>
+                                  <m:sty m:val="p"/>
+                                </m:rPr>
+                                <a:rPr kumimoji="1" lang="en-US" altLang="ja-JP" sz="2000" b="0" i="0" smtClean="0">
+                                  <a:latin typeface="Cambria Math" panose="02040503050406030204" pitchFamily="18" charset="0"/>
+                                </a:rPr>
+                                <m:t>∇</m:t>
+                              </m:r>
+                              <m:sSub>
+                                <m:sSubPr>
+                                  <m:ctrlPr>
+                                    <a:rPr kumimoji="1" lang="en-US" altLang="ja-JP" sz="2000" b="0" i="1" smtClean="0">
+                                      <a:latin typeface="Cambria Math" panose="02040503050406030204" pitchFamily="18" charset="0"/>
+                                    </a:rPr>
+                                  </m:ctrlPr>
+                                </m:sSubPr>
+                                <m:e>
+                                  <m:r>
+                                    <a:rPr kumimoji="1" lang="en-US" altLang="ja-JP" sz="2000" b="0" i="1" smtClean="0">
+                                      <a:latin typeface="Cambria Math" panose="02040503050406030204" pitchFamily="18" charset="0"/>
+                                    </a:rPr>
+                                    <m:t>𝑓</m:t>
+                                  </m:r>
+                                </m:e>
+                                <m:sub>
+                                  <m:sSub>
+                                    <m:sSubPr>
+                                      <m:ctrlPr>
+                                        <a:rPr kumimoji="1" lang="en-US" altLang="ja-JP" sz="2000" b="0" i="1" smtClean="0">
+                                          <a:latin typeface="Cambria Math" panose="02040503050406030204" pitchFamily="18" charset="0"/>
+                                        </a:rPr>
+                                      </m:ctrlPr>
+                                    </m:sSubPr>
+                                    <m:e>
+                                      <m:r>
+                                        <a:rPr kumimoji="1" lang="en-US" altLang="ja-JP" sz="2000" b="0" i="1" smtClean="0">
+                                          <a:latin typeface="Cambria Math" panose="02040503050406030204" pitchFamily="18" charset="0"/>
+                                        </a:rPr>
+                                        <m:t>ℬ</m:t>
+                                      </m:r>
+                                    </m:e>
+                                    <m:sub>
+                                      <m:r>
+                                        <a:rPr kumimoji="1" lang="en-US" altLang="ja-JP" sz="2000" b="0" i="1" smtClean="0">
+                                          <a:latin typeface="Cambria Math" panose="02040503050406030204" pitchFamily="18" charset="0"/>
+                                        </a:rPr>
+                                        <m:t>𝑘</m:t>
+                                      </m:r>
+                                    </m:sub>
+                                  </m:sSub>
+                                </m:sub>
+                              </m:sSub>
+                              <m:d>
+                                <m:dPr>
+                                  <m:ctrlPr>
+                                    <a:rPr kumimoji="1" lang="en-US" altLang="ja-JP" sz="2000" b="0" i="1" smtClean="0">
+                                      <a:latin typeface="Cambria Math" panose="02040503050406030204" pitchFamily="18" charset="0"/>
+                                    </a:rPr>
+                                  </m:ctrlPr>
+                                </m:dPr>
+                                <m:e>
+                                  <m:sSub>
+                                    <m:sSubPr>
+                                      <m:ctrlPr>
+                                        <a:rPr kumimoji="1" lang="en-US" altLang="ja-JP" sz="2000" b="0" i="1" smtClean="0">
+                                          <a:latin typeface="Cambria Math" panose="02040503050406030204" pitchFamily="18" charset="0"/>
+                                        </a:rPr>
+                                      </m:ctrlPr>
+                                    </m:sSubPr>
+                                    <m:e>
+                                      <m:r>
+                                        <a:rPr kumimoji="1" lang="en-US" altLang="ja-JP" sz="2000" b="0" i="1" smtClean="0">
+                                          <a:latin typeface="Cambria Math" panose="02040503050406030204" pitchFamily="18" charset="0"/>
+                                        </a:rPr>
+                                        <m:t>𝑤</m:t>
+                                      </m:r>
+                                    </m:e>
+                                    <m:sub>
+                                      <m:r>
+                                        <a:rPr kumimoji="1" lang="en-US" altLang="ja-JP" sz="2000" b="0" i="1" smtClean="0">
+                                          <a:latin typeface="Cambria Math" panose="02040503050406030204" pitchFamily="18" charset="0"/>
+                                        </a:rPr>
+                                        <m:t>𝑘</m:t>
+                                      </m:r>
+                                    </m:sub>
+                                  </m:sSub>
+                                </m:e>
+                              </m:d>
+                            </m:oMath>
+                          </a14:m>
+                          <a:endParaRPr kumimoji="1" lang="en-US" altLang="ja-JP" sz="2000" dirty="0"/>
+                        </a:p>
+                      </a:txBody>
+                      <a:tcPr>
+                        <a:lnT w="12700" cap="flat" cmpd="sng" algn="ctr">
+                          <a:solidFill>
+                            <a:schemeClr val="tx1"/>
+                          </a:solidFill>
+                          <a:prstDash val="solid"/>
+                          <a:round/>
+                          <a:headEnd type="none" w="med" len="med"/>
+                          <a:tailEnd type="none" w="med" len="med"/>
+                        </a:lnT>
+                        <a:lnB w="12700" cap="flat" cmpd="sng" algn="ctr">
+                          <a:solidFill>
+                            <a:schemeClr val="tx1"/>
+                          </a:solidFill>
+                          <a:prstDash val="solid"/>
+                          <a:round/>
+                          <a:headEnd type="none" w="med" len="med"/>
+                          <a:tailEnd type="none" w="med" len="med"/>
+                        </a:lnB>
+                        <a:solidFill>
+                          <a:schemeClr val="bg1"/>
+                        </a:solidFill>
+                      </a:tcPr>
+                    </a:tc>
+                    <a:extLst>
+                      <a:ext uri="{0D108BD9-81ED-4DB2-BD59-A6C34878D82A}">
+                        <a16:rowId xmlns:a16="http://schemas.microsoft.com/office/drawing/2014/main" val="3445629740"/>
+                      </a:ext>
+                    </a:extLst>
+                  </a:tr>
+                  <a:tr h="370840">
+                    <a:tc>
+                      <a:txBody>
+                        <a:bodyPr/>
+                        <a:lstStyle/>
+                        <a:p>
+                          <a:r>
+                            <a:rPr kumimoji="1" lang="en-US" altLang="ja-JP" sz="2000" dirty="0"/>
+                            <a:t>Ret. </a:t>
+                          </a:r>
+                          <a14:m>
+                            <m:oMath xmlns:m="http://schemas.openxmlformats.org/officeDocument/2006/math">
+                              <m:sSub>
+                                <m:sSubPr>
+                                  <m:ctrlPr>
+                                    <a:rPr kumimoji="1" lang="en-US" altLang="ja-JP" sz="2000" b="0" i="1" smtClean="0">
+                                      <a:latin typeface="Cambria Math" panose="02040503050406030204" pitchFamily="18" charset="0"/>
+                                    </a:rPr>
+                                  </m:ctrlPr>
+                                </m:sSubPr>
+                                <m:e>
+                                  <m:r>
+                                    <a:rPr kumimoji="1" lang="en-US" altLang="ja-JP" sz="2000" b="0" i="1" smtClean="0">
+                                      <a:latin typeface="Cambria Math" panose="02040503050406030204" pitchFamily="18" charset="0"/>
+                                    </a:rPr>
+                                    <m:t>𝑤</m:t>
+                                  </m:r>
+                                </m:e>
+                                <m:sub>
+                                  <m:r>
+                                    <a:rPr kumimoji="1" lang="en-US" altLang="ja-JP" sz="2000" b="0" i="1" smtClean="0">
+                                      <a:latin typeface="Cambria Math" panose="02040503050406030204" pitchFamily="18" charset="0"/>
+                                    </a:rPr>
+                                    <m:t>𝐾</m:t>
+                                  </m:r>
+                                </m:sub>
+                              </m:sSub>
+                            </m:oMath>
+                          </a14:m>
+                          <a:endParaRPr kumimoji="1" lang="ja-JP" altLang="en-US" sz="2000" dirty="0"/>
+                        </a:p>
+                      </a:txBody>
+                      <a:tcPr>
+                        <a:lnT w="12700" cap="flat" cmpd="sng" algn="ctr">
+                          <a:solidFill>
+                            <a:schemeClr val="tx1"/>
+                          </a:solidFill>
+                          <a:prstDash val="solid"/>
+                          <a:round/>
+                          <a:headEnd type="none" w="med" len="med"/>
+                          <a:tailEnd type="none" w="med" len="med"/>
+                        </a:lnT>
+                        <a:lnB w="12700" cap="flat" cmpd="sng" algn="ctr">
+                          <a:solidFill>
+                            <a:schemeClr val="tx1"/>
+                          </a:solidFill>
+                          <a:prstDash val="solid"/>
+                          <a:round/>
+                          <a:headEnd type="none" w="med" len="med"/>
+                          <a:tailEnd type="none" w="med" len="med"/>
+                        </a:lnB>
+                        <a:solidFill>
+                          <a:schemeClr val="bg1"/>
+                        </a:solidFill>
+                      </a:tcPr>
+                    </a:tc>
+                    <a:extLst>
+                      <a:ext uri="{0D108BD9-81ED-4DB2-BD59-A6C34878D82A}">
+                        <a16:rowId xmlns:a16="http://schemas.microsoft.com/office/drawing/2014/main" val="3831119886"/>
+                      </a:ext>
+                    </a:extLst>
+                  </a:tr>
+                </a:tbl>
+              </a:graphicData>
+            </a:graphic>
+          </p:graphicFrame>
+        </mc:Choice>
+        <mc:Fallback>
+          <p:graphicFrame>
+            <p:nvGraphicFramePr>
+              <p:cNvPr id="9" name="表 8">
+                <a:extLst>
+                  <a:ext uri="{FF2B5EF4-FFF2-40B4-BE49-F238E27FC236}">
+                    <a16:creationId xmlns:a16="http://schemas.microsoft.com/office/drawing/2014/main" id="{94A409E3-866E-8470-CFCB-B3E95A5D2E16}"/>
+                  </a:ext>
+                </a:extLst>
+              </p:cNvPr>
+              <p:cNvGraphicFramePr>
+                <a:graphicFrameLocks noGrp="1"/>
+              </p:cNvGraphicFramePr>
+              <p:nvPr>
+                <p:extLst>
+                  <p:ext uri="{D42A27DB-BD31-4B8C-83A1-F6EECF244321}">
+                    <p14:modId xmlns:p14="http://schemas.microsoft.com/office/powerpoint/2010/main" val="437296671"/>
+                  </p:ext>
+                </p:extLst>
+              </p:nvPr>
+            </p:nvGraphicFramePr>
+            <p:xfrm>
+              <a:off x="125969" y="4319962"/>
+              <a:ext cx="11940062" cy="2222881"/>
+            </p:xfrm>
+            <a:graphic>
+              <a:graphicData uri="http://schemas.openxmlformats.org/drawingml/2006/table">
+                <a:tbl>
+                  <a:tblPr firstRow="1" bandRow="1">
+                    <a:tableStyleId>{2D5ABB26-0587-4C30-8999-92F81FD0307C}</a:tableStyleId>
+                  </a:tblPr>
+                  <a:tblGrid>
+                    <a:gridCol w="11940062">
+                      <a:extLst>
+                        <a:ext uri="{9D8B030D-6E8A-4147-A177-3AD203B41FA5}">
+                          <a16:colId xmlns:a16="http://schemas.microsoft.com/office/drawing/2014/main" val="1752847787"/>
+                        </a:ext>
+                      </a:extLst>
+                    </a:gridCol>
+                  </a:tblGrid>
+                  <a:tr h="396240">
+                    <a:tc>
+                      <a:txBody>
+                        <a:bodyPr/>
+                        <a:lstStyle/>
+                        <a:p>
+                          <a:r>
+                            <a:rPr kumimoji="1" lang="en-US" altLang="ja-JP" sz="2000" dirty="0"/>
+                            <a:t>Alg. </a:t>
+                          </a:r>
+                          <a:r>
+                            <a:rPr kumimoji="1" lang="ja-JP" altLang="en-US" sz="2000" dirty="0"/>
+                            <a:t>確率的勾配降下法</a:t>
+                          </a:r>
+                        </a:p>
+                      </a:txBody>
+                      <a:tcPr>
+                        <a:lnT w="12700" cap="flat" cmpd="sng" algn="ctr">
+                          <a:solidFill>
+                            <a:schemeClr val="tx1"/>
+                          </a:solidFill>
+                          <a:prstDash val="solid"/>
+                          <a:round/>
+                          <a:headEnd type="none" w="med" len="med"/>
+                          <a:tailEnd type="none" w="med" len="med"/>
+                        </a:lnT>
+                        <a:lnB w="12700" cap="flat" cmpd="sng" algn="ctr">
+                          <a:solidFill>
+                            <a:schemeClr val="tx1"/>
+                          </a:solidFill>
+                          <a:prstDash val="solid"/>
+                          <a:round/>
+                          <a:headEnd type="none" w="med" len="med"/>
+                          <a:tailEnd type="none" w="med" len="med"/>
+                        </a:lnB>
+                        <a:solidFill>
+                          <a:schemeClr val="bg1"/>
+                        </a:solidFill>
+                      </a:tcPr>
+                    </a:tc>
+                    <a:extLst>
+                      <a:ext uri="{0D108BD9-81ED-4DB2-BD59-A6C34878D82A}">
+                        <a16:rowId xmlns:a16="http://schemas.microsoft.com/office/drawing/2014/main" val="2770879385"/>
+                      </a:ext>
+                    </a:extLst>
+                  </a:tr>
+                  <a:tr h="396240">
+                    <a:tc>
+                      <a:txBody>
+                        <a:bodyPr/>
+                        <a:lstStyle/>
+                        <a:p>
+                          <a:endParaRPr lang="ja-JP"/>
+                        </a:p>
+                      </a:txBody>
+                      <a:tcPr>
+                        <a:lnT w="12700" cap="flat" cmpd="sng" algn="ctr">
+                          <a:solidFill>
+                            <a:schemeClr val="tx1"/>
+                          </a:solidFill>
+                          <a:prstDash val="solid"/>
+                          <a:round/>
+                          <a:headEnd type="none" w="med" len="med"/>
+                          <a:tailEnd type="none" w="med" len="med"/>
+                        </a:lnT>
+                        <a:lnB w="12700" cap="flat" cmpd="sng" algn="ctr">
+                          <a:solidFill>
+                            <a:schemeClr val="tx1"/>
+                          </a:solidFill>
+                          <a:prstDash val="solid"/>
+                          <a:round/>
+                          <a:headEnd type="none" w="med" len="med"/>
+                          <a:tailEnd type="none" w="med" len="med"/>
+                        </a:lnB>
+                        <a:blipFill>
+                          <a:blip r:embed="rId3"/>
+                          <a:stretch>
+                            <a:fillRect t="-107692" r="-51" b="-384615"/>
+                          </a:stretch>
+                        </a:blipFill>
+                      </a:tcPr>
+                    </a:tc>
+                    <a:extLst>
+                      <a:ext uri="{0D108BD9-81ED-4DB2-BD59-A6C34878D82A}">
+                        <a16:rowId xmlns:a16="http://schemas.microsoft.com/office/drawing/2014/main" val="4278813793"/>
+                      </a:ext>
+                    </a:extLst>
+                  </a:tr>
+                  <a:tr h="1034161">
+                    <a:tc>
+                      <a:txBody>
+                        <a:bodyPr/>
+                        <a:lstStyle/>
+                        <a:p>
+                          <a:endParaRPr lang="ja-JP"/>
+                        </a:p>
+                      </a:txBody>
+                      <a:tcPr>
+                        <a:lnT w="12700" cap="flat" cmpd="sng" algn="ctr">
+                          <a:solidFill>
+                            <a:schemeClr val="tx1"/>
+                          </a:solidFill>
+                          <a:prstDash val="solid"/>
+                          <a:round/>
+                          <a:headEnd type="none" w="med" len="med"/>
+                          <a:tailEnd type="none" w="med" len="med"/>
+                        </a:lnT>
+                        <a:lnB w="12700" cap="flat" cmpd="sng" algn="ctr">
+                          <a:solidFill>
+                            <a:schemeClr val="tx1"/>
+                          </a:solidFill>
+                          <a:prstDash val="solid"/>
+                          <a:round/>
+                          <a:headEnd type="none" w="med" len="med"/>
+                          <a:tailEnd type="none" w="med" len="med"/>
+                        </a:lnB>
+                        <a:blipFill>
+                          <a:blip r:embed="rId3"/>
+                          <a:stretch>
+                            <a:fillRect t="-78947" r="-51" b="-46199"/>
+                          </a:stretch>
+                        </a:blipFill>
+                      </a:tcPr>
+                    </a:tc>
+                    <a:extLst>
+                      <a:ext uri="{0D108BD9-81ED-4DB2-BD59-A6C34878D82A}">
+                        <a16:rowId xmlns:a16="http://schemas.microsoft.com/office/drawing/2014/main" val="3445629740"/>
+                      </a:ext>
+                    </a:extLst>
+                  </a:tr>
+                  <a:tr h="396240">
+                    <a:tc>
+                      <a:txBody>
+                        <a:bodyPr/>
+                        <a:lstStyle/>
+                        <a:p>
+                          <a:endParaRPr lang="ja-JP"/>
+                        </a:p>
+                      </a:txBody>
+                      <a:tcPr>
+                        <a:lnT w="12700" cap="flat" cmpd="sng" algn="ctr">
+                          <a:solidFill>
+                            <a:schemeClr val="tx1"/>
+                          </a:solidFill>
+                          <a:prstDash val="solid"/>
+                          <a:round/>
+                          <a:headEnd type="none" w="med" len="med"/>
+                          <a:tailEnd type="none" w="med" len="med"/>
+                        </a:lnT>
+                        <a:lnB w="12700" cap="flat" cmpd="sng" algn="ctr">
+                          <a:solidFill>
+                            <a:schemeClr val="tx1"/>
+                          </a:solidFill>
+                          <a:prstDash val="solid"/>
+                          <a:round/>
+                          <a:headEnd type="none" w="med" len="med"/>
+                          <a:tailEnd type="none" w="med" len="med"/>
+                        </a:lnB>
+                        <a:blipFill>
+                          <a:blip r:embed="rId3"/>
+                          <a:stretch>
+                            <a:fillRect t="-470769" r="-51" b="-21538"/>
                           </a:stretch>
                         </a:blipFill>
                       </a:tcPr>
@@ -5363,7 +7730,7 @@
 </file>
 
 <file path=ppt/slides/slide5.xml><?xml version="1.0" encoding="utf-8"?>
-<p:sld xmlns:a="http://schemas.openxmlformats.org/drawingml/2006/main" xmlns:r="http://schemas.openxmlformats.org/officeDocument/2006/relationships" xmlns:p="http://schemas.openxmlformats.org/presentationml/2006/main">
+<p:sld xmlns:a="http://schemas.openxmlformats.org/drawingml/2006/main" xmlns:r="http://schemas.openxmlformats.org/officeDocument/2006/relationships" xmlns:p="http://schemas.openxmlformats.org/presentationml/2006/main" show="0">
   <p:cSld>
     <p:spTree>
       <p:nvGrpSpPr>
@@ -5457,27 +7824,23 @@
             <a:pPr marL="457200" lvl="1" indent="0">
               <a:buNone/>
             </a:pPr>
-            <a:r>
-              <a:rPr lang="en-US" altLang="ja-JP" dirty="0"/>
-              <a:t>※</a:t>
-            </a:r>
+            <a:endParaRPr lang="en-US" altLang="ja-JP" dirty="0"/>
+          </a:p>
+          <a:p>
+            <a:r>
+              <a:rPr kumimoji="1" lang="ja-JP" altLang="en-US" dirty="0"/>
+              <a:t>・英文論文を引用する場合</a:t>
+            </a:r>
+            <a:endParaRPr kumimoji="1" lang="en-US" altLang="ja-JP" dirty="0"/>
+          </a:p>
+          <a:p>
+            <a:endParaRPr lang="en-US" altLang="ja-JP" dirty="0"/>
+          </a:p>
+          <a:p>
             <a:r>
               <a:rPr lang="ja-JP" altLang="en-US" dirty="0"/>
-              <a:t> 他のフォーマットでも良いが，理由がなければ上記に準拠</a:t>
-            </a:r>
-            <a:endParaRPr kumimoji="1" lang="en-US" altLang="ja-JP" dirty="0"/>
-          </a:p>
-          <a:p>
-            <a:r>
-              <a:rPr kumimoji="1" lang="ja-JP" altLang="en-US" dirty="0"/>
-              <a:t>英文論文を引用する場合</a:t>
-            </a:r>
-            <a:endParaRPr kumimoji="1" lang="en-US" altLang="ja-JP" dirty="0"/>
-          </a:p>
-          <a:p>
-            <a:endParaRPr lang="en-US" altLang="ja-JP" dirty="0"/>
-          </a:p>
-          <a:p>
+              <a:t>・</a:t>
+            </a:r>
             <a:r>
               <a:rPr kumimoji="1" lang="ja-JP" altLang="en-US" dirty="0"/>
               <a:t>和文論文を引用する場合</a:t>
@@ -5489,6 +7852,10 @@
           </a:p>
           <a:p>
             <a:r>
+              <a:rPr lang="ja-JP" altLang="en-US" dirty="0"/>
+              <a:t>・</a:t>
+            </a:r>
+            <a:r>
               <a:rPr kumimoji="1" lang="ja-JP" altLang="en-US" dirty="0"/>
               <a:t>書籍を引用する場合</a:t>
             </a:r>
@@ -5499,12 +7866,16 @@
           </a:p>
           <a:p>
             <a:r>
+              <a:rPr lang="ja-JP" altLang="en-US" dirty="0"/>
+              <a:t>・</a:t>
+            </a:r>
+            <a:r>
               <a:rPr kumimoji="1" lang="en-US" altLang="ja-JP" dirty="0"/>
               <a:t>Web</a:t>
             </a:r>
             <a:r>
               <a:rPr kumimoji="1" lang="ja-JP" altLang="en-US" dirty="0"/>
-              <a:t>サイトを引用する場合（ハイパーリンクは削除！）</a:t>
+              <a:t>サイトを引用する場合</a:t>
             </a:r>
           </a:p>
         </p:txBody>
@@ -6114,7 +8485,1002 @@
 </file>
 
 <file path=ppt/slides/slide6.xml><?xml version="1.0" encoding="utf-8"?>
-<p:sld xmlns:a="http://schemas.openxmlformats.org/drawingml/2006/main" xmlns:r="http://schemas.openxmlformats.org/officeDocument/2006/relationships" xmlns:p="http://schemas.openxmlformats.org/presentationml/2006/main">
+<p:sld xmlns:a="http://schemas.openxmlformats.org/drawingml/2006/main" xmlns:r="http://schemas.openxmlformats.org/officeDocument/2006/relationships" xmlns:p="http://schemas.openxmlformats.org/presentationml/2006/main" show="0">
+  <p:cSld>
+    <p:spTree>
+      <p:nvGrpSpPr>
+        <p:cNvPr id="1" name=""/>
+        <p:cNvGrpSpPr/>
+        <p:nvPr/>
+      </p:nvGrpSpPr>
+      <p:grpSpPr>
+        <a:xfrm>
+          <a:off x="0" y="0"/>
+          <a:ext cx="0" cy="0"/>
+          <a:chOff x="0" y="0"/>
+          <a:chExt cx="0" cy="0"/>
+        </a:xfrm>
+      </p:grpSpPr>
+      <p:sp>
+        <p:nvSpPr>
+          <p:cNvPr id="2" name="タイトル 1">
+            <a:extLst>
+              <a:ext uri="{FF2B5EF4-FFF2-40B4-BE49-F238E27FC236}">
+                <a16:creationId xmlns:a16="http://schemas.microsoft.com/office/drawing/2014/main" id="{6D5D81F3-A795-8651-9527-93D74BB1F062}"/>
+              </a:ext>
+            </a:extLst>
+          </p:cNvPr>
+          <p:cNvSpPr>
+            <a:spLocks noGrp="1"/>
+          </p:cNvSpPr>
+          <p:nvPr>
+            <p:ph type="title"/>
+          </p:nvPr>
+        </p:nvSpPr>
+        <p:spPr/>
+        <p:txBody>
+          <a:bodyPr>
+            <a:normAutofit fontScale="90000"/>
+          </a:bodyPr>
+          <a:lstStyle/>
+          <a:p>
+            <a:r>
+              <a:rPr lang="ja-JP" altLang="en-US" dirty="0"/>
+              <a:t>表テンプレート</a:t>
+            </a:r>
+            <a:endParaRPr kumimoji="1" lang="ja-JP" altLang="en-US" dirty="0"/>
+          </a:p>
+        </p:txBody>
+      </p:sp>
+      <p:sp>
+        <p:nvSpPr>
+          <p:cNvPr id="3" name="コンテンツ プレースホルダー 2">
+            <a:extLst>
+              <a:ext uri="{FF2B5EF4-FFF2-40B4-BE49-F238E27FC236}">
+                <a16:creationId xmlns:a16="http://schemas.microsoft.com/office/drawing/2014/main" id="{5E1D3B0D-94D2-BBB3-B5CA-257055119FDD}"/>
+              </a:ext>
+            </a:extLst>
+          </p:cNvPr>
+          <p:cNvSpPr>
+            <a:spLocks noGrp="1"/>
+          </p:cNvSpPr>
+          <p:nvPr>
+            <p:ph idx="1"/>
+          </p:nvPr>
+        </p:nvSpPr>
+        <p:spPr/>
+        <p:txBody>
+          <a:bodyPr/>
+          <a:lstStyle/>
+          <a:p>
+            <a:pPr marL="0" indent="0">
+              <a:buNone/>
+            </a:pPr>
+            <a:r>
+              <a:rPr kumimoji="1" lang="ja-JP" altLang="en-US" dirty="0"/>
+              <a:t>・表見出しがある場合</a:t>
+            </a:r>
+            <a:endParaRPr kumimoji="1" lang="en-US" altLang="ja-JP" dirty="0"/>
+          </a:p>
+          <a:p>
+            <a:pPr marL="0" indent="0">
+              <a:buNone/>
+            </a:pPr>
+            <a:endParaRPr lang="en-US" altLang="ja-JP" dirty="0"/>
+          </a:p>
+          <a:p>
+            <a:pPr marL="0" indent="0">
+              <a:buNone/>
+            </a:pPr>
+            <a:endParaRPr kumimoji="1" lang="en-US" altLang="ja-JP" dirty="0"/>
+          </a:p>
+          <a:p>
+            <a:pPr marL="0" indent="0">
+              <a:buNone/>
+            </a:pPr>
+            <a:endParaRPr lang="en-US" altLang="ja-JP" sz="3200" dirty="0"/>
+          </a:p>
+          <a:p>
+            <a:pPr marL="0" indent="0">
+              <a:buNone/>
+            </a:pPr>
+            <a:endParaRPr lang="en-US" altLang="ja-JP" sz="3200" dirty="0"/>
+          </a:p>
+          <a:p>
+            <a:pPr marL="0" indent="0">
+              <a:buNone/>
+            </a:pPr>
+            <a:r>
+              <a:rPr lang="ja-JP" altLang="en-US" dirty="0"/>
+              <a:t>・表見出しが無い場合</a:t>
+            </a:r>
+          </a:p>
+          <a:p>
+            <a:pPr marL="0" indent="0">
+              <a:buNone/>
+            </a:pPr>
+            <a:endParaRPr kumimoji="1" lang="ja-JP" altLang="en-US" dirty="0"/>
+          </a:p>
+        </p:txBody>
+      </p:sp>
+      <p:sp>
+        <p:nvSpPr>
+          <p:cNvPr id="4" name="スライド番号プレースホルダー 3">
+            <a:extLst>
+              <a:ext uri="{FF2B5EF4-FFF2-40B4-BE49-F238E27FC236}">
+                <a16:creationId xmlns:a16="http://schemas.microsoft.com/office/drawing/2014/main" id="{4047CEC4-5566-08C8-2583-45F558F84AFD}"/>
+              </a:ext>
+            </a:extLst>
+          </p:cNvPr>
+          <p:cNvSpPr>
+            <a:spLocks noGrp="1"/>
+          </p:cNvSpPr>
+          <p:nvPr>
+            <p:ph type="sldNum" sz="quarter" idx="12"/>
+          </p:nvPr>
+        </p:nvSpPr>
+        <p:spPr/>
+        <p:txBody>
+          <a:bodyPr/>
+          <a:lstStyle/>
+          <a:p>
+            <a:fld id="{9C0FEE9A-3EB6-844C-8184-5D808DF01412}" type="slidenum">
+              <a:rPr kumimoji="1" lang="ja-JP" altLang="en-US" smtClean="0"/>
+              <a:t>6</a:t>
+            </a:fld>
+            <a:endParaRPr kumimoji="1" lang="ja-JP" altLang="en-US"/>
+          </a:p>
+        </p:txBody>
+      </p:sp>
+      <p:graphicFrame>
+        <p:nvGraphicFramePr>
+          <p:cNvPr id="7" name="表 6">
+            <a:extLst>
+              <a:ext uri="{FF2B5EF4-FFF2-40B4-BE49-F238E27FC236}">
+                <a16:creationId xmlns:a16="http://schemas.microsoft.com/office/drawing/2014/main" id="{2F4489DD-FD75-CAD5-2643-2C1A03EE5DD6}"/>
+              </a:ext>
+            </a:extLst>
+          </p:cNvPr>
+          <p:cNvGraphicFramePr>
+            <a:graphicFrameLocks noGrp="1"/>
+          </p:cNvGraphicFramePr>
+          <p:nvPr>
+            <p:extLst>
+              <p:ext uri="{D42A27DB-BD31-4B8C-83A1-F6EECF244321}">
+                <p14:modId xmlns:p14="http://schemas.microsoft.com/office/powerpoint/2010/main" val="880796658"/>
+              </p:ext>
+            </p:extLst>
+          </p:nvPr>
+        </p:nvGraphicFramePr>
+        <p:xfrm>
+          <a:off x="125970" y="1347195"/>
+          <a:ext cx="5893830" cy="1188720"/>
+        </p:xfrm>
+        <a:graphic>
+          <a:graphicData uri="http://schemas.openxmlformats.org/drawingml/2006/table">
+            <a:tbl>
+              <a:tblPr firstRow="1" bandRow="1">
+                <a:tableStyleId>{5C22544A-7EE6-4342-B048-85BDC9FD1C3A}</a:tableStyleId>
+              </a:tblPr>
+              <a:tblGrid>
+                <a:gridCol w="1964610">
+                  <a:extLst>
+                    <a:ext uri="{9D8B030D-6E8A-4147-A177-3AD203B41FA5}">
+                      <a16:colId xmlns:a16="http://schemas.microsoft.com/office/drawing/2014/main" val="5930721"/>
+                    </a:ext>
+                  </a:extLst>
+                </a:gridCol>
+                <a:gridCol w="1964610">
+                  <a:extLst>
+                    <a:ext uri="{9D8B030D-6E8A-4147-A177-3AD203B41FA5}">
+                      <a16:colId xmlns:a16="http://schemas.microsoft.com/office/drawing/2014/main" val="95815794"/>
+                    </a:ext>
+                  </a:extLst>
+                </a:gridCol>
+                <a:gridCol w="1964610">
+                  <a:extLst>
+                    <a:ext uri="{9D8B030D-6E8A-4147-A177-3AD203B41FA5}">
+                      <a16:colId xmlns:a16="http://schemas.microsoft.com/office/drawing/2014/main" val="1897232299"/>
+                    </a:ext>
+                  </a:extLst>
+                </a:gridCol>
+              </a:tblGrid>
+              <a:tr h="370840">
+                <a:tc>
+                  <a:txBody>
+                    <a:bodyPr/>
+                    <a:lstStyle/>
+                    <a:p>
+                      <a:endParaRPr kumimoji="1" lang="ja-JP" altLang="en-US" sz="2000" dirty="0"/>
+                    </a:p>
+                  </a:txBody>
+                  <a:tcPr/>
+                </a:tc>
+                <a:tc>
+                  <a:txBody>
+                    <a:bodyPr/>
+                    <a:lstStyle/>
+                    <a:p>
+                      <a:endParaRPr kumimoji="1" lang="ja-JP" altLang="en-US" sz="2000" dirty="0"/>
+                    </a:p>
+                  </a:txBody>
+                  <a:tcPr/>
+                </a:tc>
+                <a:tc>
+                  <a:txBody>
+                    <a:bodyPr/>
+                    <a:lstStyle/>
+                    <a:p>
+                      <a:endParaRPr kumimoji="1" lang="ja-JP" altLang="en-US" sz="2000"/>
+                    </a:p>
+                  </a:txBody>
+                  <a:tcPr/>
+                </a:tc>
+                <a:extLst>
+                  <a:ext uri="{0D108BD9-81ED-4DB2-BD59-A6C34878D82A}">
+                    <a16:rowId xmlns:a16="http://schemas.microsoft.com/office/drawing/2014/main" val="1261456025"/>
+                  </a:ext>
+                </a:extLst>
+              </a:tr>
+              <a:tr h="370840">
+                <a:tc>
+                  <a:txBody>
+                    <a:bodyPr/>
+                    <a:lstStyle/>
+                    <a:p>
+                      <a:endParaRPr kumimoji="1" lang="ja-JP" altLang="en-US" sz="2000" dirty="0"/>
+                    </a:p>
+                  </a:txBody>
+                  <a:tcPr/>
+                </a:tc>
+                <a:tc>
+                  <a:txBody>
+                    <a:bodyPr/>
+                    <a:lstStyle/>
+                    <a:p>
+                      <a:endParaRPr kumimoji="1" lang="ja-JP" altLang="en-US" sz="2000" dirty="0"/>
+                    </a:p>
+                  </a:txBody>
+                  <a:tcPr/>
+                </a:tc>
+                <a:tc>
+                  <a:txBody>
+                    <a:bodyPr/>
+                    <a:lstStyle/>
+                    <a:p>
+                      <a:endParaRPr kumimoji="1" lang="ja-JP" altLang="en-US" sz="2000"/>
+                    </a:p>
+                  </a:txBody>
+                  <a:tcPr/>
+                </a:tc>
+                <a:extLst>
+                  <a:ext uri="{0D108BD9-81ED-4DB2-BD59-A6C34878D82A}">
+                    <a16:rowId xmlns:a16="http://schemas.microsoft.com/office/drawing/2014/main" val="116551845"/>
+                  </a:ext>
+                </a:extLst>
+              </a:tr>
+              <a:tr h="370840">
+                <a:tc>
+                  <a:txBody>
+                    <a:bodyPr/>
+                    <a:lstStyle/>
+                    <a:p>
+                      <a:endParaRPr kumimoji="1" lang="ja-JP" altLang="en-US" sz="2000" dirty="0"/>
+                    </a:p>
+                  </a:txBody>
+                  <a:tcPr/>
+                </a:tc>
+                <a:tc>
+                  <a:txBody>
+                    <a:bodyPr/>
+                    <a:lstStyle/>
+                    <a:p>
+                      <a:endParaRPr kumimoji="1" lang="ja-JP" altLang="en-US" sz="2000"/>
+                    </a:p>
+                  </a:txBody>
+                  <a:tcPr/>
+                </a:tc>
+                <a:tc>
+                  <a:txBody>
+                    <a:bodyPr/>
+                    <a:lstStyle/>
+                    <a:p>
+                      <a:endParaRPr kumimoji="1" lang="ja-JP" altLang="en-US" sz="2000" dirty="0"/>
+                    </a:p>
+                  </a:txBody>
+                  <a:tcPr/>
+                </a:tc>
+                <a:extLst>
+                  <a:ext uri="{0D108BD9-81ED-4DB2-BD59-A6C34878D82A}">
+                    <a16:rowId xmlns:a16="http://schemas.microsoft.com/office/drawing/2014/main" val="3518915577"/>
+                  </a:ext>
+                </a:extLst>
+              </a:tr>
+            </a:tbl>
+          </a:graphicData>
+        </a:graphic>
+      </p:graphicFrame>
+      <p:graphicFrame>
+        <p:nvGraphicFramePr>
+          <p:cNvPr id="9" name="表 8">
+            <a:extLst>
+              <a:ext uri="{FF2B5EF4-FFF2-40B4-BE49-F238E27FC236}">
+                <a16:creationId xmlns:a16="http://schemas.microsoft.com/office/drawing/2014/main" id="{02952CFF-33CF-15EE-B672-F30BDBD1C2DE}"/>
+              </a:ext>
+            </a:extLst>
+          </p:cNvPr>
+          <p:cNvGraphicFramePr>
+            <a:graphicFrameLocks noGrp="1"/>
+          </p:cNvGraphicFramePr>
+          <p:nvPr>
+            <p:extLst>
+              <p:ext uri="{D42A27DB-BD31-4B8C-83A1-F6EECF244321}">
+                <p14:modId xmlns:p14="http://schemas.microsoft.com/office/powerpoint/2010/main" val="2538265266"/>
+              </p:ext>
+            </p:extLst>
+          </p:nvPr>
+        </p:nvGraphicFramePr>
+        <p:xfrm>
+          <a:off x="125968" y="2592714"/>
+          <a:ext cx="11940060" cy="1188720"/>
+        </p:xfrm>
+        <a:graphic>
+          <a:graphicData uri="http://schemas.openxmlformats.org/drawingml/2006/table">
+            <a:tbl>
+              <a:tblPr firstRow="1" bandRow="1">
+                <a:tableStyleId>{5C22544A-7EE6-4342-B048-85BDC9FD1C3A}</a:tableStyleId>
+              </a:tblPr>
+              <a:tblGrid>
+                <a:gridCol w="3980020">
+                  <a:extLst>
+                    <a:ext uri="{9D8B030D-6E8A-4147-A177-3AD203B41FA5}">
+                      <a16:colId xmlns:a16="http://schemas.microsoft.com/office/drawing/2014/main" val="5930721"/>
+                    </a:ext>
+                  </a:extLst>
+                </a:gridCol>
+                <a:gridCol w="3980020">
+                  <a:extLst>
+                    <a:ext uri="{9D8B030D-6E8A-4147-A177-3AD203B41FA5}">
+                      <a16:colId xmlns:a16="http://schemas.microsoft.com/office/drawing/2014/main" val="95815794"/>
+                    </a:ext>
+                  </a:extLst>
+                </a:gridCol>
+                <a:gridCol w="3980020">
+                  <a:extLst>
+                    <a:ext uri="{9D8B030D-6E8A-4147-A177-3AD203B41FA5}">
+                      <a16:colId xmlns:a16="http://schemas.microsoft.com/office/drawing/2014/main" val="1897232299"/>
+                    </a:ext>
+                  </a:extLst>
+                </a:gridCol>
+              </a:tblGrid>
+              <a:tr h="370840">
+                <a:tc>
+                  <a:txBody>
+                    <a:bodyPr/>
+                    <a:lstStyle/>
+                    <a:p>
+                      <a:endParaRPr kumimoji="1" lang="ja-JP" altLang="en-US" sz="2000" dirty="0"/>
+                    </a:p>
+                  </a:txBody>
+                  <a:tcPr/>
+                </a:tc>
+                <a:tc>
+                  <a:txBody>
+                    <a:bodyPr/>
+                    <a:lstStyle/>
+                    <a:p>
+                      <a:endParaRPr kumimoji="1" lang="ja-JP" altLang="en-US" sz="2000"/>
+                    </a:p>
+                  </a:txBody>
+                  <a:tcPr/>
+                </a:tc>
+                <a:tc>
+                  <a:txBody>
+                    <a:bodyPr/>
+                    <a:lstStyle/>
+                    <a:p>
+                      <a:endParaRPr kumimoji="1" lang="ja-JP" altLang="en-US" sz="2000"/>
+                    </a:p>
+                  </a:txBody>
+                  <a:tcPr/>
+                </a:tc>
+                <a:extLst>
+                  <a:ext uri="{0D108BD9-81ED-4DB2-BD59-A6C34878D82A}">
+                    <a16:rowId xmlns:a16="http://schemas.microsoft.com/office/drawing/2014/main" val="1261456025"/>
+                  </a:ext>
+                </a:extLst>
+              </a:tr>
+              <a:tr h="370840">
+                <a:tc>
+                  <a:txBody>
+                    <a:bodyPr/>
+                    <a:lstStyle/>
+                    <a:p>
+                      <a:endParaRPr kumimoji="1" lang="ja-JP" altLang="en-US" sz="2000" dirty="0"/>
+                    </a:p>
+                  </a:txBody>
+                  <a:tcPr/>
+                </a:tc>
+                <a:tc>
+                  <a:txBody>
+                    <a:bodyPr/>
+                    <a:lstStyle/>
+                    <a:p>
+                      <a:endParaRPr kumimoji="1" lang="ja-JP" altLang="en-US" sz="2000"/>
+                    </a:p>
+                  </a:txBody>
+                  <a:tcPr/>
+                </a:tc>
+                <a:tc>
+                  <a:txBody>
+                    <a:bodyPr/>
+                    <a:lstStyle/>
+                    <a:p>
+                      <a:endParaRPr kumimoji="1" lang="ja-JP" altLang="en-US" sz="2000"/>
+                    </a:p>
+                  </a:txBody>
+                  <a:tcPr/>
+                </a:tc>
+                <a:extLst>
+                  <a:ext uri="{0D108BD9-81ED-4DB2-BD59-A6C34878D82A}">
+                    <a16:rowId xmlns:a16="http://schemas.microsoft.com/office/drawing/2014/main" val="116551845"/>
+                  </a:ext>
+                </a:extLst>
+              </a:tr>
+              <a:tr h="370840">
+                <a:tc>
+                  <a:txBody>
+                    <a:bodyPr/>
+                    <a:lstStyle/>
+                    <a:p>
+                      <a:endParaRPr kumimoji="1" lang="ja-JP" altLang="en-US" sz="2000" dirty="0"/>
+                    </a:p>
+                  </a:txBody>
+                  <a:tcPr/>
+                </a:tc>
+                <a:tc>
+                  <a:txBody>
+                    <a:bodyPr/>
+                    <a:lstStyle/>
+                    <a:p>
+                      <a:endParaRPr kumimoji="1" lang="ja-JP" altLang="en-US" sz="2000"/>
+                    </a:p>
+                  </a:txBody>
+                  <a:tcPr/>
+                </a:tc>
+                <a:tc>
+                  <a:txBody>
+                    <a:bodyPr/>
+                    <a:lstStyle/>
+                    <a:p>
+                      <a:endParaRPr kumimoji="1" lang="ja-JP" altLang="en-US" sz="2000" dirty="0"/>
+                    </a:p>
+                  </a:txBody>
+                  <a:tcPr/>
+                </a:tc>
+                <a:extLst>
+                  <a:ext uri="{0D108BD9-81ED-4DB2-BD59-A6C34878D82A}">
+                    <a16:rowId xmlns:a16="http://schemas.microsoft.com/office/drawing/2014/main" val="3518915577"/>
+                  </a:ext>
+                </a:extLst>
+              </a:tr>
+            </a:tbl>
+          </a:graphicData>
+        </a:graphic>
+      </p:graphicFrame>
+      <p:graphicFrame>
+        <p:nvGraphicFramePr>
+          <p:cNvPr id="11" name="表 10">
+            <a:extLst>
+              <a:ext uri="{FF2B5EF4-FFF2-40B4-BE49-F238E27FC236}">
+                <a16:creationId xmlns:a16="http://schemas.microsoft.com/office/drawing/2014/main" id="{24B1AADA-B8B2-9DE4-2B40-955C8BE8E048}"/>
+              </a:ext>
+            </a:extLst>
+          </p:cNvPr>
+          <p:cNvGraphicFramePr>
+            <a:graphicFrameLocks noGrp="1"/>
+          </p:cNvGraphicFramePr>
+          <p:nvPr>
+            <p:extLst>
+              <p:ext uri="{D42A27DB-BD31-4B8C-83A1-F6EECF244321}">
+                <p14:modId xmlns:p14="http://schemas.microsoft.com/office/powerpoint/2010/main" val="3498574690"/>
+              </p:ext>
+            </p:extLst>
+          </p:nvPr>
+        </p:nvGraphicFramePr>
+        <p:xfrm>
+          <a:off x="125968" y="4216589"/>
+          <a:ext cx="5893830" cy="1188720"/>
+        </p:xfrm>
+        <a:graphic>
+          <a:graphicData uri="http://schemas.openxmlformats.org/drawingml/2006/table">
+            <a:tbl>
+              <a:tblPr firstRow="1" bandRow="1">
+                <a:tableStyleId>{5C22544A-7EE6-4342-B048-85BDC9FD1C3A}</a:tableStyleId>
+              </a:tblPr>
+              <a:tblGrid>
+                <a:gridCol w="1964610">
+                  <a:extLst>
+                    <a:ext uri="{9D8B030D-6E8A-4147-A177-3AD203B41FA5}">
+                      <a16:colId xmlns:a16="http://schemas.microsoft.com/office/drawing/2014/main" val="5930721"/>
+                    </a:ext>
+                  </a:extLst>
+                </a:gridCol>
+                <a:gridCol w="1964610">
+                  <a:extLst>
+                    <a:ext uri="{9D8B030D-6E8A-4147-A177-3AD203B41FA5}">
+                      <a16:colId xmlns:a16="http://schemas.microsoft.com/office/drawing/2014/main" val="95815794"/>
+                    </a:ext>
+                  </a:extLst>
+                </a:gridCol>
+                <a:gridCol w="1964610">
+                  <a:extLst>
+                    <a:ext uri="{9D8B030D-6E8A-4147-A177-3AD203B41FA5}">
+                      <a16:colId xmlns:a16="http://schemas.microsoft.com/office/drawing/2014/main" val="1897232299"/>
+                    </a:ext>
+                  </a:extLst>
+                </a:gridCol>
+              </a:tblGrid>
+              <a:tr h="370840">
+                <a:tc>
+                  <a:txBody>
+                    <a:bodyPr/>
+                    <a:lstStyle/>
+                    <a:p>
+                      <a:endParaRPr kumimoji="1" lang="ja-JP" altLang="en-US" sz="2000" b="0" dirty="0">
+                        <a:solidFill>
+                          <a:schemeClr val="tx1"/>
+                        </a:solidFill>
+                      </a:endParaRPr>
+                    </a:p>
+                  </a:txBody>
+                  <a:tcPr>
+                    <a:lnB w="12700" cap="flat" cmpd="sng" algn="ctr">
+                      <a:solidFill>
+                        <a:schemeClr val="bg1"/>
+                      </a:solidFill>
+                      <a:prstDash val="solid"/>
+                      <a:round/>
+                      <a:headEnd type="none" w="med" len="med"/>
+                      <a:tailEnd type="none" w="med" len="med"/>
+                    </a:lnB>
+                    <a:solidFill>
+                      <a:srgbClr val="E7EBF4"/>
+                    </a:solidFill>
+                  </a:tcPr>
+                </a:tc>
+                <a:tc>
+                  <a:txBody>
+                    <a:bodyPr/>
+                    <a:lstStyle/>
+                    <a:p>
+                      <a:endParaRPr kumimoji="1" lang="ja-JP" altLang="en-US" sz="2000" b="0" dirty="0">
+                        <a:solidFill>
+                          <a:schemeClr val="tx1"/>
+                        </a:solidFill>
+                      </a:endParaRPr>
+                    </a:p>
+                  </a:txBody>
+                  <a:tcPr>
+                    <a:lnB w="12700" cap="flat" cmpd="sng" algn="ctr">
+                      <a:solidFill>
+                        <a:schemeClr val="bg1"/>
+                      </a:solidFill>
+                      <a:prstDash val="solid"/>
+                      <a:round/>
+                      <a:headEnd type="none" w="med" len="med"/>
+                      <a:tailEnd type="none" w="med" len="med"/>
+                    </a:lnB>
+                    <a:solidFill>
+                      <a:srgbClr val="E7EBF4"/>
+                    </a:solidFill>
+                  </a:tcPr>
+                </a:tc>
+                <a:tc>
+                  <a:txBody>
+                    <a:bodyPr/>
+                    <a:lstStyle/>
+                    <a:p>
+                      <a:endParaRPr kumimoji="1" lang="ja-JP" altLang="en-US" sz="2000" b="0" dirty="0">
+                        <a:solidFill>
+                          <a:schemeClr val="tx1"/>
+                        </a:solidFill>
+                      </a:endParaRPr>
+                    </a:p>
+                  </a:txBody>
+                  <a:tcPr>
+                    <a:lnB w="12700" cap="flat" cmpd="sng" algn="ctr">
+                      <a:solidFill>
+                        <a:schemeClr val="bg1"/>
+                      </a:solidFill>
+                      <a:prstDash val="solid"/>
+                      <a:round/>
+                      <a:headEnd type="none" w="med" len="med"/>
+                      <a:tailEnd type="none" w="med" len="med"/>
+                    </a:lnB>
+                    <a:solidFill>
+                      <a:srgbClr val="E7EBF4"/>
+                    </a:solidFill>
+                  </a:tcPr>
+                </a:tc>
+                <a:extLst>
+                  <a:ext uri="{0D108BD9-81ED-4DB2-BD59-A6C34878D82A}">
+                    <a16:rowId xmlns:a16="http://schemas.microsoft.com/office/drawing/2014/main" val="1261456025"/>
+                  </a:ext>
+                </a:extLst>
+              </a:tr>
+              <a:tr h="370840">
+                <a:tc>
+                  <a:txBody>
+                    <a:bodyPr/>
+                    <a:lstStyle/>
+                    <a:p>
+                      <a:endParaRPr kumimoji="1" lang="ja-JP" altLang="en-US" sz="2000" dirty="0"/>
+                    </a:p>
+                  </a:txBody>
+                  <a:tcPr>
+                    <a:lnT w="12700" cap="flat" cmpd="sng" algn="ctr">
+                      <a:solidFill>
+                        <a:schemeClr val="bg1"/>
+                      </a:solidFill>
+                      <a:prstDash val="solid"/>
+                      <a:round/>
+                      <a:headEnd type="none" w="med" len="med"/>
+                      <a:tailEnd type="none" w="med" len="med"/>
+                    </a:lnT>
+                  </a:tcPr>
+                </a:tc>
+                <a:tc>
+                  <a:txBody>
+                    <a:bodyPr/>
+                    <a:lstStyle/>
+                    <a:p>
+                      <a:endParaRPr kumimoji="1" lang="ja-JP" altLang="en-US" sz="2000"/>
+                    </a:p>
+                  </a:txBody>
+                  <a:tcPr>
+                    <a:lnT w="12700" cap="flat" cmpd="sng" algn="ctr">
+                      <a:solidFill>
+                        <a:schemeClr val="bg1"/>
+                      </a:solidFill>
+                      <a:prstDash val="solid"/>
+                      <a:round/>
+                      <a:headEnd type="none" w="med" len="med"/>
+                      <a:tailEnd type="none" w="med" len="med"/>
+                    </a:lnT>
+                  </a:tcPr>
+                </a:tc>
+                <a:tc>
+                  <a:txBody>
+                    <a:bodyPr/>
+                    <a:lstStyle/>
+                    <a:p>
+                      <a:endParaRPr kumimoji="1" lang="ja-JP" altLang="en-US" sz="2000"/>
+                    </a:p>
+                  </a:txBody>
+                  <a:tcPr>
+                    <a:lnT w="12700" cap="flat" cmpd="sng" algn="ctr">
+                      <a:solidFill>
+                        <a:schemeClr val="bg1"/>
+                      </a:solidFill>
+                      <a:prstDash val="solid"/>
+                      <a:round/>
+                      <a:headEnd type="none" w="med" len="med"/>
+                      <a:tailEnd type="none" w="med" len="med"/>
+                    </a:lnT>
+                  </a:tcPr>
+                </a:tc>
+                <a:extLst>
+                  <a:ext uri="{0D108BD9-81ED-4DB2-BD59-A6C34878D82A}">
+                    <a16:rowId xmlns:a16="http://schemas.microsoft.com/office/drawing/2014/main" val="116551845"/>
+                  </a:ext>
+                </a:extLst>
+              </a:tr>
+              <a:tr h="370840">
+                <a:tc>
+                  <a:txBody>
+                    <a:bodyPr/>
+                    <a:lstStyle/>
+                    <a:p>
+                      <a:endParaRPr kumimoji="1" lang="ja-JP" altLang="en-US" sz="2000" dirty="0"/>
+                    </a:p>
+                  </a:txBody>
+                  <a:tcPr/>
+                </a:tc>
+                <a:tc>
+                  <a:txBody>
+                    <a:bodyPr/>
+                    <a:lstStyle/>
+                    <a:p>
+                      <a:endParaRPr kumimoji="1" lang="ja-JP" altLang="en-US" sz="2000" dirty="0"/>
+                    </a:p>
+                  </a:txBody>
+                  <a:tcPr/>
+                </a:tc>
+                <a:tc>
+                  <a:txBody>
+                    <a:bodyPr/>
+                    <a:lstStyle/>
+                    <a:p>
+                      <a:endParaRPr kumimoji="1" lang="ja-JP" altLang="en-US" sz="2000" dirty="0"/>
+                    </a:p>
+                  </a:txBody>
+                  <a:tcPr/>
+                </a:tc>
+                <a:extLst>
+                  <a:ext uri="{0D108BD9-81ED-4DB2-BD59-A6C34878D82A}">
+                    <a16:rowId xmlns:a16="http://schemas.microsoft.com/office/drawing/2014/main" val="3518915577"/>
+                  </a:ext>
+                </a:extLst>
+              </a:tr>
+            </a:tbl>
+          </a:graphicData>
+        </a:graphic>
+      </p:graphicFrame>
+      <p:graphicFrame>
+        <p:nvGraphicFramePr>
+          <p:cNvPr id="13" name="表 12">
+            <a:extLst>
+              <a:ext uri="{FF2B5EF4-FFF2-40B4-BE49-F238E27FC236}">
+                <a16:creationId xmlns:a16="http://schemas.microsoft.com/office/drawing/2014/main" id="{6F7796FD-7A2F-85DA-2C73-A7986AE06DB6}"/>
+              </a:ext>
+            </a:extLst>
+          </p:cNvPr>
+          <p:cNvGraphicFramePr>
+            <a:graphicFrameLocks noGrp="1"/>
+          </p:cNvGraphicFramePr>
+          <p:nvPr>
+            <p:extLst>
+              <p:ext uri="{D42A27DB-BD31-4B8C-83A1-F6EECF244321}">
+                <p14:modId xmlns:p14="http://schemas.microsoft.com/office/powerpoint/2010/main" val="149927078"/>
+              </p:ext>
+            </p:extLst>
+          </p:nvPr>
+        </p:nvGraphicFramePr>
+        <p:xfrm>
+          <a:off x="125968" y="5510805"/>
+          <a:ext cx="11940060" cy="1188720"/>
+        </p:xfrm>
+        <a:graphic>
+          <a:graphicData uri="http://schemas.openxmlformats.org/drawingml/2006/table">
+            <a:tbl>
+              <a:tblPr firstRow="1" bandRow="1">
+                <a:tableStyleId>{5C22544A-7EE6-4342-B048-85BDC9FD1C3A}</a:tableStyleId>
+              </a:tblPr>
+              <a:tblGrid>
+                <a:gridCol w="3980020">
+                  <a:extLst>
+                    <a:ext uri="{9D8B030D-6E8A-4147-A177-3AD203B41FA5}">
+                      <a16:colId xmlns:a16="http://schemas.microsoft.com/office/drawing/2014/main" val="5930721"/>
+                    </a:ext>
+                  </a:extLst>
+                </a:gridCol>
+                <a:gridCol w="3980020">
+                  <a:extLst>
+                    <a:ext uri="{9D8B030D-6E8A-4147-A177-3AD203B41FA5}">
+                      <a16:colId xmlns:a16="http://schemas.microsoft.com/office/drawing/2014/main" val="95815794"/>
+                    </a:ext>
+                  </a:extLst>
+                </a:gridCol>
+                <a:gridCol w="3980020">
+                  <a:extLst>
+                    <a:ext uri="{9D8B030D-6E8A-4147-A177-3AD203B41FA5}">
+                      <a16:colId xmlns:a16="http://schemas.microsoft.com/office/drawing/2014/main" val="1897232299"/>
+                    </a:ext>
+                  </a:extLst>
+                </a:gridCol>
+              </a:tblGrid>
+              <a:tr h="370840">
+                <a:tc>
+                  <a:txBody>
+                    <a:bodyPr/>
+                    <a:lstStyle/>
+                    <a:p>
+                      <a:endParaRPr kumimoji="1" lang="ja-JP" altLang="en-US" sz="2000" b="0" dirty="0">
+                        <a:solidFill>
+                          <a:schemeClr val="tx1"/>
+                        </a:solidFill>
+                      </a:endParaRPr>
+                    </a:p>
+                  </a:txBody>
+                  <a:tcPr>
+                    <a:lnB w="12700" cap="flat" cmpd="sng" algn="ctr">
+                      <a:solidFill>
+                        <a:schemeClr val="bg1"/>
+                      </a:solidFill>
+                      <a:prstDash val="solid"/>
+                      <a:round/>
+                      <a:headEnd type="none" w="med" len="med"/>
+                      <a:tailEnd type="none" w="med" len="med"/>
+                    </a:lnB>
+                    <a:solidFill>
+                      <a:srgbClr val="E7EBF4"/>
+                    </a:solidFill>
+                  </a:tcPr>
+                </a:tc>
+                <a:tc>
+                  <a:txBody>
+                    <a:bodyPr/>
+                    <a:lstStyle/>
+                    <a:p>
+                      <a:endParaRPr kumimoji="1" lang="ja-JP" altLang="en-US" sz="2000" b="0" dirty="0">
+                        <a:solidFill>
+                          <a:schemeClr val="tx1"/>
+                        </a:solidFill>
+                      </a:endParaRPr>
+                    </a:p>
+                  </a:txBody>
+                  <a:tcPr>
+                    <a:lnB w="12700" cap="flat" cmpd="sng" algn="ctr">
+                      <a:solidFill>
+                        <a:schemeClr val="bg1"/>
+                      </a:solidFill>
+                      <a:prstDash val="solid"/>
+                      <a:round/>
+                      <a:headEnd type="none" w="med" len="med"/>
+                      <a:tailEnd type="none" w="med" len="med"/>
+                    </a:lnB>
+                    <a:solidFill>
+                      <a:srgbClr val="E7EBF4"/>
+                    </a:solidFill>
+                  </a:tcPr>
+                </a:tc>
+                <a:tc>
+                  <a:txBody>
+                    <a:bodyPr/>
+                    <a:lstStyle/>
+                    <a:p>
+                      <a:endParaRPr kumimoji="1" lang="ja-JP" altLang="en-US" sz="2000" b="0" dirty="0">
+                        <a:solidFill>
+                          <a:schemeClr val="tx1"/>
+                        </a:solidFill>
+                      </a:endParaRPr>
+                    </a:p>
+                  </a:txBody>
+                  <a:tcPr>
+                    <a:lnB w="12700" cap="flat" cmpd="sng" algn="ctr">
+                      <a:solidFill>
+                        <a:schemeClr val="bg1"/>
+                      </a:solidFill>
+                      <a:prstDash val="solid"/>
+                      <a:round/>
+                      <a:headEnd type="none" w="med" len="med"/>
+                      <a:tailEnd type="none" w="med" len="med"/>
+                    </a:lnB>
+                    <a:solidFill>
+                      <a:srgbClr val="E7EBF4"/>
+                    </a:solidFill>
+                  </a:tcPr>
+                </a:tc>
+                <a:extLst>
+                  <a:ext uri="{0D108BD9-81ED-4DB2-BD59-A6C34878D82A}">
+                    <a16:rowId xmlns:a16="http://schemas.microsoft.com/office/drawing/2014/main" val="1261456025"/>
+                  </a:ext>
+                </a:extLst>
+              </a:tr>
+              <a:tr h="370840">
+                <a:tc>
+                  <a:txBody>
+                    <a:bodyPr/>
+                    <a:lstStyle/>
+                    <a:p>
+                      <a:endParaRPr kumimoji="1" lang="ja-JP" altLang="en-US" sz="2000" dirty="0"/>
+                    </a:p>
+                  </a:txBody>
+                  <a:tcPr>
+                    <a:lnT w="12700" cap="flat" cmpd="sng" algn="ctr">
+                      <a:solidFill>
+                        <a:schemeClr val="bg1"/>
+                      </a:solidFill>
+                      <a:prstDash val="solid"/>
+                      <a:round/>
+                      <a:headEnd type="none" w="med" len="med"/>
+                      <a:tailEnd type="none" w="med" len="med"/>
+                    </a:lnT>
+                  </a:tcPr>
+                </a:tc>
+                <a:tc>
+                  <a:txBody>
+                    <a:bodyPr/>
+                    <a:lstStyle/>
+                    <a:p>
+                      <a:endParaRPr kumimoji="1" lang="ja-JP" altLang="en-US" sz="2000" dirty="0"/>
+                    </a:p>
+                  </a:txBody>
+                  <a:tcPr>
+                    <a:lnT w="12700" cap="flat" cmpd="sng" algn="ctr">
+                      <a:solidFill>
+                        <a:schemeClr val="bg1"/>
+                      </a:solidFill>
+                      <a:prstDash val="solid"/>
+                      <a:round/>
+                      <a:headEnd type="none" w="med" len="med"/>
+                      <a:tailEnd type="none" w="med" len="med"/>
+                    </a:lnT>
+                  </a:tcPr>
+                </a:tc>
+                <a:tc>
+                  <a:txBody>
+                    <a:bodyPr/>
+                    <a:lstStyle/>
+                    <a:p>
+                      <a:endParaRPr kumimoji="1" lang="ja-JP" altLang="en-US" sz="2000" dirty="0"/>
+                    </a:p>
+                  </a:txBody>
+                  <a:tcPr>
+                    <a:lnT w="12700" cap="flat" cmpd="sng" algn="ctr">
+                      <a:solidFill>
+                        <a:schemeClr val="bg1"/>
+                      </a:solidFill>
+                      <a:prstDash val="solid"/>
+                      <a:round/>
+                      <a:headEnd type="none" w="med" len="med"/>
+                      <a:tailEnd type="none" w="med" len="med"/>
+                    </a:lnT>
+                  </a:tcPr>
+                </a:tc>
+                <a:extLst>
+                  <a:ext uri="{0D108BD9-81ED-4DB2-BD59-A6C34878D82A}">
+                    <a16:rowId xmlns:a16="http://schemas.microsoft.com/office/drawing/2014/main" val="116551845"/>
+                  </a:ext>
+                </a:extLst>
+              </a:tr>
+              <a:tr h="370840">
+                <a:tc>
+                  <a:txBody>
+                    <a:bodyPr/>
+                    <a:lstStyle/>
+                    <a:p>
+                      <a:endParaRPr kumimoji="1" lang="ja-JP" altLang="en-US" sz="2000" dirty="0"/>
+                    </a:p>
+                  </a:txBody>
+                  <a:tcPr/>
+                </a:tc>
+                <a:tc>
+                  <a:txBody>
+                    <a:bodyPr/>
+                    <a:lstStyle/>
+                    <a:p>
+                      <a:endParaRPr kumimoji="1" lang="ja-JP" altLang="en-US" sz="2000" dirty="0"/>
+                    </a:p>
+                  </a:txBody>
+                  <a:tcPr/>
+                </a:tc>
+                <a:tc>
+                  <a:txBody>
+                    <a:bodyPr/>
+                    <a:lstStyle/>
+                    <a:p>
+                      <a:endParaRPr kumimoji="1" lang="ja-JP" altLang="en-US" sz="2000" dirty="0"/>
+                    </a:p>
+                  </a:txBody>
+                  <a:tcPr/>
+                </a:tc>
+                <a:extLst>
+                  <a:ext uri="{0D108BD9-81ED-4DB2-BD59-A6C34878D82A}">
+                    <a16:rowId xmlns:a16="http://schemas.microsoft.com/office/drawing/2014/main" val="3518915577"/>
+                  </a:ext>
+                </a:extLst>
+              </a:tr>
+            </a:tbl>
+          </a:graphicData>
+        </a:graphic>
+      </p:graphicFrame>
+    </p:spTree>
+    <p:extLst>
+      <p:ext uri="{BB962C8B-B14F-4D97-AF65-F5344CB8AC3E}">
+        <p14:creationId xmlns:p14="http://schemas.microsoft.com/office/powerpoint/2010/main" val="3229514748"/>
+      </p:ext>
+    </p:extLst>
+  </p:cSld>
+  <p:clrMapOvr>
+    <a:masterClrMapping/>
+  </p:clrMapOvr>
+</p:sld>
+</file>
+
+<file path=ppt/slides/slide7.xml><?xml version="1.0" encoding="utf-8"?>
+<p:sld xmlns:a="http://schemas.openxmlformats.org/drawingml/2006/main" xmlns:r="http://schemas.openxmlformats.org/officeDocument/2006/relationships" xmlns:p="http://schemas.openxmlformats.org/presentationml/2006/main" show="0">
   <p:cSld>
     <p:spTree>
       <p:nvGrpSpPr>
@@ -6215,7 +9581,7 @@
           <a:p>
             <a:fld id="{9C0FEE9A-3EB6-844C-8184-5D808DF01412}" type="slidenum">
               <a:rPr kumimoji="1" lang="ja-JP" altLang="en-US" smtClean="0"/>
-              <a:t>6</a:t>
+              <a:t>7</a:t>
             </a:fld>
             <a:endParaRPr kumimoji="1" lang="ja-JP" altLang="en-US"/>
           </a:p>
@@ -6270,8 +9636,8 @@
 </p:sld>
 </file>
 
-<file path=ppt/slides/slide7.xml><?xml version="1.0" encoding="utf-8"?>
-<p:sld xmlns:a="http://schemas.openxmlformats.org/drawingml/2006/main" xmlns:r="http://schemas.openxmlformats.org/officeDocument/2006/relationships" xmlns:p="http://schemas.openxmlformats.org/presentationml/2006/main">
+<file path=ppt/slides/slide8.xml><?xml version="1.0" encoding="utf-8"?>
+<p:sld xmlns:a="http://schemas.openxmlformats.org/drawingml/2006/main" xmlns:r="http://schemas.openxmlformats.org/officeDocument/2006/relationships" xmlns:p="http://schemas.openxmlformats.org/presentationml/2006/main" show="0">
   <p:cSld>
     <p:spTree>
       <p:nvGrpSpPr>
@@ -6394,7 +9760,7 @@
           <a:p>
             <a:fld id="{9C0FEE9A-3EB6-844C-8184-5D808DF01412}" type="slidenum">
               <a:rPr kumimoji="1" lang="ja-JP" altLang="en-US" smtClean="0"/>
-              <a:t>7</a:t>
+              <a:t>8</a:t>
             </a:fld>
             <a:endParaRPr kumimoji="1" lang="ja-JP" altLang="en-US"/>
           </a:p>
@@ -6404,6 +9770,322 @@
     <p:extLst>
       <p:ext uri="{BB962C8B-B14F-4D97-AF65-F5344CB8AC3E}">
         <p14:creationId xmlns:p14="http://schemas.microsoft.com/office/powerpoint/2010/main" val="49776739"/>
+      </p:ext>
+    </p:extLst>
+  </p:cSld>
+  <p:clrMapOvr>
+    <a:masterClrMapping/>
+  </p:clrMapOvr>
+</p:sld>
+</file>
+
+<file path=ppt/slides/slide9.xml><?xml version="1.0" encoding="utf-8"?>
+<p:sld xmlns:a="http://schemas.openxmlformats.org/drawingml/2006/main" xmlns:r="http://schemas.openxmlformats.org/officeDocument/2006/relationships" xmlns:p="http://schemas.openxmlformats.org/presentationml/2006/main" show="0">
+  <p:cSld>
+    <p:spTree>
+      <p:nvGrpSpPr>
+        <p:cNvPr id="1" name=""/>
+        <p:cNvGrpSpPr/>
+        <p:nvPr/>
+      </p:nvGrpSpPr>
+      <p:grpSpPr>
+        <a:xfrm>
+          <a:off x="0" y="0"/>
+          <a:ext cx="0" cy="0"/>
+          <a:chOff x="0" y="0"/>
+          <a:chExt cx="0" cy="0"/>
+        </a:xfrm>
+      </p:grpSpPr>
+      <p:sp>
+        <p:nvSpPr>
+          <p:cNvPr id="2" name="タイトル 1">
+            <a:extLst>
+              <a:ext uri="{FF2B5EF4-FFF2-40B4-BE49-F238E27FC236}">
+                <a16:creationId xmlns:a16="http://schemas.microsoft.com/office/drawing/2014/main" id="{6B0A06C5-5728-FB34-BE1B-BBE643D64361}"/>
+              </a:ext>
+            </a:extLst>
+          </p:cNvPr>
+          <p:cNvSpPr>
+            <a:spLocks noGrp="1"/>
+          </p:cNvSpPr>
+          <p:nvPr>
+            <p:ph type="title"/>
+          </p:nvPr>
+        </p:nvSpPr>
+        <p:spPr/>
+        <p:txBody>
+          <a:bodyPr>
+            <a:normAutofit fontScale="90000"/>
+          </a:bodyPr>
+          <a:lstStyle/>
+          <a:p>
+            <a:r>
+              <a:rPr lang="en-US" altLang="ja-JP" dirty="0"/>
+              <a:t>2BOX</a:t>
+            </a:r>
+            <a:r>
+              <a:rPr lang="ja-JP" altLang="en-US" dirty="0"/>
+              <a:t>テンプレート</a:t>
+            </a:r>
+            <a:endParaRPr kumimoji="1" lang="ja-JP" altLang="en-US" dirty="0"/>
+          </a:p>
+        </p:txBody>
+      </p:sp>
+      <p:sp>
+        <p:nvSpPr>
+          <p:cNvPr id="3" name="コンテンツ プレースホルダー 2">
+            <a:extLst>
+              <a:ext uri="{FF2B5EF4-FFF2-40B4-BE49-F238E27FC236}">
+                <a16:creationId xmlns:a16="http://schemas.microsoft.com/office/drawing/2014/main" id="{2B21CBDD-3752-366B-A17B-79227B6731DB}"/>
+              </a:ext>
+            </a:extLst>
+          </p:cNvPr>
+          <p:cNvSpPr>
+            <a:spLocks noGrp="1"/>
+          </p:cNvSpPr>
+          <p:nvPr>
+            <p:ph sz="half" idx="1"/>
+          </p:nvPr>
+        </p:nvSpPr>
+        <p:spPr/>
+        <p:txBody>
+          <a:bodyPr/>
+          <a:lstStyle/>
+          <a:p>
+            <a:endParaRPr kumimoji="1" lang="ja-JP" altLang="en-US"/>
+          </a:p>
+        </p:txBody>
+      </p:sp>
+      <p:sp>
+        <p:nvSpPr>
+          <p:cNvPr id="4" name="コンテンツ プレースホルダー 3">
+            <a:extLst>
+              <a:ext uri="{FF2B5EF4-FFF2-40B4-BE49-F238E27FC236}">
+                <a16:creationId xmlns:a16="http://schemas.microsoft.com/office/drawing/2014/main" id="{6A772A11-6F31-511A-EC00-96CB165AF5AB}"/>
+              </a:ext>
+            </a:extLst>
+          </p:cNvPr>
+          <p:cNvSpPr>
+            <a:spLocks noGrp="1"/>
+          </p:cNvSpPr>
+          <p:nvPr>
+            <p:ph sz="half" idx="2"/>
+          </p:nvPr>
+        </p:nvSpPr>
+        <p:spPr/>
+        <p:txBody>
+          <a:bodyPr/>
+          <a:lstStyle/>
+          <a:p>
+            <a:endParaRPr kumimoji="1" lang="ja-JP" altLang="en-US"/>
+          </a:p>
+        </p:txBody>
+      </p:sp>
+      <p:sp>
+        <p:nvSpPr>
+          <p:cNvPr id="5" name="スライド番号プレースホルダー 4">
+            <a:extLst>
+              <a:ext uri="{FF2B5EF4-FFF2-40B4-BE49-F238E27FC236}">
+                <a16:creationId xmlns:a16="http://schemas.microsoft.com/office/drawing/2014/main" id="{22684A6F-4B49-A5D8-A529-CDFD5E44DB70}"/>
+              </a:ext>
+            </a:extLst>
+          </p:cNvPr>
+          <p:cNvSpPr>
+            <a:spLocks noGrp="1"/>
+          </p:cNvSpPr>
+          <p:nvPr>
+            <p:ph type="sldNum" sz="quarter" idx="12"/>
+          </p:nvPr>
+        </p:nvSpPr>
+        <p:spPr/>
+        <p:txBody>
+          <a:bodyPr/>
+          <a:lstStyle/>
+          <a:p>
+            <a:fld id="{9C0FEE9A-3EB6-844C-8184-5D808DF01412}" type="slidenum">
+              <a:rPr kumimoji="1" lang="ja-JP" altLang="en-US" smtClean="0"/>
+              <a:t>9</a:t>
+            </a:fld>
+            <a:endParaRPr kumimoji="1" lang="ja-JP" altLang="en-US"/>
+          </a:p>
+        </p:txBody>
+      </p:sp>
+      <p:sp>
+        <p:nvSpPr>
+          <p:cNvPr id="6" name="四角形: 角を丸くする 5">
+            <a:extLst>
+              <a:ext uri="{FF2B5EF4-FFF2-40B4-BE49-F238E27FC236}">
+                <a16:creationId xmlns:a16="http://schemas.microsoft.com/office/drawing/2014/main" id="{E24B1302-D9D3-03A3-FDAC-D7BAA03FA84F}"/>
+              </a:ext>
+            </a:extLst>
+          </p:cNvPr>
+          <p:cNvSpPr/>
+          <p:nvPr/>
+        </p:nvSpPr>
+        <p:spPr>
+          <a:xfrm>
+            <a:off x="125969" y="813575"/>
+            <a:ext cx="5893831" cy="5563759"/>
+          </a:xfrm>
+          <a:prstGeom prst="roundRect">
+            <a:avLst>
+              <a:gd name="adj" fmla="val 5227"/>
+            </a:avLst>
+          </a:prstGeom>
+          <a:solidFill>
+            <a:schemeClr val="bg1"/>
+          </a:solidFill>
+          <a:ln>
+            <a:solidFill>
+              <a:schemeClr val="tx1"/>
+            </a:solidFill>
+          </a:ln>
+        </p:spPr>
+        <p:style>
+          <a:lnRef idx="2">
+            <a:schemeClr val="accent1">
+              <a:shade val="15000"/>
+            </a:schemeClr>
+          </a:lnRef>
+          <a:fillRef idx="1">
+            <a:schemeClr val="accent1"/>
+          </a:fillRef>
+          <a:effectRef idx="0">
+            <a:schemeClr val="accent1"/>
+          </a:effectRef>
+          <a:fontRef idx="minor">
+            <a:schemeClr val="lt1"/>
+          </a:fontRef>
+        </p:style>
+        <p:txBody>
+          <a:bodyPr lIns="90000" tIns="90000" rIns="90000" bIns="90000" rtlCol="0" anchor="t">
+            <a:noAutofit/>
+          </a:bodyPr>
+          <a:lstStyle/>
+          <a:p>
+            <a:pPr algn="ctr"/>
+            <a:r>
+              <a:rPr kumimoji="1" lang="ja-JP" altLang="en-US" sz="2800" dirty="0">
+                <a:solidFill>
+                  <a:schemeClr val="tx1"/>
+                </a:solidFill>
+                <a:latin typeface="BIZ UDGothic" panose="020B0400000000000000" pitchFamily="49" charset="-128"/>
+                <a:ea typeface="BIZ UDGothic" panose="020B0400000000000000" pitchFamily="49" charset="-128"/>
+              </a:rPr>
+              <a:t>ボックスタイトルを入力</a:t>
+            </a:r>
+            <a:endParaRPr kumimoji="1" lang="en-US" altLang="ja-JP" sz="2800" dirty="0">
+              <a:solidFill>
+                <a:schemeClr val="tx1"/>
+              </a:solidFill>
+              <a:latin typeface="BIZ UDGothic" panose="020B0400000000000000" pitchFamily="49" charset="-128"/>
+              <a:ea typeface="BIZ UDGothic" panose="020B0400000000000000" pitchFamily="49" charset="-128"/>
+            </a:endParaRPr>
+          </a:p>
+          <a:p>
+            <a:r>
+              <a:rPr kumimoji="1" lang="ja-JP" altLang="en-US" sz="2400" dirty="0">
+                <a:solidFill>
+                  <a:schemeClr val="tx1"/>
+                </a:solidFill>
+                <a:latin typeface="BIZ UDGothic" panose="020B0400000000000000" pitchFamily="49" charset="-128"/>
+                <a:ea typeface="BIZ UDGothic" panose="020B0400000000000000" pitchFamily="49" charset="-128"/>
+              </a:rPr>
+              <a:t>テキストを入力</a:t>
+            </a:r>
+          </a:p>
+        </p:txBody>
+      </p:sp>
+      <p:sp>
+        <p:nvSpPr>
+          <p:cNvPr id="8" name="四角形: 角を丸くする 7">
+            <a:extLst>
+              <a:ext uri="{FF2B5EF4-FFF2-40B4-BE49-F238E27FC236}">
+                <a16:creationId xmlns:a16="http://schemas.microsoft.com/office/drawing/2014/main" id="{FEACC16E-5722-A959-97EE-5F177F012344}"/>
+              </a:ext>
+            </a:extLst>
+          </p:cNvPr>
+          <p:cNvSpPr/>
+          <p:nvPr/>
+        </p:nvSpPr>
+        <p:spPr>
+          <a:xfrm>
+            <a:off x="6172198" y="813574"/>
+            <a:ext cx="5893831" cy="5563759"/>
+          </a:xfrm>
+          <a:prstGeom prst="roundRect">
+            <a:avLst>
+              <a:gd name="adj" fmla="val 5227"/>
+            </a:avLst>
+          </a:prstGeom>
+          <a:solidFill>
+            <a:schemeClr val="bg1"/>
+          </a:solidFill>
+          <a:ln>
+            <a:solidFill>
+              <a:schemeClr val="tx1"/>
+            </a:solidFill>
+          </a:ln>
+        </p:spPr>
+        <p:style>
+          <a:lnRef idx="2">
+            <a:schemeClr val="accent1">
+              <a:shade val="15000"/>
+            </a:schemeClr>
+          </a:lnRef>
+          <a:fillRef idx="1">
+            <a:schemeClr val="accent1"/>
+          </a:fillRef>
+          <a:effectRef idx="0">
+            <a:schemeClr val="accent1"/>
+          </a:effectRef>
+          <a:fontRef idx="minor">
+            <a:schemeClr val="lt1"/>
+          </a:fontRef>
+        </p:style>
+        <p:txBody>
+          <a:bodyPr lIns="90000" tIns="90000" rIns="90000" bIns="90000" rtlCol="0" anchor="t">
+            <a:noAutofit/>
+          </a:bodyPr>
+          <a:lstStyle/>
+          <a:p>
+            <a:pPr algn="ctr"/>
+            <a:r>
+              <a:rPr kumimoji="1" lang="ja-JP" altLang="en-US" sz="2800" dirty="0">
+                <a:solidFill>
+                  <a:schemeClr val="tx1"/>
+                </a:solidFill>
+                <a:latin typeface="BIZ UDGothic" panose="020B0400000000000000" pitchFamily="49" charset="-128"/>
+                <a:ea typeface="BIZ UDGothic" panose="020B0400000000000000" pitchFamily="49" charset="-128"/>
+              </a:rPr>
+              <a:t>ボックスタイトルを入力</a:t>
+            </a:r>
+            <a:endParaRPr kumimoji="1" lang="en-US" altLang="ja-JP" sz="2800" dirty="0">
+              <a:solidFill>
+                <a:schemeClr val="tx1"/>
+              </a:solidFill>
+              <a:latin typeface="BIZ UDGothic" panose="020B0400000000000000" pitchFamily="49" charset="-128"/>
+              <a:ea typeface="BIZ UDGothic" panose="020B0400000000000000" pitchFamily="49" charset="-128"/>
+            </a:endParaRPr>
+          </a:p>
+          <a:p>
+            <a:r>
+              <a:rPr kumimoji="1" lang="ja-JP" altLang="en-US" sz="2400" dirty="0">
+                <a:solidFill>
+                  <a:schemeClr val="tx1"/>
+                </a:solidFill>
+                <a:latin typeface="BIZ UDGothic" panose="020B0400000000000000" pitchFamily="49" charset="-128"/>
+                <a:ea typeface="BIZ UDGothic" panose="020B0400000000000000" pitchFamily="49" charset="-128"/>
+              </a:rPr>
+              <a:t>テキストを入力</a:t>
+            </a:r>
+          </a:p>
+        </p:txBody>
+      </p:sp>
+    </p:spTree>
+    <p:extLst>
+      <p:ext uri="{BB962C8B-B14F-4D97-AF65-F5344CB8AC3E}">
+        <p14:creationId xmlns:p14="http://schemas.microsoft.com/office/powerpoint/2010/main" val="348717858"/>
       </p:ext>
     </p:extLst>
   </p:cSld>
